--- a/docs/Handled-Pitch-Deck.pptx
+++ b/docs/Handled-Pitch-Deck.pptx
@@ -5,27 +5,28 @@
     <p:sldMasterId id="2147483648" r:id="rId1"/>
   </p:sldMasterIdLst>
   <p:notesMasterIdLst>
-    <p:notesMasterId r:id="rId20"/>
+    <p:notesMasterId r:id="rId21"/>
   </p:notesMasterIdLst>
   <p:sldIdLst>
     <p:sldId id="256" r:id="rId2"/>
-    <p:sldId id="257" r:id="rId3"/>
-    <p:sldId id="258" r:id="rId4"/>
-    <p:sldId id="259" r:id="rId5"/>
-    <p:sldId id="260" r:id="rId6"/>
-    <p:sldId id="261" r:id="rId7"/>
-    <p:sldId id="262" r:id="rId8"/>
-    <p:sldId id="271" r:id="rId9"/>
-    <p:sldId id="270" r:id="rId10"/>
-    <p:sldId id="272" r:id="rId11"/>
-    <p:sldId id="273" r:id="rId12"/>
-    <p:sldId id="263" r:id="rId13"/>
-    <p:sldId id="274" r:id="rId14"/>
-    <p:sldId id="265" r:id="rId15"/>
-    <p:sldId id="266" r:id="rId16"/>
-    <p:sldId id="267" r:id="rId17"/>
-    <p:sldId id="268" r:id="rId18"/>
-    <p:sldId id="269" r:id="rId19"/>
+    <p:sldId id="275" r:id="rId3"/>
+    <p:sldId id="257" r:id="rId4"/>
+    <p:sldId id="258" r:id="rId5"/>
+    <p:sldId id="259" r:id="rId6"/>
+    <p:sldId id="260" r:id="rId7"/>
+    <p:sldId id="261" r:id="rId8"/>
+    <p:sldId id="262" r:id="rId9"/>
+    <p:sldId id="271" r:id="rId10"/>
+    <p:sldId id="270" r:id="rId11"/>
+    <p:sldId id="272" r:id="rId12"/>
+    <p:sldId id="273" r:id="rId13"/>
+    <p:sldId id="263" r:id="rId14"/>
+    <p:sldId id="274" r:id="rId15"/>
+    <p:sldId id="265" r:id="rId16"/>
+    <p:sldId id="266" r:id="rId17"/>
+    <p:sldId id="267" r:id="rId18"/>
+    <p:sldId id="268" r:id="rId19"/>
+    <p:sldId id="269" r:id="rId20"/>
   </p:sldIdLst>
   <p:sldSz cx="14630400" cy="8229600"/>
   <p:notesSz cx="8229600" cy="14630400"/>
@@ -343,6 +344,114 @@
   <p:cSld>
     <p:spTree>
       <p:nvGrpSpPr>
+        <p:cNvPr id="1" name="">
+          <a:extLst>
+            <a:ext uri="{FF2B5EF4-FFF2-40B4-BE49-F238E27FC236}">
+              <a16:creationId xmlns:a16="http://schemas.microsoft.com/office/drawing/2014/main" id="{5E537398-AE91-7290-B820-BE3A911C5FC6}"/>
+            </a:ext>
+          </a:extLst>
+        </p:cNvPr>
+        <p:cNvGrpSpPr/>
+        <p:nvPr/>
+      </p:nvGrpSpPr>
+      <p:grpSpPr>
+        <a:xfrm>
+          <a:off x="0" y="0"/>
+          <a:ext cx="0" cy="0"/>
+          <a:chOff x="0" y="0"/>
+          <a:chExt cx="0" cy="0"/>
+        </a:xfrm>
+      </p:grpSpPr>
+      <p:sp>
+        <p:nvSpPr>
+          <p:cNvPr id="2" name="Slide Image Placeholder 1">
+            <a:extLst>
+              <a:ext uri="{FF2B5EF4-FFF2-40B4-BE49-F238E27FC236}">
+                <a16:creationId xmlns:a16="http://schemas.microsoft.com/office/drawing/2014/main" id="{261741A7-AA18-3167-2B01-6CBAD6AE1966}"/>
+              </a:ext>
+            </a:extLst>
+          </p:cNvPr>
+          <p:cNvSpPr>
+            <a:spLocks noGrp="1" noRot="1" noChangeAspect="1"/>
+          </p:cNvSpPr>
+          <p:nvPr>
+            <p:ph type="sldImg"/>
+          </p:nvPr>
+        </p:nvSpPr>
+        <p:spPr/>
+      </p:sp>
+      <p:sp>
+        <p:nvSpPr>
+          <p:cNvPr id="3" name="Notes Placeholder 2">
+            <a:extLst>
+              <a:ext uri="{FF2B5EF4-FFF2-40B4-BE49-F238E27FC236}">
+                <a16:creationId xmlns:a16="http://schemas.microsoft.com/office/drawing/2014/main" id="{C79B4C41-E122-AE47-FAE7-6870828AEBDB}"/>
+              </a:ext>
+            </a:extLst>
+          </p:cNvPr>
+          <p:cNvSpPr>
+            <a:spLocks noGrp="1"/>
+          </p:cNvSpPr>
+          <p:nvPr>
+            <p:ph type="body" idx="1"/>
+          </p:nvPr>
+        </p:nvSpPr>
+        <p:spPr/>
+        <p:txBody>
+          <a:bodyPr/>
+          <a:lstStyle/>
+          <a:p>
+            <a:endParaRPr lang="en-US" dirty="0"/>
+          </a:p>
+        </p:txBody>
+      </p:sp>
+      <p:sp>
+        <p:nvSpPr>
+          <p:cNvPr id="4" name="Slide Number Placeholder 3">
+            <a:extLst>
+              <a:ext uri="{FF2B5EF4-FFF2-40B4-BE49-F238E27FC236}">
+                <a16:creationId xmlns:a16="http://schemas.microsoft.com/office/drawing/2014/main" id="{9D269FB5-5AC6-893E-2ADD-29E990B09D50}"/>
+              </a:ext>
+            </a:extLst>
+          </p:cNvPr>
+          <p:cNvSpPr>
+            <a:spLocks noGrp="1"/>
+          </p:cNvSpPr>
+          <p:nvPr>
+            <p:ph type="sldNum" sz="quarter" idx="10"/>
+          </p:nvPr>
+        </p:nvSpPr>
+        <p:spPr/>
+        <p:txBody>
+          <a:bodyPr/>
+          <a:lstStyle/>
+          <a:p>
+            <a:fld id="{F7021451-1387-4CA6-816F-3879F97B5CBC}" type="slidenum">
+              <a:rPr lang="en-US"/>
+              <a:t>10</a:t>
+            </a:fld>
+            <a:endParaRPr lang="en-US"/>
+          </a:p>
+        </p:txBody>
+      </p:sp>
+    </p:spTree>
+    <p:extLst>
+      <p:ext uri="{BB962C8B-B14F-4D97-AF65-F5344CB8AC3E}">
+        <p14:creationId xmlns:p14="http://schemas.microsoft.com/office/powerpoint/2010/main" val="2907429557"/>
+      </p:ext>
+    </p:extLst>
+  </p:cSld>
+  <p:clrMapOvr>
+    <a:masterClrMapping/>
+  </p:clrMapOvr>
+</p:notes>
+</file>
+
+<file path=ppt/notesSlides/notesSlide11.xml><?xml version="1.0" encoding="utf-8"?>
+<p:notes xmlns:a="http://schemas.openxmlformats.org/drawingml/2006/main" xmlns:r="http://schemas.openxmlformats.org/officeDocument/2006/relationships" xmlns:p="http://schemas.openxmlformats.org/presentationml/2006/main">
+  <p:cSld>
+    <p:spTree>
+      <p:nvGrpSpPr>
         <p:cNvPr id="1" name=""/>
         <p:cNvGrpSpPr/>
         <p:nvPr/>
@@ -403,7 +512,7 @@
           <a:p>
             <a:fld id="{F7021451-1387-4CA6-816F-3879F97B5CBC}" type="slidenum">
               <a:rPr lang="en-US"/>
-              <a:t>12</a:t>
+              <a:t>13</a:t>
             </a:fld>
             <a:endParaRPr lang="en-US"/>
           </a:p>
@@ -422,7 +531,7 @@
 </p:notes>
 </file>
 
-<file path=ppt/notesSlides/notesSlide11.xml><?xml version="1.0" encoding="utf-8"?>
+<file path=ppt/notesSlides/notesSlide12.xml><?xml version="1.0" encoding="utf-8"?>
 <p:notes xmlns:a="http://schemas.openxmlformats.org/drawingml/2006/main" xmlns:r="http://schemas.openxmlformats.org/officeDocument/2006/relationships" xmlns:p="http://schemas.openxmlformats.org/presentationml/2006/main">
   <p:cSld>
     <p:spTree>
@@ -511,7 +620,7 @@
           <a:p>
             <a:fld id="{F7021451-1387-4CA6-816F-3879F97B5CBC}" type="slidenum">
               <a:rPr lang="en-US"/>
-              <a:t>13</a:t>
+              <a:t>14</a:t>
             </a:fld>
             <a:endParaRPr lang="en-US"/>
           </a:p>
@@ -521,90 +630,6 @@
     <p:extLst>
       <p:ext uri="{BB962C8B-B14F-4D97-AF65-F5344CB8AC3E}">
         <p14:creationId xmlns:p14="http://schemas.microsoft.com/office/powerpoint/2010/main" val="164846687"/>
-      </p:ext>
-    </p:extLst>
-  </p:cSld>
-  <p:clrMapOvr>
-    <a:masterClrMapping/>
-  </p:clrMapOvr>
-</p:notes>
-</file>
-
-<file path=ppt/notesSlides/notesSlide12.xml><?xml version="1.0" encoding="utf-8"?>
-<p:notes xmlns:a="http://schemas.openxmlformats.org/drawingml/2006/main" xmlns:r="http://schemas.openxmlformats.org/officeDocument/2006/relationships" xmlns:p="http://schemas.openxmlformats.org/presentationml/2006/main">
-  <p:cSld>
-    <p:spTree>
-      <p:nvGrpSpPr>
-        <p:cNvPr id="1" name=""/>
-        <p:cNvGrpSpPr/>
-        <p:nvPr/>
-      </p:nvGrpSpPr>
-      <p:grpSpPr>
-        <a:xfrm>
-          <a:off x="0" y="0"/>
-          <a:ext cx="0" cy="0"/>
-          <a:chOff x="0" y="0"/>
-          <a:chExt cx="0" cy="0"/>
-        </a:xfrm>
-      </p:grpSpPr>
-      <p:sp>
-        <p:nvSpPr>
-          <p:cNvPr id="2" name="Slide Image Placeholder 1"/>
-          <p:cNvSpPr>
-            <a:spLocks noGrp="1" noRot="1" noChangeAspect="1"/>
-          </p:cNvSpPr>
-          <p:nvPr>
-            <p:ph type="sldImg"/>
-          </p:nvPr>
-        </p:nvSpPr>
-        <p:spPr/>
-      </p:sp>
-      <p:sp>
-        <p:nvSpPr>
-          <p:cNvPr id="3" name="Notes Placeholder 2"/>
-          <p:cNvSpPr>
-            <a:spLocks noGrp="1"/>
-          </p:cNvSpPr>
-          <p:nvPr>
-            <p:ph type="body" idx="1"/>
-          </p:nvPr>
-        </p:nvSpPr>
-        <p:spPr/>
-        <p:txBody>
-          <a:bodyPr/>
-          <a:lstStyle/>
-          <a:p>
-            <a:endParaRPr lang="en-US" dirty="0"/>
-          </a:p>
-        </p:txBody>
-      </p:sp>
-      <p:sp>
-        <p:nvSpPr>
-          <p:cNvPr id="4" name="Slide Number Placeholder 3"/>
-          <p:cNvSpPr>
-            <a:spLocks noGrp="1"/>
-          </p:cNvSpPr>
-          <p:nvPr>
-            <p:ph type="sldNum" sz="quarter" idx="10"/>
-          </p:nvPr>
-        </p:nvSpPr>
-        <p:spPr/>
-        <p:txBody>
-          <a:bodyPr/>
-          <a:lstStyle/>
-          <a:p>
-            <a:fld id="{F7021451-1387-4CA6-816F-3879F97B5CBC}" type="slidenum">
-              <a:rPr lang="en-US"/>
-              <a:t>14</a:t>
-            </a:fld>
-            <a:endParaRPr lang="en-US"/>
-          </a:p>
-        </p:txBody>
-      </p:sp>
-    </p:spTree>
-    <p:extLst>
-      <p:ext uri="{BB962C8B-B14F-4D97-AF65-F5344CB8AC3E}">
-        <p14:creationId xmlns:p14="http://schemas.microsoft.com/office/powerpoint/2010/main" val="1024086991"/>
       </p:ext>
     </p:extLst>
   </p:cSld>
@@ -950,7 +975,7 @@
 </p:notes>
 </file>
 
-<file path=ppt/notesSlides/notesSlide2.xml><?xml version="1.0" encoding="utf-8"?>
+<file path=ppt/notesSlides/notesSlide17.xml><?xml version="1.0" encoding="utf-8"?>
 <p:notes xmlns:a="http://schemas.openxmlformats.org/drawingml/2006/main" xmlns:r="http://schemas.openxmlformats.org/officeDocument/2006/relationships" xmlns:p="http://schemas.openxmlformats.org/presentationml/2006/main">
   <p:cSld>
     <p:spTree>
@@ -1015,7 +1040,7 @@
           <a:p>
             <a:fld id="{F7021451-1387-4CA6-816F-3879F97B5CBC}" type="slidenum">
               <a:rPr lang="en-US"/>
-              <a:t>2</a:t>
+              <a:t>19</a:t>
             </a:fld>
             <a:endParaRPr lang="en-US"/>
           </a:p>
@@ -1025,6 +1050,114 @@
     <p:extLst>
       <p:ext uri="{BB962C8B-B14F-4D97-AF65-F5344CB8AC3E}">
         <p14:creationId xmlns:p14="http://schemas.microsoft.com/office/powerpoint/2010/main" val="1024086991"/>
+      </p:ext>
+    </p:extLst>
+  </p:cSld>
+  <p:clrMapOvr>
+    <a:masterClrMapping/>
+  </p:clrMapOvr>
+</p:notes>
+</file>
+
+<file path=ppt/notesSlides/notesSlide2.xml><?xml version="1.0" encoding="utf-8"?>
+<p:notes xmlns:a="http://schemas.openxmlformats.org/drawingml/2006/main" xmlns:r="http://schemas.openxmlformats.org/officeDocument/2006/relationships" xmlns:p="http://schemas.openxmlformats.org/presentationml/2006/main">
+  <p:cSld>
+    <p:spTree>
+      <p:nvGrpSpPr>
+        <p:cNvPr id="1" name="">
+          <a:extLst>
+            <a:ext uri="{FF2B5EF4-FFF2-40B4-BE49-F238E27FC236}">
+              <a16:creationId xmlns:a16="http://schemas.microsoft.com/office/drawing/2014/main" id="{B453BA02-AD8B-5A02-27C3-1E357D5946CF}"/>
+            </a:ext>
+          </a:extLst>
+        </p:cNvPr>
+        <p:cNvGrpSpPr/>
+        <p:nvPr/>
+      </p:nvGrpSpPr>
+      <p:grpSpPr>
+        <a:xfrm>
+          <a:off x="0" y="0"/>
+          <a:ext cx="0" cy="0"/>
+          <a:chOff x="0" y="0"/>
+          <a:chExt cx="0" cy="0"/>
+        </a:xfrm>
+      </p:grpSpPr>
+      <p:sp>
+        <p:nvSpPr>
+          <p:cNvPr id="2" name="Slide Image Placeholder 1">
+            <a:extLst>
+              <a:ext uri="{FF2B5EF4-FFF2-40B4-BE49-F238E27FC236}">
+                <a16:creationId xmlns:a16="http://schemas.microsoft.com/office/drawing/2014/main" id="{500A551A-C1D7-0629-A06D-E7504D57155F}"/>
+              </a:ext>
+            </a:extLst>
+          </p:cNvPr>
+          <p:cNvSpPr>
+            <a:spLocks noGrp="1" noRot="1" noChangeAspect="1"/>
+          </p:cNvSpPr>
+          <p:nvPr>
+            <p:ph type="sldImg"/>
+          </p:nvPr>
+        </p:nvSpPr>
+        <p:spPr/>
+      </p:sp>
+      <p:sp>
+        <p:nvSpPr>
+          <p:cNvPr id="3" name="Notes Placeholder 2">
+            <a:extLst>
+              <a:ext uri="{FF2B5EF4-FFF2-40B4-BE49-F238E27FC236}">
+                <a16:creationId xmlns:a16="http://schemas.microsoft.com/office/drawing/2014/main" id="{912E3E1A-3196-BF0E-ECF0-A8BC84DD1724}"/>
+              </a:ext>
+            </a:extLst>
+          </p:cNvPr>
+          <p:cNvSpPr>
+            <a:spLocks noGrp="1"/>
+          </p:cNvSpPr>
+          <p:nvPr>
+            <p:ph type="body" idx="1"/>
+          </p:nvPr>
+        </p:nvSpPr>
+        <p:spPr/>
+        <p:txBody>
+          <a:bodyPr/>
+          <a:lstStyle/>
+          <a:p>
+            <a:endParaRPr lang="en-US" dirty="0"/>
+          </a:p>
+        </p:txBody>
+      </p:sp>
+      <p:sp>
+        <p:nvSpPr>
+          <p:cNvPr id="4" name="Slide Number Placeholder 3">
+            <a:extLst>
+              <a:ext uri="{FF2B5EF4-FFF2-40B4-BE49-F238E27FC236}">
+                <a16:creationId xmlns:a16="http://schemas.microsoft.com/office/drawing/2014/main" id="{FA08D0CB-81AD-B63D-271C-BC60323C6F61}"/>
+              </a:ext>
+            </a:extLst>
+          </p:cNvPr>
+          <p:cNvSpPr>
+            <a:spLocks noGrp="1"/>
+          </p:cNvSpPr>
+          <p:nvPr>
+            <p:ph type="sldNum" sz="quarter" idx="10"/>
+          </p:nvPr>
+        </p:nvSpPr>
+        <p:spPr/>
+        <p:txBody>
+          <a:bodyPr/>
+          <a:lstStyle/>
+          <a:p>
+            <a:fld id="{F7021451-1387-4CA6-816F-3879F97B5CBC}" type="slidenum">
+              <a:rPr lang="en-US"/>
+              <a:t>2</a:t>
+            </a:fld>
+            <a:endParaRPr lang="en-US"/>
+          </a:p>
+        </p:txBody>
+      </p:sp>
+    </p:spTree>
+    <p:extLst>
+      <p:ext uri="{BB962C8B-B14F-4D97-AF65-F5344CB8AC3E}">
+        <p14:creationId xmlns:p14="http://schemas.microsoft.com/office/powerpoint/2010/main" val="651211746"/>
       </p:ext>
     </p:extLst>
   </p:cSld>
@@ -1459,6 +1592,90 @@
   <p:cSld>
     <p:spTree>
       <p:nvGrpSpPr>
+        <p:cNvPr id="1" name=""/>
+        <p:cNvGrpSpPr/>
+        <p:nvPr/>
+      </p:nvGrpSpPr>
+      <p:grpSpPr>
+        <a:xfrm>
+          <a:off x="0" y="0"/>
+          <a:ext cx="0" cy="0"/>
+          <a:chOff x="0" y="0"/>
+          <a:chExt cx="0" cy="0"/>
+        </a:xfrm>
+      </p:grpSpPr>
+      <p:sp>
+        <p:nvSpPr>
+          <p:cNvPr id="2" name="Slide Image Placeholder 1"/>
+          <p:cNvSpPr>
+            <a:spLocks noGrp="1" noRot="1" noChangeAspect="1"/>
+          </p:cNvSpPr>
+          <p:nvPr>
+            <p:ph type="sldImg"/>
+          </p:nvPr>
+        </p:nvSpPr>
+        <p:spPr/>
+      </p:sp>
+      <p:sp>
+        <p:nvSpPr>
+          <p:cNvPr id="3" name="Notes Placeholder 2"/>
+          <p:cNvSpPr>
+            <a:spLocks noGrp="1"/>
+          </p:cNvSpPr>
+          <p:nvPr>
+            <p:ph type="body" idx="1"/>
+          </p:nvPr>
+        </p:nvSpPr>
+        <p:spPr/>
+        <p:txBody>
+          <a:bodyPr/>
+          <a:lstStyle/>
+          <a:p>
+            <a:endParaRPr lang="en-US" dirty="0"/>
+          </a:p>
+        </p:txBody>
+      </p:sp>
+      <p:sp>
+        <p:nvSpPr>
+          <p:cNvPr id="4" name="Slide Number Placeholder 3"/>
+          <p:cNvSpPr>
+            <a:spLocks noGrp="1"/>
+          </p:cNvSpPr>
+          <p:nvPr>
+            <p:ph type="sldNum" sz="quarter" idx="10"/>
+          </p:nvPr>
+        </p:nvSpPr>
+        <p:spPr/>
+        <p:txBody>
+          <a:bodyPr/>
+          <a:lstStyle/>
+          <a:p>
+            <a:fld id="{F7021451-1387-4CA6-816F-3879F97B5CBC}" type="slidenum">
+              <a:rPr lang="en-US"/>
+              <a:t>8</a:t>
+            </a:fld>
+            <a:endParaRPr lang="en-US"/>
+          </a:p>
+        </p:txBody>
+      </p:sp>
+    </p:spTree>
+    <p:extLst>
+      <p:ext uri="{BB962C8B-B14F-4D97-AF65-F5344CB8AC3E}">
+        <p14:creationId xmlns:p14="http://schemas.microsoft.com/office/powerpoint/2010/main" val="1024086991"/>
+      </p:ext>
+    </p:extLst>
+  </p:cSld>
+  <p:clrMapOvr>
+    <a:masterClrMapping/>
+  </p:clrMapOvr>
+</p:notes>
+</file>
+
+<file path=ppt/notesSlides/notesSlide9.xml><?xml version="1.0" encoding="utf-8"?>
+<p:notes xmlns:a="http://schemas.openxmlformats.org/drawingml/2006/main" xmlns:r="http://schemas.openxmlformats.org/officeDocument/2006/relationships" xmlns:p="http://schemas.openxmlformats.org/presentationml/2006/main">
+  <p:cSld>
+    <p:spTree>
+      <p:nvGrpSpPr>
         <p:cNvPr id="1" name="">
           <a:extLst>
             <a:ext uri="{FF2B5EF4-FFF2-40B4-BE49-F238E27FC236}">
@@ -1543,7 +1760,7 @@
           <a:p>
             <a:fld id="{F7021451-1387-4CA6-816F-3879F97B5CBC}" type="slidenum">
               <a:rPr lang="en-US"/>
-              <a:t>8</a:t>
+              <a:t>9</a:t>
             </a:fld>
             <a:endParaRPr lang="en-US"/>
           </a:p>
@@ -1553,114 +1770,6 @@
     <p:extLst>
       <p:ext uri="{BB962C8B-B14F-4D97-AF65-F5344CB8AC3E}">
         <p14:creationId xmlns:p14="http://schemas.microsoft.com/office/powerpoint/2010/main" val="4027625270"/>
-      </p:ext>
-    </p:extLst>
-  </p:cSld>
-  <p:clrMapOvr>
-    <a:masterClrMapping/>
-  </p:clrMapOvr>
-</p:notes>
-</file>
-
-<file path=ppt/notesSlides/notesSlide9.xml><?xml version="1.0" encoding="utf-8"?>
-<p:notes xmlns:a="http://schemas.openxmlformats.org/drawingml/2006/main" xmlns:r="http://schemas.openxmlformats.org/officeDocument/2006/relationships" xmlns:p="http://schemas.openxmlformats.org/presentationml/2006/main">
-  <p:cSld>
-    <p:spTree>
-      <p:nvGrpSpPr>
-        <p:cNvPr id="1" name="">
-          <a:extLst>
-            <a:ext uri="{FF2B5EF4-FFF2-40B4-BE49-F238E27FC236}">
-              <a16:creationId xmlns:a16="http://schemas.microsoft.com/office/drawing/2014/main" id="{5E537398-AE91-7290-B820-BE3A911C5FC6}"/>
-            </a:ext>
-          </a:extLst>
-        </p:cNvPr>
-        <p:cNvGrpSpPr/>
-        <p:nvPr/>
-      </p:nvGrpSpPr>
-      <p:grpSpPr>
-        <a:xfrm>
-          <a:off x="0" y="0"/>
-          <a:ext cx="0" cy="0"/>
-          <a:chOff x="0" y="0"/>
-          <a:chExt cx="0" cy="0"/>
-        </a:xfrm>
-      </p:grpSpPr>
-      <p:sp>
-        <p:nvSpPr>
-          <p:cNvPr id="2" name="Slide Image Placeholder 1">
-            <a:extLst>
-              <a:ext uri="{FF2B5EF4-FFF2-40B4-BE49-F238E27FC236}">
-                <a16:creationId xmlns:a16="http://schemas.microsoft.com/office/drawing/2014/main" id="{261741A7-AA18-3167-2B01-6CBAD6AE1966}"/>
-              </a:ext>
-            </a:extLst>
-          </p:cNvPr>
-          <p:cNvSpPr>
-            <a:spLocks noGrp="1" noRot="1" noChangeAspect="1"/>
-          </p:cNvSpPr>
-          <p:nvPr>
-            <p:ph type="sldImg"/>
-          </p:nvPr>
-        </p:nvSpPr>
-        <p:spPr/>
-      </p:sp>
-      <p:sp>
-        <p:nvSpPr>
-          <p:cNvPr id="3" name="Notes Placeholder 2">
-            <a:extLst>
-              <a:ext uri="{FF2B5EF4-FFF2-40B4-BE49-F238E27FC236}">
-                <a16:creationId xmlns:a16="http://schemas.microsoft.com/office/drawing/2014/main" id="{C79B4C41-E122-AE47-FAE7-6870828AEBDB}"/>
-              </a:ext>
-            </a:extLst>
-          </p:cNvPr>
-          <p:cNvSpPr>
-            <a:spLocks noGrp="1"/>
-          </p:cNvSpPr>
-          <p:nvPr>
-            <p:ph type="body" idx="1"/>
-          </p:nvPr>
-        </p:nvSpPr>
-        <p:spPr/>
-        <p:txBody>
-          <a:bodyPr/>
-          <a:lstStyle/>
-          <a:p>
-            <a:endParaRPr lang="en-US" dirty="0"/>
-          </a:p>
-        </p:txBody>
-      </p:sp>
-      <p:sp>
-        <p:nvSpPr>
-          <p:cNvPr id="4" name="Slide Number Placeholder 3">
-            <a:extLst>
-              <a:ext uri="{FF2B5EF4-FFF2-40B4-BE49-F238E27FC236}">
-                <a16:creationId xmlns:a16="http://schemas.microsoft.com/office/drawing/2014/main" id="{9D269FB5-5AC6-893E-2ADD-29E990B09D50}"/>
-              </a:ext>
-            </a:extLst>
-          </p:cNvPr>
-          <p:cNvSpPr>
-            <a:spLocks noGrp="1"/>
-          </p:cNvSpPr>
-          <p:nvPr>
-            <p:ph type="sldNum" sz="quarter" idx="10"/>
-          </p:nvPr>
-        </p:nvSpPr>
-        <p:spPr/>
-        <p:txBody>
-          <a:bodyPr/>
-          <a:lstStyle/>
-          <a:p>
-            <a:fld id="{F7021451-1387-4CA6-816F-3879F97B5CBC}" type="slidenum">
-              <a:rPr lang="en-US"/>
-              <a:t>9</a:t>
-            </a:fld>
-            <a:endParaRPr lang="en-US"/>
-          </a:p>
-        </p:txBody>
-      </p:sp>
-    </p:spTree>
-    <p:extLst>
-      <p:ext uri="{BB962C8B-B14F-4D97-AF65-F5344CB8AC3E}">
-        <p14:creationId xmlns:p14="http://schemas.microsoft.com/office/powerpoint/2010/main" val="2907429557"/>
       </p:ext>
     </p:extLst>
   </p:cSld>
@@ -2187,7 +2296,7 @@
                 <a:ea typeface="Arial" pitchFamily="34" charset="-122"/>
                 <a:cs typeface="Arial" pitchFamily="34" charset="-120"/>
               </a:rPr>
-              <a:t>Handled answers every call, books the job into your field-service schedule, and follows up — so owner-operators stop losing revenue to the competitor who picked up first.</a:t>
+              <a:t>Handled answers every text, books the job into your field-service schedule, and follows up — so owner-operators stop losing revenue to the competitor who picked up first.</a:t>
             </a:r>
             <a:endParaRPr lang="en-US" sz="1600" dirty="0"/>
           </a:p>
@@ -2358,7 +2467,7 @@
                 <a:ea typeface="Arial" pitchFamily="34" charset="-122"/>
                 <a:cs typeface="Arial" pitchFamily="34" charset="-120"/>
               </a:rPr>
-              <a:t>Answers every call</a:t>
+              <a:t>Answers every text</a:t>
             </a:r>
             <a:endParaRPr lang="en-US" sz="1400" dirty="0"/>
           </a:p>
@@ -2676,9 +2785,23 @@
 <file path=ppt/slides/slide10.xml><?xml version="1.0" encoding="utf-8"?>
 <p:sld xmlns:a="http://schemas.openxmlformats.org/drawingml/2006/main" xmlns:r="http://schemas.openxmlformats.org/officeDocument/2006/relationships" xmlns:p="http://schemas.openxmlformats.org/presentationml/2006/main">
   <p:cSld>
+    <p:bg>
+      <p:bgPr>
+        <a:solidFill>
+          <a:srgbClr val="FFFFFF"/>
+        </a:solidFill>
+        <a:effectLst/>
+      </p:bgPr>
+    </p:bg>
     <p:spTree>
       <p:nvGrpSpPr>
-        <p:cNvPr id="1" name=""/>
+        <p:cNvPr id="1" name="">
+          <a:extLst>
+            <a:ext uri="{FF2B5EF4-FFF2-40B4-BE49-F238E27FC236}">
+              <a16:creationId xmlns:a16="http://schemas.microsoft.com/office/drawing/2014/main" id="{25E26790-9AEB-6A23-6401-7AA4F182E8F9}"/>
+            </a:ext>
+          </a:extLst>
+        </p:cNvPr>
         <p:cNvGrpSpPr/>
         <p:nvPr/>
       </p:nvGrpSpPr>
@@ -2802,7 +2925,7 @@
                 </a:solidFill>
                 <a:latin typeface="Arial"/>
               </a:rPr>
-              <a:t>The remaining three specialists on the shared Claude Sonnet node — pricing, out-of-area, and the FAQ catch-all (2 of 2).</a:t>
+              <a:t>The intent / language router, then six specialist agents on one shared Claude Sonnet node (1 of 2).</a:t>
             </a:r>
           </a:p>
         </p:txBody>
@@ -2816,7 +2939,7 @@
           <p:nvPr/>
         </p:nvPicPr>
         <p:blipFill>
-          <a:blip r:embed="rId2"/>
+          <a:blip r:embed="rId3"/>
           <a:stretch>
             <a:fillRect/>
           </a:stretch>
@@ -2904,7 +3027,7 @@
                 </a:solidFill>
                 <a:latin typeface="Arial"/>
               </a:rPr>
-              <a:t>10 / 17</a:t>
+              <a:t>09 / 17</a:t>
             </a:r>
           </a:p>
         </p:txBody>
@@ -2917,7 +3040,741 @@
         </p:nvSpPr>
         <p:spPr>
           <a:xfrm>
-            <a:off x="822960" y="1783080"/>
+            <a:off x="822960" y="1737360"/>
+            <a:ext cx="12984480" cy="960120"/>
+          </a:xfrm>
+          <a:prstGeom prst="roundRect">
+            <a:avLst>
+              <a:gd name="adj" fmla="val 9523"/>
+            </a:avLst>
+          </a:prstGeom>
+          <a:solidFill>
+            <a:srgbClr val="FFFFFF"/>
+          </a:solidFill>
+          <a:ln w="12700">
+            <a:solidFill>
+              <a:srgbClr val="DADADB"/>
+            </a:solidFill>
+          </a:ln>
+          <a:effectLst/>
+        </p:spPr>
+        <p:style>
+          <a:lnRef idx="1">
+            <a:schemeClr val="accent1"/>
+          </a:lnRef>
+          <a:fillRef idx="3">
+            <a:schemeClr val="accent1"/>
+          </a:fillRef>
+          <a:effectRef idx="2">
+            <a:schemeClr val="accent1"/>
+          </a:effectRef>
+          <a:fontRef idx="minor">
+            <a:schemeClr val="lt1"/>
+          </a:fontRef>
+        </p:style>
+        <p:txBody>
+          <a:bodyPr rtlCol="0" anchor="ctr"/>
+          <a:lstStyle/>
+          <a:p>
+            <a:pPr algn="ctr"/>
+            <a:endParaRPr/>
+          </a:p>
+        </p:txBody>
+      </p:sp>
+      <p:sp>
+        <p:nvSpPr>
+          <p:cNvPr id="9" name="Rounded Rectangle 8"/>
+          <p:cNvSpPr/>
+          <p:nvPr/>
+        </p:nvSpPr>
+        <p:spPr>
+          <a:xfrm>
+            <a:off x="12350435" y="1920240"/>
+            <a:ext cx="1255836" cy="274320"/>
+          </a:xfrm>
+          <a:prstGeom prst="roundRect">
+            <a:avLst>
+              <a:gd name="adj" fmla="val 50000"/>
+            </a:avLst>
+          </a:prstGeom>
+          <a:solidFill>
+            <a:srgbClr val="E7EFFC"/>
+          </a:solidFill>
+          <a:ln>
+            <a:noFill/>
+          </a:ln>
+          <a:effectLst/>
+        </p:spPr>
+        <p:style>
+          <a:lnRef idx="1">
+            <a:schemeClr val="accent1"/>
+          </a:lnRef>
+          <a:fillRef idx="3">
+            <a:schemeClr val="accent1"/>
+          </a:fillRef>
+          <a:effectRef idx="2">
+            <a:schemeClr val="accent1"/>
+          </a:effectRef>
+          <a:fontRef idx="minor">
+            <a:schemeClr val="lt1"/>
+          </a:fontRef>
+        </p:style>
+        <p:txBody>
+          <a:bodyPr wrap="none" lIns="0" tIns="0" rIns="0" bIns="0" rtlCol="0" anchor="ctr"/>
+          <a:lstStyle/>
+          <a:p>
+            <a:pPr algn="ctr"/>
+            <a:r>
+              <a:rPr sz="900" b="1">
+                <a:solidFill>
+                  <a:srgbClr val="115ACB"/>
+                </a:solidFill>
+                <a:latin typeface="Arial"/>
+              </a:rPr>
+              <a:t>AI · Claude Haiku</a:t>
+            </a:r>
+          </a:p>
+        </p:txBody>
+      </p:sp>
+      <p:sp>
+        <p:nvSpPr>
+          <p:cNvPr id="10" name="TextBox 9"/>
+          <p:cNvSpPr txBox="1"/>
+          <p:nvPr/>
+        </p:nvSpPr>
+        <p:spPr>
+          <a:xfrm>
+            <a:off x="1024128" y="1938528"/>
+            <a:ext cx="11189147" cy="365760"/>
+          </a:xfrm>
+          <a:prstGeom prst="rect">
+            <a:avLst/>
+          </a:prstGeom>
+          <a:noFill/>
+        </p:spPr>
+        <p:txBody>
+          <a:bodyPr wrap="square" lIns="0" tIns="0" rIns="0" bIns="0" anchor="t">
+            <a:spAutoFit/>
+          </a:bodyPr>
+          <a:lstStyle/>
+          <a:p>
+            <a:pPr algn="l">
+              <a:lnSpc>
+                <a:spcPct val="100000"/>
+              </a:lnSpc>
+            </a:pPr>
+            <a:r>
+              <a:rPr sz="1500" b="1" i="0">
+                <a:solidFill>
+                  <a:srgbClr val="070A0E"/>
+                </a:solidFill>
+                <a:latin typeface="Arial"/>
+              </a:rPr>
+              <a:t>Router — intent + language</a:t>
+            </a:r>
+          </a:p>
+        </p:txBody>
+      </p:sp>
+      <p:sp>
+        <p:nvSpPr>
+          <p:cNvPr id="11" name="TextBox 10"/>
+          <p:cNvSpPr txBox="1"/>
+          <p:nvPr/>
+        </p:nvSpPr>
+        <p:spPr>
+          <a:xfrm>
+            <a:off x="1024128" y="2359152"/>
+            <a:ext cx="12582144" cy="347472"/>
+          </a:xfrm>
+          <a:prstGeom prst="rect">
+            <a:avLst/>
+          </a:prstGeom>
+          <a:noFill/>
+        </p:spPr>
+        <p:txBody>
+          <a:bodyPr wrap="square" lIns="0" tIns="0" rIns="0" bIns="0" anchor="t">
+            <a:spAutoFit/>
+          </a:bodyPr>
+          <a:lstStyle/>
+          <a:p>
+            <a:pPr algn="l">
+              <a:lnSpc>
+                <a:spcPct val="105000"/>
+              </a:lnSpc>
+            </a:pPr>
+            <a:r>
+              <a:rPr sz="1050" b="0" i="0">
+                <a:solidFill>
+                  <a:srgbClr val="4A4C4F"/>
+                </a:solidFill>
+                <a:latin typeface="Arial"/>
+              </a:rPr>
+              <a:t>Picks exactly one intent, detects language (en / es) and multi-intent; its output is never sent to the customer. Biases toward emergency when unsure.</a:t>
+            </a:r>
+          </a:p>
+        </p:txBody>
+      </p:sp>
+      <p:sp>
+        <p:nvSpPr>
+          <p:cNvPr id="12" name="Rounded Rectangle 11"/>
+          <p:cNvSpPr/>
+          <p:nvPr/>
+        </p:nvSpPr>
+        <p:spPr>
+          <a:xfrm>
+            <a:off x="1024128" y="2779776"/>
+            <a:ext cx="952713" cy="256032"/>
+          </a:xfrm>
+          <a:prstGeom prst="roundRect">
+            <a:avLst>
+              <a:gd name="adj" fmla="val 50000"/>
+            </a:avLst>
+          </a:prstGeom>
+          <a:solidFill>
+            <a:srgbClr val="FAFAFA"/>
+          </a:solidFill>
+          <a:ln w="9525">
+            <a:solidFill>
+              <a:srgbClr val="DADADB"/>
+            </a:solidFill>
+          </a:ln>
+          <a:effectLst/>
+        </p:spPr>
+        <p:style>
+          <a:lnRef idx="1">
+            <a:schemeClr val="accent1"/>
+          </a:lnRef>
+          <a:fillRef idx="3">
+            <a:schemeClr val="accent1"/>
+          </a:fillRef>
+          <a:effectRef idx="2">
+            <a:schemeClr val="accent1"/>
+          </a:effectRef>
+          <a:fontRef idx="minor">
+            <a:schemeClr val="lt1"/>
+          </a:fontRef>
+        </p:style>
+        <p:txBody>
+          <a:bodyPr wrap="none" lIns="0" tIns="0" rIns="0" bIns="0" rtlCol="0" anchor="ctr"/>
+          <a:lstStyle/>
+          <a:p>
+            <a:pPr algn="ctr"/>
+            <a:r>
+              <a:rPr sz="850" b="0">
+                <a:solidFill>
+                  <a:srgbClr val="4A4C4F"/>
+                </a:solidFill>
+                <a:latin typeface="Arial"/>
+              </a:rPr>
+              <a:t>temperature 0</a:t>
+            </a:r>
+          </a:p>
+        </p:txBody>
+      </p:sp>
+      <p:sp>
+        <p:nvSpPr>
+          <p:cNvPr id="13" name="Rounded Rectangle 12"/>
+          <p:cNvSpPr/>
+          <p:nvPr/>
+        </p:nvSpPr>
+        <p:spPr>
+          <a:xfrm>
+            <a:off x="2049993" y="2779776"/>
+            <a:ext cx="770839" cy="256032"/>
+          </a:xfrm>
+          <a:prstGeom prst="roundRect">
+            <a:avLst>
+              <a:gd name="adj" fmla="val 50000"/>
+            </a:avLst>
+          </a:prstGeom>
+          <a:solidFill>
+            <a:srgbClr val="FAFAFA"/>
+          </a:solidFill>
+          <a:ln w="9525">
+            <a:solidFill>
+              <a:srgbClr val="DADADB"/>
+            </a:solidFill>
+          </a:ln>
+          <a:effectLst/>
+        </p:spPr>
+        <p:style>
+          <a:lnRef idx="1">
+            <a:schemeClr val="accent1"/>
+          </a:lnRef>
+          <a:fillRef idx="3">
+            <a:schemeClr val="accent1"/>
+          </a:fillRef>
+          <a:effectRef idx="2">
+            <a:schemeClr val="accent1"/>
+          </a:effectRef>
+          <a:fontRef idx="minor">
+            <a:schemeClr val="lt1"/>
+          </a:fontRef>
+        </p:style>
+        <p:txBody>
+          <a:bodyPr wrap="none" lIns="0" tIns="0" rIns="0" bIns="0" rtlCol="0" anchor="ctr"/>
+          <a:lstStyle/>
+          <a:p>
+            <a:pPr algn="ctr"/>
+            <a:r>
+              <a:rPr sz="850" b="0">
+                <a:solidFill>
+                  <a:srgbClr val="4A4C4F"/>
+                </a:solidFill>
+                <a:latin typeface="Arial"/>
+              </a:rPr>
+              <a:t>256 tokens</a:t>
+            </a:r>
+          </a:p>
+        </p:txBody>
+      </p:sp>
+      <p:sp>
+        <p:nvSpPr>
+          <p:cNvPr id="14" name="Rounded Rectangle 13"/>
+          <p:cNvSpPr/>
+          <p:nvPr/>
+        </p:nvSpPr>
+        <p:spPr>
+          <a:xfrm>
+            <a:off x="2893984" y="2779776"/>
+            <a:ext cx="407090" cy="256032"/>
+          </a:xfrm>
+          <a:prstGeom prst="roundRect">
+            <a:avLst>
+              <a:gd name="adj" fmla="val 50000"/>
+            </a:avLst>
+          </a:prstGeom>
+          <a:solidFill>
+            <a:srgbClr val="FAFAFA"/>
+          </a:solidFill>
+          <a:ln w="9525">
+            <a:solidFill>
+              <a:srgbClr val="DADADB"/>
+            </a:solidFill>
+          </a:ln>
+          <a:effectLst/>
+        </p:spPr>
+        <p:style>
+          <a:lnRef idx="1">
+            <a:schemeClr val="accent1"/>
+          </a:lnRef>
+          <a:fillRef idx="3">
+            <a:schemeClr val="accent1"/>
+          </a:fillRef>
+          <a:effectRef idx="2">
+            <a:schemeClr val="accent1"/>
+          </a:effectRef>
+          <a:fontRef idx="minor">
+            <a:schemeClr val="lt1"/>
+          </a:fontRef>
+        </p:style>
+        <p:txBody>
+          <a:bodyPr wrap="none" lIns="0" tIns="0" rIns="0" bIns="0" rtlCol="0" anchor="ctr"/>
+          <a:lstStyle/>
+          <a:p>
+            <a:pPr algn="ctr"/>
+            <a:r>
+              <a:rPr sz="850" b="0">
+                <a:solidFill>
+                  <a:srgbClr val="4A4C4F"/>
+                </a:solidFill>
+                <a:latin typeface="Arial"/>
+              </a:rPr>
+              <a:t>book</a:t>
+            </a:r>
+          </a:p>
+        </p:txBody>
+      </p:sp>
+      <p:sp>
+        <p:nvSpPr>
+          <p:cNvPr id="15" name="Rounded Rectangle 14"/>
+          <p:cNvSpPr/>
+          <p:nvPr/>
+        </p:nvSpPr>
+        <p:spPr>
+          <a:xfrm>
+            <a:off x="3374227" y="2779776"/>
+            <a:ext cx="770839" cy="256032"/>
+          </a:xfrm>
+          <a:prstGeom prst="roundRect">
+            <a:avLst>
+              <a:gd name="adj" fmla="val 50000"/>
+            </a:avLst>
+          </a:prstGeom>
+          <a:solidFill>
+            <a:srgbClr val="FAFAFA"/>
+          </a:solidFill>
+          <a:ln w="9525">
+            <a:solidFill>
+              <a:srgbClr val="DADADB"/>
+            </a:solidFill>
+          </a:ln>
+          <a:effectLst/>
+        </p:spPr>
+        <p:style>
+          <a:lnRef idx="1">
+            <a:schemeClr val="accent1"/>
+          </a:lnRef>
+          <a:fillRef idx="3">
+            <a:schemeClr val="accent1"/>
+          </a:fillRef>
+          <a:effectRef idx="2">
+            <a:schemeClr val="accent1"/>
+          </a:effectRef>
+          <a:fontRef idx="minor">
+            <a:schemeClr val="lt1"/>
+          </a:fontRef>
+        </p:style>
+        <p:txBody>
+          <a:bodyPr wrap="none" lIns="0" tIns="0" rIns="0" bIns="0" rtlCol="0" anchor="ctr"/>
+          <a:lstStyle/>
+          <a:p>
+            <a:pPr algn="ctr"/>
+            <a:r>
+              <a:rPr sz="850" b="0">
+                <a:solidFill>
+                  <a:srgbClr val="4A4C4F"/>
+                </a:solidFill>
+                <a:latin typeface="Arial"/>
+              </a:rPr>
+              <a:t>reschedule</a:t>
+            </a:r>
+          </a:p>
+        </p:txBody>
+      </p:sp>
+      <p:sp>
+        <p:nvSpPr>
+          <p:cNvPr id="16" name="Rounded Rectangle 15"/>
+          <p:cNvSpPr/>
+          <p:nvPr/>
+        </p:nvSpPr>
+        <p:spPr>
+          <a:xfrm>
+            <a:off x="4218218" y="2779776"/>
+            <a:ext cx="528340" cy="256032"/>
+          </a:xfrm>
+          <a:prstGeom prst="roundRect">
+            <a:avLst>
+              <a:gd name="adj" fmla="val 50000"/>
+            </a:avLst>
+          </a:prstGeom>
+          <a:solidFill>
+            <a:srgbClr val="FAFAFA"/>
+          </a:solidFill>
+          <a:ln w="9525">
+            <a:solidFill>
+              <a:srgbClr val="DADADB"/>
+            </a:solidFill>
+          </a:ln>
+          <a:effectLst/>
+        </p:spPr>
+        <p:style>
+          <a:lnRef idx="1">
+            <a:schemeClr val="accent1"/>
+          </a:lnRef>
+          <a:fillRef idx="3">
+            <a:schemeClr val="accent1"/>
+          </a:fillRef>
+          <a:effectRef idx="2">
+            <a:schemeClr val="accent1"/>
+          </a:effectRef>
+          <a:fontRef idx="minor">
+            <a:schemeClr val="lt1"/>
+          </a:fontRef>
+        </p:style>
+        <p:txBody>
+          <a:bodyPr wrap="none" lIns="0" tIns="0" rIns="0" bIns="0" rtlCol="0" anchor="ctr"/>
+          <a:lstStyle/>
+          <a:p>
+            <a:pPr algn="ctr"/>
+            <a:r>
+              <a:rPr sz="850" b="0">
+                <a:solidFill>
+                  <a:srgbClr val="4A4C4F"/>
+                </a:solidFill>
+                <a:latin typeface="Arial"/>
+              </a:rPr>
+              <a:t>cancel</a:t>
+            </a:r>
+          </a:p>
+        </p:txBody>
+      </p:sp>
+      <p:sp>
+        <p:nvSpPr>
+          <p:cNvPr id="17" name="Rounded Rectangle 16"/>
+          <p:cNvSpPr/>
+          <p:nvPr/>
+        </p:nvSpPr>
+        <p:spPr>
+          <a:xfrm>
+            <a:off x="4819710" y="2779776"/>
+            <a:ext cx="710214" cy="256032"/>
+          </a:xfrm>
+          <a:prstGeom prst="roundRect">
+            <a:avLst>
+              <a:gd name="adj" fmla="val 50000"/>
+            </a:avLst>
+          </a:prstGeom>
+          <a:solidFill>
+            <a:srgbClr val="FAFAFA"/>
+          </a:solidFill>
+          <a:ln w="9525">
+            <a:solidFill>
+              <a:srgbClr val="DADADB"/>
+            </a:solidFill>
+          </a:ln>
+          <a:effectLst/>
+        </p:spPr>
+        <p:style>
+          <a:lnRef idx="1">
+            <a:schemeClr val="accent1"/>
+          </a:lnRef>
+          <a:fillRef idx="3">
+            <a:schemeClr val="accent1"/>
+          </a:fillRef>
+          <a:effectRef idx="2">
+            <a:schemeClr val="accent1"/>
+          </a:effectRef>
+          <a:fontRef idx="minor">
+            <a:schemeClr val="lt1"/>
+          </a:fontRef>
+        </p:style>
+        <p:txBody>
+          <a:bodyPr wrap="none" lIns="0" tIns="0" rIns="0" bIns="0" rtlCol="0" anchor="ctr"/>
+          <a:lstStyle/>
+          <a:p>
+            <a:pPr algn="ctr"/>
+            <a:r>
+              <a:rPr sz="850" b="0">
+                <a:solidFill>
+                  <a:srgbClr val="4A4C4F"/>
+                </a:solidFill>
+                <a:latin typeface="Arial"/>
+              </a:rPr>
+              <a:t>emergency</a:t>
+            </a:r>
+          </a:p>
+        </p:txBody>
+      </p:sp>
+      <p:sp>
+        <p:nvSpPr>
+          <p:cNvPr id="18" name="Rounded Rectangle 17"/>
+          <p:cNvSpPr/>
+          <p:nvPr/>
+        </p:nvSpPr>
+        <p:spPr>
+          <a:xfrm>
+            <a:off x="5603077" y="2779776"/>
+            <a:ext cx="588965" cy="256032"/>
+          </a:xfrm>
+          <a:prstGeom prst="roundRect">
+            <a:avLst>
+              <a:gd name="adj" fmla="val 50000"/>
+            </a:avLst>
+          </a:prstGeom>
+          <a:solidFill>
+            <a:srgbClr val="FAFAFA"/>
+          </a:solidFill>
+          <a:ln w="9525">
+            <a:solidFill>
+              <a:srgbClr val="DADADB"/>
+            </a:solidFill>
+          </a:ln>
+          <a:effectLst/>
+        </p:spPr>
+        <p:style>
+          <a:lnRef idx="1">
+            <a:schemeClr val="accent1"/>
+          </a:lnRef>
+          <a:fillRef idx="3">
+            <a:schemeClr val="accent1"/>
+          </a:fillRef>
+          <a:effectRef idx="2">
+            <a:schemeClr val="accent1"/>
+          </a:effectRef>
+          <a:fontRef idx="minor">
+            <a:schemeClr val="lt1"/>
+          </a:fontRef>
+        </p:style>
+        <p:txBody>
+          <a:bodyPr wrap="none" lIns="0" tIns="0" rIns="0" bIns="0" rtlCol="0" anchor="ctr"/>
+          <a:lstStyle/>
+          <a:p>
+            <a:pPr algn="ctr"/>
+            <a:r>
+              <a:rPr sz="850" b="0">
+                <a:solidFill>
+                  <a:srgbClr val="4A4C4F"/>
+                </a:solidFill>
+                <a:latin typeface="Arial"/>
+              </a:rPr>
+              <a:t>pricing</a:t>
+            </a:r>
+          </a:p>
+        </p:txBody>
+      </p:sp>
+      <p:sp>
+        <p:nvSpPr>
+          <p:cNvPr id="19" name="Rounded Rectangle 18"/>
+          <p:cNvSpPr/>
+          <p:nvPr/>
+        </p:nvSpPr>
+        <p:spPr>
+          <a:xfrm>
+            <a:off x="6265194" y="2779776"/>
+            <a:ext cx="831463" cy="256032"/>
+          </a:xfrm>
+          <a:prstGeom prst="roundRect">
+            <a:avLst>
+              <a:gd name="adj" fmla="val 50000"/>
+            </a:avLst>
+          </a:prstGeom>
+          <a:solidFill>
+            <a:srgbClr val="FAFAFA"/>
+          </a:solidFill>
+          <a:ln w="9525">
+            <a:solidFill>
+              <a:srgbClr val="DADADB"/>
+            </a:solidFill>
+          </a:ln>
+          <a:effectLst/>
+        </p:spPr>
+        <p:style>
+          <a:lnRef idx="1">
+            <a:schemeClr val="accent1"/>
+          </a:lnRef>
+          <a:fillRef idx="3">
+            <a:schemeClr val="accent1"/>
+          </a:fillRef>
+          <a:effectRef idx="2">
+            <a:schemeClr val="accent1"/>
+          </a:effectRef>
+          <a:fontRef idx="minor">
+            <a:schemeClr val="lt1"/>
+          </a:fontRef>
+        </p:style>
+        <p:txBody>
+          <a:bodyPr wrap="none" lIns="0" tIns="0" rIns="0" bIns="0" rtlCol="0" anchor="ctr"/>
+          <a:lstStyle/>
+          <a:p>
+            <a:pPr algn="ctr"/>
+            <a:r>
+              <a:rPr sz="850" b="0">
+                <a:solidFill>
+                  <a:srgbClr val="4A4C4F"/>
+                </a:solidFill>
+                <a:latin typeface="Arial"/>
+              </a:rPr>
+              <a:t>out_of_area</a:t>
+            </a:r>
+          </a:p>
+        </p:txBody>
+      </p:sp>
+      <p:sp>
+        <p:nvSpPr>
+          <p:cNvPr id="20" name="Rounded Rectangle 19"/>
+          <p:cNvSpPr/>
+          <p:nvPr/>
+        </p:nvSpPr>
+        <p:spPr>
+          <a:xfrm>
+            <a:off x="7169810" y="2779776"/>
+            <a:ext cx="346466" cy="256032"/>
+          </a:xfrm>
+          <a:prstGeom prst="roundRect">
+            <a:avLst>
+              <a:gd name="adj" fmla="val 50000"/>
+            </a:avLst>
+          </a:prstGeom>
+          <a:solidFill>
+            <a:srgbClr val="FAFAFA"/>
+          </a:solidFill>
+          <a:ln w="9525">
+            <a:solidFill>
+              <a:srgbClr val="DADADB"/>
+            </a:solidFill>
+          </a:ln>
+          <a:effectLst/>
+        </p:spPr>
+        <p:style>
+          <a:lnRef idx="1">
+            <a:schemeClr val="accent1"/>
+          </a:lnRef>
+          <a:fillRef idx="3">
+            <a:schemeClr val="accent1"/>
+          </a:fillRef>
+          <a:effectRef idx="2">
+            <a:schemeClr val="accent1"/>
+          </a:effectRef>
+          <a:fontRef idx="minor">
+            <a:schemeClr val="lt1"/>
+          </a:fontRef>
+        </p:style>
+        <p:txBody>
+          <a:bodyPr wrap="none" lIns="0" tIns="0" rIns="0" bIns="0" rtlCol="0" anchor="ctr"/>
+          <a:lstStyle/>
+          <a:p>
+            <a:pPr algn="ctr"/>
+            <a:r>
+              <a:rPr sz="850" b="0">
+                <a:solidFill>
+                  <a:srgbClr val="4A4C4F"/>
+                </a:solidFill>
+                <a:latin typeface="Arial"/>
+              </a:rPr>
+              <a:t>faq</a:t>
+            </a:r>
+          </a:p>
+        </p:txBody>
+      </p:sp>
+      <p:sp>
+        <p:nvSpPr>
+          <p:cNvPr id="21" name="TextBox 20"/>
+          <p:cNvSpPr txBox="1"/>
+          <p:nvPr/>
+        </p:nvSpPr>
+        <p:spPr>
+          <a:xfrm>
+            <a:off x="7132320" y="2724912"/>
+            <a:ext cx="365760" cy="274320"/>
+          </a:xfrm>
+          <a:prstGeom prst="rect">
+            <a:avLst/>
+          </a:prstGeom>
+          <a:noFill/>
+        </p:spPr>
+        <p:txBody>
+          <a:bodyPr wrap="none" lIns="0" tIns="0" rIns="0" bIns="0" anchor="ctr">
+            <a:spAutoFit/>
+          </a:bodyPr>
+          <a:lstStyle/>
+          <a:p>
+            <a:pPr algn="ctr">
+              <a:lnSpc>
+                <a:spcPct val="100000"/>
+              </a:lnSpc>
+            </a:pPr>
+            <a:r>
+              <a:rPr sz="1500" b="0" i="0">
+                <a:solidFill>
+                  <a:srgbClr val="8F9193"/>
+                </a:solidFill>
+                <a:latin typeface="Arial"/>
+              </a:rPr>
+              <a:t>↓</a:t>
+            </a:r>
+          </a:p>
+        </p:txBody>
+      </p:sp>
+      <p:sp>
+        <p:nvSpPr>
+          <p:cNvPr id="22" name="Rounded Rectangle 21"/>
+          <p:cNvSpPr/>
+          <p:nvPr/>
+        </p:nvSpPr>
+        <p:spPr>
+          <a:xfrm>
+            <a:off x="822960" y="2999232"/>
             <a:ext cx="12984480" cy="676656"/>
           </a:xfrm>
           <a:prstGeom prst="roundRect">
@@ -2960,13 +3817,13 @@
       </p:sp>
       <p:sp>
         <p:nvSpPr>
-          <p:cNvPr id="9" name="Rounded Rectangle 8"/>
+          <p:cNvPr id="23" name="Rounded Rectangle 22"/>
           <p:cNvSpPr/>
           <p:nvPr/>
         </p:nvSpPr>
         <p:spPr>
           <a:xfrm>
-            <a:off x="12258812" y="1929384"/>
+            <a:off x="12258812" y="3145536"/>
             <a:ext cx="1320027" cy="274320"/>
           </a:xfrm>
           <a:prstGeom prst="roundRect">
@@ -3015,13 +3872,13 @@
       </p:sp>
       <p:sp>
         <p:nvSpPr>
-          <p:cNvPr id="10" name="TextBox 9"/>
-          <p:cNvSpPr txBox="1"/>
-          <p:nvPr/>
-        </p:nvSpPr>
-        <p:spPr>
-          <a:xfrm>
-            <a:off x="1078992" y="1911095"/>
+          <p:cNvPr id="24" name="TextBox 23"/>
+          <p:cNvSpPr txBox="1"/>
+          <p:nvPr/>
+        </p:nvSpPr>
+        <p:spPr>
+          <a:xfrm>
+            <a:off x="1078992" y="3127248"/>
             <a:ext cx="8686800" cy="292608"/>
           </a:xfrm>
           <a:prstGeom prst="rect">
@@ -3054,13 +3911,13 @@
       </p:sp>
       <p:sp>
         <p:nvSpPr>
-          <p:cNvPr id="11" name="TextBox 10"/>
-          <p:cNvSpPr txBox="1"/>
-          <p:nvPr/>
-        </p:nvSpPr>
-        <p:spPr>
-          <a:xfrm>
-            <a:off x="1078992" y="2203704"/>
+          <p:cNvPr id="25" name="TextBox 24"/>
+          <p:cNvSpPr txBox="1"/>
+          <p:nvPr/>
+        </p:nvSpPr>
+        <p:spPr>
+          <a:xfrm>
+            <a:off x="1078992" y="3419856"/>
             <a:ext cx="10972800" cy="237744"/>
           </a:xfrm>
           <a:prstGeom prst="rect">
@@ -3093,13 +3950,13 @@
       </p:sp>
       <p:sp>
         <p:nvSpPr>
-          <p:cNvPr id="12" name="TextBox 11"/>
-          <p:cNvSpPr txBox="1"/>
-          <p:nvPr/>
-        </p:nvSpPr>
-        <p:spPr>
-          <a:xfrm>
-            <a:off x="7132320" y="2514600"/>
+          <p:cNvPr id="26" name="TextBox 25"/>
+          <p:cNvSpPr txBox="1"/>
+          <p:nvPr/>
+        </p:nvSpPr>
+        <p:spPr>
+          <a:xfrm>
+            <a:off x="7132320" y="3730752"/>
             <a:ext cx="365760" cy="274320"/>
           </a:xfrm>
           <a:prstGeom prst="rect">
@@ -3132,18 +3989,18 @@
       </p:sp>
       <p:sp>
         <p:nvSpPr>
-          <p:cNvPr id="13" name="Rounded Rectangle 12"/>
+          <p:cNvPr id="27" name="Rounded Rectangle 26"/>
           <p:cNvSpPr/>
           <p:nvPr/>
         </p:nvSpPr>
         <p:spPr>
           <a:xfrm>
-            <a:off x="822960" y="2788920"/>
-            <a:ext cx="4084319" cy="3429000"/>
+            <a:off x="822960" y="4005072"/>
+            <a:ext cx="4084319" cy="3017520"/>
           </a:xfrm>
           <a:prstGeom prst="roundRect">
             <a:avLst>
-              <a:gd name="adj" fmla="val 2666"/>
+              <a:gd name="adj" fmla="val 3030"/>
             </a:avLst>
           </a:prstGeom>
           <a:solidFill>
@@ -3181,13 +4038,13 @@
       </p:sp>
       <p:sp>
         <p:nvSpPr>
-          <p:cNvPr id="14" name="Rounded Rectangle 13"/>
+          <p:cNvPr id="28" name="Rounded Rectangle 27"/>
           <p:cNvSpPr/>
           <p:nvPr/>
         </p:nvSpPr>
         <p:spPr>
           <a:xfrm>
-            <a:off x="3753398" y="2971800"/>
+            <a:off x="3753398" y="4187952"/>
             <a:ext cx="952713" cy="274320"/>
           </a:xfrm>
           <a:prstGeom prst="roundRect">
@@ -3236,13 +4093,13 @@
       </p:sp>
       <p:sp>
         <p:nvSpPr>
-          <p:cNvPr id="15" name="TextBox 14"/>
-          <p:cNvSpPr txBox="1"/>
-          <p:nvPr/>
-        </p:nvSpPr>
-        <p:spPr>
-          <a:xfrm>
-            <a:off x="1024128" y="2990088"/>
+          <p:cNvPr id="29" name="TextBox 28"/>
+          <p:cNvSpPr txBox="1"/>
+          <p:nvPr/>
+        </p:nvSpPr>
+        <p:spPr>
+          <a:xfrm>
+            <a:off x="1024128" y="4206240"/>
             <a:ext cx="2619542" cy="310896"/>
           </a:xfrm>
           <a:prstGeom prst="rect">
@@ -3268,21 +4125,21 @@
                 </a:solidFill>
                 <a:latin typeface="Arial"/>
               </a:rPr>
-              <a:t>Pricing-Quote</a:t>
-            </a:r>
-          </a:p>
-        </p:txBody>
-      </p:sp>
-      <p:sp>
-        <p:nvSpPr>
-          <p:cNvPr id="16" name="Rounded Rectangle 15"/>
+              <a:t>New-Booking</a:t>
+            </a:r>
+          </a:p>
+        </p:txBody>
+      </p:sp>
+      <p:sp>
+        <p:nvSpPr>
+          <p:cNvPr id="30" name="Rounded Rectangle 29"/>
           <p:cNvSpPr/>
           <p:nvPr/>
         </p:nvSpPr>
         <p:spPr>
           <a:xfrm>
-            <a:off x="1024128" y="3392424"/>
-            <a:ext cx="1073962" cy="256032"/>
+            <a:off x="1024128" y="4608576"/>
+            <a:ext cx="892088" cy="256032"/>
           </a:xfrm>
           <a:prstGeom prst="roundRect">
             <a:avLst>
@@ -3323,20 +4180,20 @@
                 </a:solidFill>
                 <a:latin typeface="Arial"/>
               </a:rPr>
-              <a:t>intent: pricing</a:t>
-            </a:r>
-          </a:p>
-        </p:txBody>
-      </p:sp>
-      <p:sp>
-        <p:nvSpPr>
-          <p:cNvPr id="17" name="TextBox 16"/>
-          <p:cNvSpPr txBox="1"/>
-          <p:nvPr/>
-        </p:nvSpPr>
-        <p:spPr>
-          <a:xfrm>
-            <a:off x="1024128" y="3758184"/>
+              <a:t>intent: book</a:t>
+            </a:r>
+          </a:p>
+        </p:txBody>
+      </p:sp>
+      <p:sp>
+        <p:nvSpPr>
+          <p:cNvPr id="31" name="TextBox 30"/>
+          <p:cNvSpPr txBox="1"/>
+          <p:nvPr/>
+        </p:nvSpPr>
+        <p:spPr>
+          <a:xfrm>
+            <a:off x="1024128" y="4974336"/>
             <a:ext cx="3681983" cy="566928"/>
           </a:xfrm>
           <a:prstGeom prst="rect">
@@ -3362,20 +4219,20 @@
                 </a:solidFill>
                 <a:latin typeface="Arial"/>
               </a:rPr>
-              <a:t>Answers cost / quote questions using configured price ranges only.</a:t>
-            </a:r>
-          </a:p>
-        </p:txBody>
-      </p:sp>
-      <p:sp>
-        <p:nvSpPr>
-          <p:cNvPr id="18" name="Rounded Rectangle 17"/>
+              <a:t>Schedules a new service visit — readback, confirm, and a re-check of availability before any write.</a:t>
+            </a:r>
+          </a:p>
+        </p:txBody>
+      </p:sp>
+      <p:sp>
+        <p:nvSpPr>
+          <p:cNvPr id="32" name="Rounded Rectangle 31"/>
           <p:cNvSpPr/>
           <p:nvPr/>
         </p:nvSpPr>
         <p:spPr>
           <a:xfrm>
-            <a:off x="1024128" y="4434840"/>
+            <a:off x="1024128" y="5650992"/>
             <a:ext cx="1437711" cy="256032"/>
           </a:xfrm>
           <a:prstGeom prst="roundRect">
@@ -3426,14 +4283,14 @@
       </p:sp>
       <p:sp>
         <p:nvSpPr>
-          <p:cNvPr id="19" name="Rounded Rectangle 18"/>
+          <p:cNvPr id="33" name="Rounded Rectangle 32"/>
           <p:cNvSpPr/>
           <p:nvPr/>
         </p:nvSpPr>
         <p:spPr>
           <a:xfrm>
-            <a:off x="2534991" y="4434840"/>
-            <a:ext cx="1316461" cy="256032"/>
+            <a:off x="2534991" y="5650992"/>
+            <a:ext cx="1437711" cy="256032"/>
           </a:xfrm>
           <a:prstGeom prst="roundRect">
             <a:avLst>
@@ -3476,21 +4333,21 @@
                 </a:solidFill>
                 <a:latin typeface="Arial"/>
               </a:rPr>
-              <a:t>get_service_pricing</a:t>
-            </a:r>
-          </a:p>
-        </p:txBody>
-      </p:sp>
-      <p:sp>
-        <p:nvSpPr>
-          <p:cNvPr id="20" name="Rounded Rectangle 19"/>
+              <a:t>validate_service_area</a:t>
+            </a:r>
+          </a:p>
+        </p:txBody>
+      </p:sp>
+      <p:sp>
+        <p:nvSpPr>
+          <p:cNvPr id="34" name="Rounded Rectangle 33"/>
           <p:cNvSpPr/>
           <p:nvPr/>
         </p:nvSpPr>
         <p:spPr>
           <a:xfrm>
-            <a:off x="1024128" y="4754879"/>
-            <a:ext cx="892088" cy="256032"/>
+            <a:off x="1024128" y="5971031"/>
+            <a:ext cx="1255836" cy="256032"/>
           </a:xfrm>
           <a:prstGeom prst="roundRect">
             <a:avLst>
@@ -3533,25 +4390,367 @@
                 </a:solidFill>
                 <a:latin typeface="Arial"/>
               </a:rPr>
-              <a:t>capture_lead</a:t>
-            </a:r>
-          </a:p>
-        </p:txBody>
-      </p:sp>
-      <p:sp>
-        <p:nvSpPr>
-          <p:cNvPr id="21" name="Rounded Rectangle 20"/>
+              <a:t>check_availability</a:t>
+            </a:r>
+          </a:p>
+        </p:txBody>
+      </p:sp>
+      <p:sp>
+        <p:nvSpPr>
+          <p:cNvPr id="35" name="Rounded Rectangle 34"/>
           <p:cNvSpPr/>
           <p:nvPr/>
         </p:nvSpPr>
         <p:spPr>
           <a:xfrm>
-            <a:off x="5273040" y="2788920"/>
-            <a:ext cx="4084319" cy="3429000"/>
+            <a:off x="2353116" y="5971031"/>
+            <a:ext cx="1195212" cy="256032"/>
           </a:xfrm>
           <a:prstGeom prst="roundRect">
             <a:avLst>
-              <a:gd name="adj" fmla="val 2666"/>
+              <a:gd name="adj" fmla="val 50000"/>
+            </a:avLst>
+          </a:prstGeom>
+          <a:solidFill>
+            <a:srgbClr val="FAFAFA"/>
+          </a:solidFill>
+          <a:ln w="9525">
+            <a:solidFill>
+              <a:srgbClr val="DADADB"/>
+            </a:solidFill>
+          </a:ln>
+          <a:effectLst/>
+        </p:spPr>
+        <p:style>
+          <a:lnRef idx="1">
+            <a:schemeClr val="accent1"/>
+          </a:lnRef>
+          <a:fillRef idx="3">
+            <a:schemeClr val="accent1"/>
+          </a:fillRef>
+          <a:effectRef idx="2">
+            <a:schemeClr val="accent1"/>
+          </a:effectRef>
+          <a:fontRef idx="minor">
+            <a:schemeClr val="lt1"/>
+          </a:fontRef>
+        </p:style>
+        <p:txBody>
+          <a:bodyPr wrap="none" lIns="0" tIns="0" rIns="0" bIns="0" rtlCol="0" anchor="ctr"/>
+          <a:lstStyle/>
+          <a:p>
+            <a:pPr algn="ctr"/>
+            <a:r>
+              <a:rPr sz="850" b="0">
+                <a:solidFill>
+                  <a:srgbClr val="4A4C4F"/>
+                </a:solidFill>
+                <a:latin typeface="Arial"/>
+              </a:rPr>
+              <a:t>lookup_technician</a:t>
+            </a:r>
+          </a:p>
+        </p:txBody>
+      </p:sp>
+      <p:sp>
+        <p:nvSpPr>
+          <p:cNvPr id="36" name="Rounded Rectangle 35"/>
+          <p:cNvSpPr/>
+          <p:nvPr/>
+        </p:nvSpPr>
+        <p:spPr>
+          <a:xfrm>
+            <a:off x="1024128" y="6291071"/>
+            <a:ext cx="1316461" cy="256032"/>
+          </a:xfrm>
+          <a:prstGeom prst="roundRect">
+            <a:avLst>
+              <a:gd name="adj" fmla="val 50000"/>
+            </a:avLst>
+          </a:prstGeom>
+          <a:solidFill>
+            <a:srgbClr val="FAFAFA"/>
+          </a:solidFill>
+          <a:ln w="9525">
+            <a:solidFill>
+              <a:srgbClr val="DADADB"/>
+            </a:solidFill>
+          </a:ln>
+          <a:effectLst/>
+        </p:spPr>
+        <p:style>
+          <a:lnRef idx="1">
+            <a:schemeClr val="accent1"/>
+          </a:lnRef>
+          <a:fillRef idx="3">
+            <a:schemeClr val="accent1"/>
+          </a:fillRef>
+          <a:effectRef idx="2">
+            <a:schemeClr val="accent1"/>
+          </a:effectRef>
+          <a:fontRef idx="minor">
+            <a:schemeClr val="lt1"/>
+          </a:fontRef>
+        </p:style>
+        <p:txBody>
+          <a:bodyPr wrap="none" lIns="0" tIns="0" rIns="0" bIns="0" rtlCol="0" anchor="ctr"/>
+          <a:lstStyle/>
+          <a:p>
+            <a:pPr algn="ctr"/>
+            <a:r>
+              <a:rPr sz="850" b="0">
+                <a:solidFill>
+                  <a:srgbClr val="4A4C4F"/>
+                </a:solidFill>
+                <a:latin typeface="Arial"/>
+              </a:rPr>
+              <a:t>get_service_pricing</a:t>
+            </a:r>
+          </a:p>
+        </p:txBody>
+      </p:sp>
+      <p:sp>
+        <p:nvSpPr>
+          <p:cNvPr id="37" name="Rounded Rectangle 36"/>
+          <p:cNvSpPr/>
+          <p:nvPr/>
+        </p:nvSpPr>
+        <p:spPr>
+          <a:xfrm>
+            <a:off x="2413741" y="6291071"/>
+            <a:ext cx="1255836" cy="256032"/>
+          </a:xfrm>
+          <a:prstGeom prst="roundRect">
+            <a:avLst>
+              <a:gd name="adj" fmla="val 50000"/>
+            </a:avLst>
+          </a:prstGeom>
+          <a:solidFill>
+            <a:srgbClr val="FAFAFA"/>
+          </a:solidFill>
+          <a:ln w="9525">
+            <a:solidFill>
+              <a:srgbClr val="DADADB"/>
+            </a:solidFill>
+          </a:ln>
+          <a:effectLst/>
+        </p:spPr>
+        <p:style>
+          <a:lnRef idx="1">
+            <a:schemeClr val="accent1"/>
+          </a:lnRef>
+          <a:fillRef idx="3">
+            <a:schemeClr val="accent1"/>
+          </a:fillRef>
+          <a:effectRef idx="2">
+            <a:schemeClr val="accent1"/>
+          </a:effectRef>
+          <a:fontRef idx="minor">
+            <a:schemeClr val="lt1"/>
+          </a:fontRef>
+        </p:style>
+        <p:txBody>
+          <a:bodyPr wrap="none" lIns="0" tIns="0" rIns="0" bIns="0" rtlCol="0" anchor="ctr"/>
+          <a:lstStyle/>
+          <a:p>
+            <a:pPr algn="ctr"/>
+            <a:r>
+              <a:rPr sz="850" b="0">
+                <a:solidFill>
+                  <a:srgbClr val="4A4C4F"/>
+                </a:solidFill>
+                <a:latin typeface="Arial"/>
+              </a:rPr>
+              <a:t>create_appointment</a:t>
+            </a:r>
+          </a:p>
+        </p:txBody>
+      </p:sp>
+      <p:sp>
+        <p:nvSpPr>
+          <p:cNvPr id="38" name="Rounded Rectangle 37"/>
+          <p:cNvSpPr/>
+          <p:nvPr/>
+        </p:nvSpPr>
+        <p:spPr>
+          <a:xfrm>
+            <a:off x="3742730" y="6291071"/>
+            <a:ext cx="892088" cy="256032"/>
+          </a:xfrm>
+          <a:prstGeom prst="roundRect">
+            <a:avLst>
+              <a:gd name="adj" fmla="val 50000"/>
+            </a:avLst>
+          </a:prstGeom>
+          <a:solidFill>
+            <a:srgbClr val="FAFAFA"/>
+          </a:solidFill>
+          <a:ln w="9525">
+            <a:solidFill>
+              <a:srgbClr val="DADADB"/>
+            </a:solidFill>
+          </a:ln>
+          <a:effectLst/>
+        </p:spPr>
+        <p:style>
+          <a:lnRef idx="1">
+            <a:schemeClr val="accent1"/>
+          </a:lnRef>
+          <a:fillRef idx="3">
+            <a:schemeClr val="accent1"/>
+          </a:fillRef>
+          <a:effectRef idx="2">
+            <a:schemeClr val="accent1"/>
+          </a:effectRef>
+          <a:fontRef idx="minor">
+            <a:schemeClr val="lt1"/>
+          </a:fontRef>
+        </p:style>
+        <p:txBody>
+          <a:bodyPr wrap="none" lIns="0" tIns="0" rIns="0" bIns="0" rtlCol="0" anchor="ctr"/>
+          <a:lstStyle/>
+          <a:p>
+            <a:pPr algn="ctr"/>
+            <a:r>
+              <a:rPr sz="850" b="0">
+                <a:solidFill>
+                  <a:srgbClr val="4A4C4F"/>
+                </a:solidFill>
+                <a:latin typeface="Arial"/>
+              </a:rPr>
+              <a:t>add_waitlist</a:t>
+            </a:r>
+          </a:p>
+        </p:txBody>
+      </p:sp>
+      <p:sp>
+        <p:nvSpPr>
+          <p:cNvPr id="39" name="Rounded Rectangle 38"/>
+          <p:cNvSpPr/>
+          <p:nvPr/>
+        </p:nvSpPr>
+        <p:spPr>
+          <a:xfrm>
+            <a:off x="1024128" y="6611111"/>
+            <a:ext cx="952713" cy="256032"/>
+          </a:xfrm>
+          <a:prstGeom prst="roundRect">
+            <a:avLst>
+              <a:gd name="adj" fmla="val 50000"/>
+            </a:avLst>
+          </a:prstGeom>
+          <a:solidFill>
+            <a:srgbClr val="FAFAFA"/>
+          </a:solidFill>
+          <a:ln w="9525">
+            <a:solidFill>
+              <a:srgbClr val="DADADB"/>
+            </a:solidFill>
+          </a:ln>
+          <a:effectLst/>
+        </p:spPr>
+        <p:style>
+          <a:lnRef idx="1">
+            <a:schemeClr val="accent1"/>
+          </a:lnRef>
+          <a:fillRef idx="3">
+            <a:schemeClr val="accent1"/>
+          </a:fillRef>
+          <a:effectRef idx="2">
+            <a:schemeClr val="accent1"/>
+          </a:effectRef>
+          <a:fontRef idx="minor">
+            <a:schemeClr val="lt1"/>
+          </a:fontRef>
+        </p:style>
+        <p:txBody>
+          <a:bodyPr wrap="none" lIns="0" tIns="0" rIns="0" bIns="0" rtlCol="0" anchor="ctr"/>
+          <a:lstStyle/>
+          <a:p>
+            <a:pPr algn="ctr"/>
+            <a:r>
+              <a:rPr sz="850" b="0">
+                <a:solidFill>
+                  <a:srgbClr val="4A4C4F"/>
+                </a:solidFill>
+                <a:latin typeface="Arial"/>
+              </a:rPr>
+              <a:t>capture_notes</a:t>
+            </a:r>
+          </a:p>
+        </p:txBody>
+      </p:sp>
+      <p:sp>
+        <p:nvSpPr>
+          <p:cNvPr id="40" name="Rounded Rectangle 39"/>
+          <p:cNvSpPr/>
+          <p:nvPr/>
+        </p:nvSpPr>
+        <p:spPr>
+          <a:xfrm>
+            <a:off x="2049993" y="6611111"/>
+            <a:ext cx="892088" cy="256032"/>
+          </a:xfrm>
+          <a:prstGeom prst="roundRect">
+            <a:avLst>
+              <a:gd name="adj" fmla="val 50000"/>
+            </a:avLst>
+          </a:prstGeom>
+          <a:solidFill>
+            <a:srgbClr val="FAFAFA"/>
+          </a:solidFill>
+          <a:ln w="9525">
+            <a:solidFill>
+              <a:srgbClr val="DADADB"/>
+            </a:solidFill>
+          </a:ln>
+          <a:effectLst/>
+        </p:spPr>
+        <p:style>
+          <a:lnRef idx="1">
+            <a:schemeClr val="accent1"/>
+          </a:lnRef>
+          <a:fillRef idx="3">
+            <a:schemeClr val="accent1"/>
+          </a:fillRef>
+          <a:effectRef idx="2">
+            <a:schemeClr val="accent1"/>
+          </a:effectRef>
+          <a:fontRef idx="minor">
+            <a:schemeClr val="lt1"/>
+          </a:fontRef>
+        </p:style>
+        <p:txBody>
+          <a:bodyPr wrap="none" lIns="0" tIns="0" rIns="0" bIns="0" rtlCol="0" anchor="ctr"/>
+          <a:lstStyle/>
+          <a:p>
+            <a:pPr algn="ctr"/>
+            <a:r>
+              <a:rPr sz="850" b="0">
+                <a:solidFill>
+                  <a:srgbClr val="4A4C4F"/>
+                </a:solidFill>
+                <a:latin typeface="Arial"/>
+              </a:rPr>
+              <a:t>capture_lead</a:t>
+            </a:r>
+          </a:p>
+        </p:txBody>
+      </p:sp>
+      <p:sp>
+        <p:nvSpPr>
+          <p:cNvPr id="41" name="Rounded Rectangle 40"/>
+          <p:cNvSpPr/>
+          <p:nvPr/>
+        </p:nvSpPr>
+        <p:spPr>
+          <a:xfrm>
+            <a:off x="5273040" y="4005072"/>
+            <a:ext cx="4084319" cy="3017520"/>
+          </a:xfrm>
+          <a:prstGeom prst="roundRect">
+            <a:avLst>
+              <a:gd name="adj" fmla="val 3030"/>
             </a:avLst>
           </a:prstGeom>
           <a:solidFill>
@@ -3589,13 +4788,13 @@
       </p:sp>
       <p:sp>
         <p:nvSpPr>
-          <p:cNvPr id="22" name="Rounded Rectangle 21"/>
+          <p:cNvPr id="42" name="Rounded Rectangle 41"/>
           <p:cNvSpPr/>
           <p:nvPr/>
         </p:nvSpPr>
         <p:spPr>
           <a:xfrm>
-            <a:off x="8203478" y="2971800"/>
+            <a:off x="8203478" y="4187952"/>
             <a:ext cx="952713" cy="274320"/>
           </a:xfrm>
           <a:prstGeom prst="roundRect">
@@ -3644,13 +4843,13 @@
       </p:sp>
       <p:sp>
         <p:nvSpPr>
-          <p:cNvPr id="23" name="TextBox 22"/>
-          <p:cNvSpPr txBox="1"/>
-          <p:nvPr/>
-        </p:nvSpPr>
-        <p:spPr>
-          <a:xfrm>
-            <a:off x="5474208" y="2990088"/>
+          <p:cNvPr id="43" name="TextBox 42"/>
+          <p:cNvSpPr txBox="1"/>
+          <p:nvPr/>
+        </p:nvSpPr>
+        <p:spPr>
+          <a:xfrm>
+            <a:off x="5474208" y="4206240"/>
             <a:ext cx="2619542" cy="310896"/>
           </a:xfrm>
           <a:prstGeom prst="rect">
@@ -3676,21 +4875,21 @@
                 </a:solidFill>
                 <a:latin typeface="Arial"/>
               </a:rPr>
-              <a:t>Out-of-Area</a:t>
-            </a:r>
-          </a:p>
-        </p:txBody>
-      </p:sp>
-      <p:sp>
-        <p:nvSpPr>
-          <p:cNvPr id="24" name="Rounded Rectangle 23"/>
+              <a:t>Reschedule-Cancel</a:t>
+            </a:r>
+          </a:p>
+        </p:txBody>
+      </p:sp>
+      <p:sp>
+        <p:nvSpPr>
+          <p:cNvPr id="44" name="Rounded Rectangle 43"/>
           <p:cNvSpPr/>
           <p:nvPr/>
         </p:nvSpPr>
         <p:spPr>
           <a:xfrm>
-            <a:off x="5474208" y="3392424"/>
-            <a:ext cx="1316461" cy="256032"/>
+            <a:off x="5474208" y="4608576"/>
+            <a:ext cx="1801459" cy="256032"/>
           </a:xfrm>
           <a:prstGeom prst="roundRect">
             <a:avLst>
@@ -3731,20 +4930,20 @@
                 </a:solidFill>
                 <a:latin typeface="Arial"/>
               </a:rPr>
-              <a:t>intent: out_of_area</a:t>
-            </a:r>
-          </a:p>
-        </p:txBody>
-      </p:sp>
-      <p:sp>
-        <p:nvSpPr>
-          <p:cNvPr id="25" name="TextBox 24"/>
-          <p:cNvSpPr txBox="1"/>
-          <p:nvPr/>
-        </p:nvSpPr>
-        <p:spPr>
-          <a:xfrm>
-            <a:off x="5474208" y="3758184"/>
+              <a:t>intent: reschedule / cancel</a:t>
+            </a:r>
+          </a:p>
+        </p:txBody>
+      </p:sp>
+      <p:sp>
+        <p:nvSpPr>
+          <p:cNvPr id="45" name="TextBox 44"/>
+          <p:cNvSpPr txBox="1"/>
+          <p:nvPr/>
+        </p:nvSpPr>
+        <p:spPr>
+          <a:xfrm>
+            <a:off x="5474208" y="4974336"/>
             <a:ext cx="3681983" cy="566928"/>
           </a:xfrm>
           <a:prstGeom prst="rect">
@@ -3770,21 +4969,21 @@
                 </a:solidFill>
                 <a:latin typeface="Arial"/>
               </a:rPr>
-              <a:t>Handles requests outside the service area and captures the lead.</a:t>
-            </a:r>
-          </a:p>
-        </p:txBody>
-      </p:sp>
-      <p:sp>
-        <p:nvSpPr>
-          <p:cNvPr id="26" name="Rounded Rectangle 25"/>
+              <a:t>Moves or cancels an existing appointment.</a:t>
+            </a:r>
+          </a:p>
+        </p:txBody>
+      </p:sp>
+      <p:sp>
+        <p:nvSpPr>
+          <p:cNvPr id="46" name="Rounded Rectangle 45"/>
           <p:cNvSpPr/>
           <p:nvPr/>
         </p:nvSpPr>
         <p:spPr>
           <a:xfrm>
-            <a:off x="5474208" y="4434840"/>
-            <a:ext cx="1437711" cy="256032"/>
+            <a:off x="5474208" y="5650992"/>
+            <a:ext cx="1255836" cy="256032"/>
           </a:xfrm>
           <a:prstGeom prst="roundRect">
             <a:avLst>
@@ -3827,21 +5026,21 @@
                 </a:solidFill>
                 <a:latin typeface="Arial"/>
               </a:rPr>
-              <a:t>validate_service_area</a:t>
-            </a:r>
-          </a:p>
-        </p:txBody>
-      </p:sp>
-      <p:sp>
-        <p:nvSpPr>
-          <p:cNvPr id="27" name="Rounded Rectangle 26"/>
+              <a:t>check_availability</a:t>
+            </a:r>
+          </a:p>
+        </p:txBody>
+      </p:sp>
+      <p:sp>
+        <p:nvSpPr>
+          <p:cNvPr id="47" name="Rounded Rectangle 46"/>
           <p:cNvSpPr/>
           <p:nvPr/>
         </p:nvSpPr>
         <p:spPr>
           <a:xfrm>
-            <a:off x="6985071" y="4434840"/>
-            <a:ext cx="892088" cy="256032"/>
+            <a:off x="6803196" y="5650992"/>
+            <a:ext cx="1255836" cy="256032"/>
           </a:xfrm>
           <a:prstGeom prst="roundRect">
             <a:avLst>
@@ -3884,25 +5083,139 @@
                 </a:solidFill>
                 <a:latin typeface="Arial"/>
               </a:rPr>
-              <a:t>capture_lead</a:t>
-            </a:r>
-          </a:p>
-        </p:txBody>
-      </p:sp>
-      <p:sp>
-        <p:nvSpPr>
-          <p:cNvPr id="28" name="Rounded Rectangle 27"/>
+              <a:t>lookup_appointment</a:t>
+            </a:r>
+          </a:p>
+        </p:txBody>
+      </p:sp>
+      <p:sp>
+        <p:nvSpPr>
+          <p:cNvPr id="48" name="Rounded Rectangle 47"/>
           <p:cNvSpPr/>
           <p:nvPr/>
         </p:nvSpPr>
         <p:spPr>
           <a:xfrm>
-            <a:off x="9723120" y="2788920"/>
-            <a:ext cx="4084319" cy="3429000"/>
+            <a:off x="5474208" y="5971031"/>
+            <a:ext cx="1255836" cy="256032"/>
           </a:xfrm>
           <a:prstGeom prst="roundRect">
             <a:avLst>
-              <a:gd name="adj" fmla="val 2666"/>
+              <a:gd name="adj" fmla="val 50000"/>
+            </a:avLst>
+          </a:prstGeom>
+          <a:solidFill>
+            <a:srgbClr val="FAFAFA"/>
+          </a:solidFill>
+          <a:ln w="9525">
+            <a:solidFill>
+              <a:srgbClr val="DADADB"/>
+            </a:solidFill>
+          </a:ln>
+          <a:effectLst/>
+        </p:spPr>
+        <p:style>
+          <a:lnRef idx="1">
+            <a:schemeClr val="accent1"/>
+          </a:lnRef>
+          <a:fillRef idx="3">
+            <a:schemeClr val="accent1"/>
+          </a:fillRef>
+          <a:effectRef idx="2">
+            <a:schemeClr val="accent1"/>
+          </a:effectRef>
+          <a:fontRef idx="minor">
+            <a:schemeClr val="lt1"/>
+          </a:fontRef>
+        </p:style>
+        <p:txBody>
+          <a:bodyPr wrap="none" lIns="0" tIns="0" rIns="0" bIns="0" rtlCol="0" anchor="ctr"/>
+          <a:lstStyle/>
+          <a:p>
+            <a:pPr algn="ctr"/>
+            <a:r>
+              <a:rPr sz="850" b="0">
+                <a:solidFill>
+                  <a:srgbClr val="4A4C4F"/>
+                </a:solidFill>
+                <a:latin typeface="Arial"/>
+              </a:rPr>
+              <a:t>update_appointment</a:t>
+            </a:r>
+          </a:p>
+        </p:txBody>
+      </p:sp>
+      <p:sp>
+        <p:nvSpPr>
+          <p:cNvPr id="49" name="Rounded Rectangle 48"/>
+          <p:cNvSpPr/>
+          <p:nvPr/>
+        </p:nvSpPr>
+        <p:spPr>
+          <a:xfrm>
+            <a:off x="6803196" y="5971031"/>
+            <a:ext cx="1255836" cy="256032"/>
+          </a:xfrm>
+          <a:prstGeom prst="roundRect">
+            <a:avLst>
+              <a:gd name="adj" fmla="val 50000"/>
+            </a:avLst>
+          </a:prstGeom>
+          <a:solidFill>
+            <a:srgbClr val="FAFAFA"/>
+          </a:solidFill>
+          <a:ln w="9525">
+            <a:solidFill>
+              <a:srgbClr val="DADADB"/>
+            </a:solidFill>
+          </a:ln>
+          <a:effectLst/>
+        </p:spPr>
+        <p:style>
+          <a:lnRef idx="1">
+            <a:schemeClr val="accent1"/>
+          </a:lnRef>
+          <a:fillRef idx="3">
+            <a:schemeClr val="accent1"/>
+          </a:fillRef>
+          <a:effectRef idx="2">
+            <a:schemeClr val="accent1"/>
+          </a:effectRef>
+          <a:fontRef idx="minor">
+            <a:schemeClr val="lt1"/>
+          </a:fontRef>
+        </p:style>
+        <p:txBody>
+          <a:bodyPr wrap="none" lIns="0" tIns="0" rIns="0" bIns="0" rtlCol="0" anchor="ctr"/>
+          <a:lstStyle/>
+          <a:p>
+            <a:pPr algn="ctr"/>
+            <a:r>
+              <a:rPr sz="850" b="0">
+                <a:solidFill>
+                  <a:srgbClr val="4A4C4F"/>
+                </a:solidFill>
+                <a:latin typeface="Arial"/>
+              </a:rPr>
+              <a:t>cancel_appointment</a:t>
+            </a:r>
+          </a:p>
+        </p:txBody>
+      </p:sp>
+      <p:sp>
+        <p:nvSpPr>
+          <p:cNvPr id="50" name="Rounded Rectangle 49"/>
+          <p:cNvSpPr/>
+          <p:nvPr/>
+        </p:nvSpPr>
+        <p:spPr>
+          <a:xfrm>
+            <a:off x="9723120" y="4005072"/>
+            <a:ext cx="4084319" cy="3017520"/>
+          </a:xfrm>
+          <a:prstGeom prst="roundRect">
+            <a:avLst>
+              <a:gd name="adj" fmla="val 3030"/>
             </a:avLst>
           </a:prstGeom>
           <a:solidFill>
@@ -3940,13 +5253,13 @@
       </p:sp>
       <p:sp>
         <p:nvSpPr>
-          <p:cNvPr id="29" name="Rounded Rectangle 28"/>
+          <p:cNvPr id="51" name="Rounded Rectangle 50"/>
           <p:cNvSpPr/>
           <p:nvPr/>
         </p:nvSpPr>
         <p:spPr>
           <a:xfrm>
-            <a:off x="12653558" y="2971800"/>
+            <a:off x="12653558" y="4187952"/>
             <a:ext cx="952713" cy="274320"/>
           </a:xfrm>
           <a:prstGeom prst="roundRect">
@@ -3995,13 +5308,13 @@
       </p:sp>
       <p:sp>
         <p:nvSpPr>
-          <p:cNvPr id="30" name="TextBox 29"/>
-          <p:cNvSpPr txBox="1"/>
-          <p:nvPr/>
-        </p:nvSpPr>
-        <p:spPr>
-          <a:xfrm>
-            <a:off x="9924288" y="2990088"/>
+          <p:cNvPr id="52" name="TextBox 51"/>
+          <p:cNvSpPr txBox="1"/>
+          <p:nvPr/>
+        </p:nvSpPr>
+        <p:spPr>
+          <a:xfrm>
+            <a:off x="9924288" y="4206240"/>
             <a:ext cx="2619542" cy="310896"/>
           </a:xfrm>
           <a:prstGeom prst="rect">
@@ -4027,21 +5340,21 @@
                 </a:solidFill>
                 <a:latin typeface="Arial"/>
               </a:rPr>
-              <a:t>General-FAQ</a:t>
-            </a:r>
-          </a:p>
-        </p:txBody>
-      </p:sp>
-      <p:sp>
-        <p:nvSpPr>
-          <p:cNvPr id="31" name="Rounded Rectangle 30"/>
+              <a:t>Emergency-Triage</a:t>
+            </a:r>
+          </a:p>
+        </p:txBody>
+      </p:sp>
+      <p:sp>
+        <p:nvSpPr>
+          <p:cNvPr id="53" name="Rounded Rectangle 52"/>
           <p:cNvSpPr/>
           <p:nvPr/>
         </p:nvSpPr>
         <p:spPr>
           <a:xfrm>
-            <a:off x="9924288" y="3392424"/>
-            <a:ext cx="1255836" cy="256032"/>
+            <a:off x="9924288" y="4608576"/>
+            <a:ext cx="1195212" cy="256032"/>
           </a:xfrm>
           <a:prstGeom prst="roundRect">
             <a:avLst>
@@ -4082,20 +5395,20 @@
                 </a:solidFill>
                 <a:latin typeface="Arial"/>
               </a:rPr>
-              <a:t>intent: faq / else</a:t>
-            </a:r>
-          </a:p>
-        </p:txBody>
-      </p:sp>
-      <p:sp>
-        <p:nvSpPr>
-          <p:cNvPr id="32" name="TextBox 31"/>
-          <p:cNvSpPr txBox="1"/>
-          <p:nvPr/>
-        </p:nvSpPr>
-        <p:spPr>
-          <a:xfrm>
-            <a:off x="9924288" y="3758184"/>
+              <a:t>intent: emergency</a:t>
+            </a:r>
+          </a:p>
+        </p:txBody>
+      </p:sp>
+      <p:sp>
+        <p:nvSpPr>
+          <p:cNvPr id="54" name="TextBox 53"/>
+          <p:cNvSpPr txBox="1"/>
+          <p:nvPr/>
+        </p:nvSpPr>
+        <p:spPr>
+          <a:xfrm>
+            <a:off x="9924288" y="4974336"/>
             <a:ext cx="3681983" cy="566928"/>
           </a:xfrm>
           <a:prstGeom prst="rect">
@@ -4121,21 +5434,21 @@
                 </a:solidFill>
                 <a:latin typeface="Arial"/>
               </a:rPr>
-              <a:t>Answers questions, status / ETA, confirmations, callbacks, opt-out, and human handoff.</a:t>
-            </a:r>
-          </a:p>
-        </p:txBody>
-      </p:sp>
-      <p:sp>
-        <p:nvSpPr>
-          <p:cNvPr id="33" name="Rounded Rectangle 32"/>
+              <a:t>Handles life-safety situations — advises, logs, and escalates for dispatch.</a:t>
+            </a:r>
+          </a:p>
+        </p:txBody>
+      </p:sp>
+      <p:sp>
+        <p:nvSpPr>
+          <p:cNvPr id="55" name="Rounded Rectangle 54"/>
           <p:cNvSpPr/>
           <p:nvPr/>
         </p:nvSpPr>
         <p:spPr>
           <a:xfrm>
-            <a:off x="9924288" y="4434840"/>
-            <a:ext cx="1255836" cy="256032"/>
+            <a:off x="9924288" y="5650992"/>
+            <a:ext cx="1377086" cy="256032"/>
           </a:xfrm>
           <a:prstGeom prst="roundRect">
             <a:avLst>
@@ -4178,21 +5491,21 @@
                 </a:solidFill>
                 <a:latin typeface="Arial"/>
               </a:rPr>
-              <a:t>lookup_appointment</a:t>
-            </a:r>
-          </a:p>
-        </p:txBody>
-      </p:sp>
-      <p:sp>
-        <p:nvSpPr>
-          <p:cNvPr id="34" name="Rounded Rectangle 33"/>
+              <a:t>match_emergency_rule</a:t>
+            </a:r>
+          </a:p>
+        </p:txBody>
+      </p:sp>
+      <p:sp>
+        <p:nvSpPr>
+          <p:cNvPr id="56" name="Rounded Rectangle 55"/>
           <p:cNvSpPr/>
           <p:nvPr/>
         </p:nvSpPr>
         <p:spPr>
           <a:xfrm>
-            <a:off x="11253276" y="4434840"/>
-            <a:ext cx="1316461" cy="256032"/>
+            <a:off x="11374526" y="5650992"/>
+            <a:ext cx="952713" cy="256032"/>
           </a:xfrm>
           <a:prstGeom prst="roundRect">
             <a:avLst>
@@ -4235,21 +5548,21 @@
                 </a:solidFill>
                 <a:latin typeface="Arial"/>
               </a:rPr>
-              <a:t>get_service_pricing</a:t>
-            </a:r>
-          </a:p>
-        </p:txBody>
-      </p:sp>
-      <p:sp>
-        <p:nvSpPr>
-          <p:cNvPr id="35" name="Rounded Rectangle 34"/>
+              <a:t>advise_safety</a:t>
+            </a:r>
+          </a:p>
+        </p:txBody>
+      </p:sp>
+      <p:sp>
+        <p:nvSpPr>
+          <p:cNvPr id="57" name="Rounded Rectangle 56"/>
           <p:cNvSpPr/>
           <p:nvPr/>
         </p:nvSpPr>
         <p:spPr>
           <a:xfrm>
-            <a:off x="9924288" y="4754879"/>
-            <a:ext cx="1255836" cy="256032"/>
+            <a:off x="12400391" y="5650992"/>
+            <a:ext cx="1195212" cy="256032"/>
           </a:xfrm>
           <a:prstGeom prst="roundRect">
             <a:avLst>
@@ -4292,21 +5605,21 @@
                 </a:solidFill>
                 <a:latin typeface="Arial"/>
               </a:rPr>
-              <a:t>get_business_facts</a:t>
-            </a:r>
-          </a:p>
-        </p:txBody>
-      </p:sp>
-      <p:sp>
-        <p:nvSpPr>
-          <p:cNvPr id="36" name="Rounded Rectangle 35"/>
+              <a:t>escalate_to_human</a:t>
+            </a:r>
+          </a:p>
+        </p:txBody>
+      </p:sp>
+      <p:sp>
+        <p:nvSpPr>
+          <p:cNvPr id="58" name="Rounded Rectangle 57"/>
           <p:cNvSpPr/>
           <p:nvPr/>
         </p:nvSpPr>
         <p:spPr>
           <a:xfrm>
-            <a:off x="11253276" y="4754879"/>
-            <a:ext cx="1013338" cy="256032"/>
+            <a:off x="9924288" y="5971031"/>
+            <a:ext cx="952713" cy="256032"/>
           </a:xfrm>
           <a:prstGeom prst="roundRect">
             <a:avLst>
@@ -4349,305 +5662,20 @@
                 </a:solidFill>
                 <a:latin typeface="Arial"/>
               </a:rPr>
-              <a:t>mark_confirmed</a:t>
-            </a:r>
-          </a:p>
-        </p:txBody>
-      </p:sp>
-      <p:sp>
-        <p:nvSpPr>
-          <p:cNvPr id="37" name="Rounded Rectangle 36"/>
+              <a:t>log_emergency</a:t>
+            </a:r>
+          </a:p>
+        </p:txBody>
+      </p:sp>
+      <p:sp>
+        <p:nvSpPr>
+          <p:cNvPr id="59" name="Rounded Rectangle 58"/>
           <p:cNvSpPr/>
           <p:nvPr/>
         </p:nvSpPr>
         <p:spPr>
           <a:xfrm>
-            <a:off x="12339767" y="4754879"/>
-            <a:ext cx="952713" cy="256032"/>
-          </a:xfrm>
-          <a:prstGeom prst="roundRect">
-            <a:avLst>
-              <a:gd name="adj" fmla="val 50000"/>
-            </a:avLst>
-          </a:prstGeom>
-          <a:solidFill>
-            <a:srgbClr val="FAFAFA"/>
-          </a:solidFill>
-          <a:ln w="9525">
-            <a:solidFill>
-              <a:srgbClr val="DADADB"/>
-            </a:solidFill>
-          </a:ln>
-          <a:effectLst/>
-        </p:spPr>
-        <p:style>
-          <a:lnRef idx="1">
-            <a:schemeClr val="accent1"/>
-          </a:lnRef>
-          <a:fillRef idx="3">
-            <a:schemeClr val="accent1"/>
-          </a:fillRef>
-          <a:effectRef idx="2">
-            <a:schemeClr val="accent1"/>
-          </a:effectRef>
-          <a:fontRef idx="minor">
-            <a:schemeClr val="lt1"/>
-          </a:fontRef>
-        </p:style>
-        <p:txBody>
-          <a:bodyPr wrap="none" lIns="0" tIns="0" rIns="0" bIns="0" rtlCol="0" anchor="ctr"/>
-          <a:lstStyle/>
-          <a:p>
-            <a:pPr algn="ctr"/>
-            <a:r>
-              <a:rPr sz="850" b="0">
-                <a:solidFill>
-                  <a:srgbClr val="4A4C4F"/>
-                </a:solidFill>
-                <a:latin typeface="Arial"/>
-              </a:rPr>
-              <a:t>capture_notes</a:t>
-            </a:r>
-          </a:p>
-        </p:txBody>
-      </p:sp>
-      <p:sp>
-        <p:nvSpPr>
-          <p:cNvPr id="38" name="Rounded Rectangle 37"/>
-          <p:cNvSpPr/>
-          <p:nvPr/>
-        </p:nvSpPr>
-        <p:spPr>
-          <a:xfrm>
-            <a:off x="9924288" y="5074919"/>
-            <a:ext cx="1195212" cy="256032"/>
-          </a:xfrm>
-          <a:prstGeom prst="roundRect">
-            <a:avLst>
-              <a:gd name="adj" fmla="val 50000"/>
-            </a:avLst>
-          </a:prstGeom>
-          <a:solidFill>
-            <a:srgbClr val="FAFAFA"/>
-          </a:solidFill>
-          <a:ln w="9525">
-            <a:solidFill>
-              <a:srgbClr val="DADADB"/>
-            </a:solidFill>
-          </a:ln>
-          <a:effectLst/>
-        </p:spPr>
-        <p:style>
-          <a:lnRef idx="1">
-            <a:schemeClr val="accent1"/>
-          </a:lnRef>
-          <a:fillRef idx="3">
-            <a:schemeClr val="accent1"/>
-          </a:fillRef>
-          <a:effectRef idx="2">
-            <a:schemeClr val="accent1"/>
-          </a:effectRef>
-          <a:fontRef idx="minor">
-            <a:schemeClr val="lt1"/>
-          </a:fontRef>
-        </p:style>
-        <p:txBody>
-          <a:bodyPr wrap="none" lIns="0" tIns="0" rIns="0" bIns="0" rtlCol="0" anchor="ctr"/>
-          <a:lstStyle/>
-          <a:p>
-            <a:pPr algn="ctr"/>
-            <a:r>
-              <a:rPr sz="850" b="0">
-                <a:solidFill>
-                  <a:srgbClr val="4A4C4F"/>
-                </a:solidFill>
-                <a:latin typeface="Arial"/>
-              </a:rPr>
-              <a:t>schedule_callback</a:t>
-            </a:r>
-          </a:p>
-        </p:txBody>
-      </p:sp>
-      <p:sp>
-        <p:nvSpPr>
-          <p:cNvPr id="39" name="Rounded Rectangle 38"/>
-          <p:cNvSpPr/>
-          <p:nvPr/>
-        </p:nvSpPr>
-        <p:spPr>
-          <a:xfrm>
-            <a:off x="11192652" y="5074919"/>
-            <a:ext cx="892088" cy="256032"/>
-          </a:xfrm>
-          <a:prstGeom prst="roundRect">
-            <a:avLst>
-              <a:gd name="adj" fmla="val 50000"/>
-            </a:avLst>
-          </a:prstGeom>
-          <a:solidFill>
-            <a:srgbClr val="FAFAFA"/>
-          </a:solidFill>
-          <a:ln w="9525">
-            <a:solidFill>
-              <a:srgbClr val="DADADB"/>
-            </a:solidFill>
-          </a:ln>
-          <a:effectLst/>
-        </p:spPr>
-        <p:style>
-          <a:lnRef idx="1">
-            <a:schemeClr val="accent1"/>
-          </a:lnRef>
-          <a:fillRef idx="3">
-            <a:schemeClr val="accent1"/>
-          </a:fillRef>
-          <a:effectRef idx="2">
-            <a:schemeClr val="accent1"/>
-          </a:effectRef>
-          <a:fontRef idx="minor">
-            <a:schemeClr val="lt1"/>
-          </a:fontRef>
-        </p:style>
-        <p:txBody>
-          <a:bodyPr wrap="none" lIns="0" tIns="0" rIns="0" bIns="0" rtlCol="0" anchor="ctr"/>
-          <a:lstStyle/>
-          <a:p>
-            <a:pPr algn="ctr"/>
-            <a:r>
-              <a:rPr sz="850" b="0">
-                <a:solidFill>
-                  <a:srgbClr val="4A4C4F"/>
-                </a:solidFill>
-                <a:latin typeface="Arial"/>
-              </a:rPr>
-              <a:t>capture_lead</a:t>
-            </a:r>
-          </a:p>
-        </p:txBody>
-      </p:sp>
-      <p:sp>
-        <p:nvSpPr>
-          <p:cNvPr id="40" name="Rounded Rectangle 39"/>
-          <p:cNvSpPr/>
-          <p:nvPr/>
-        </p:nvSpPr>
-        <p:spPr>
-          <a:xfrm>
-            <a:off x="12157892" y="5074919"/>
-            <a:ext cx="1195212" cy="256032"/>
-          </a:xfrm>
-          <a:prstGeom prst="roundRect">
-            <a:avLst>
-              <a:gd name="adj" fmla="val 50000"/>
-            </a:avLst>
-          </a:prstGeom>
-          <a:solidFill>
-            <a:srgbClr val="FAFAFA"/>
-          </a:solidFill>
-          <a:ln w="9525">
-            <a:solidFill>
-              <a:srgbClr val="DADADB"/>
-            </a:solidFill>
-          </a:ln>
-          <a:effectLst/>
-        </p:spPr>
-        <p:style>
-          <a:lnRef idx="1">
-            <a:schemeClr val="accent1"/>
-          </a:lnRef>
-          <a:fillRef idx="3">
-            <a:schemeClr val="accent1"/>
-          </a:fillRef>
-          <a:effectRef idx="2">
-            <a:schemeClr val="accent1"/>
-          </a:effectRef>
-          <a:fontRef idx="minor">
-            <a:schemeClr val="lt1"/>
-          </a:fontRef>
-        </p:style>
-        <p:txBody>
-          <a:bodyPr wrap="none" lIns="0" tIns="0" rIns="0" bIns="0" rtlCol="0" anchor="ctr"/>
-          <a:lstStyle/>
-          <a:p>
-            <a:pPr algn="ctr"/>
-            <a:r>
-              <a:rPr sz="850" b="0">
-                <a:solidFill>
-                  <a:srgbClr val="4A4C4F"/>
-                </a:solidFill>
-                <a:latin typeface="Arial"/>
-              </a:rPr>
-              <a:t>escalate_to_human</a:t>
-            </a:r>
-          </a:p>
-        </p:txBody>
-      </p:sp>
-      <p:sp>
-        <p:nvSpPr>
-          <p:cNvPr id="41" name="Rounded Rectangle 40"/>
-          <p:cNvSpPr/>
-          <p:nvPr/>
-        </p:nvSpPr>
-        <p:spPr>
-          <a:xfrm>
-            <a:off x="9924288" y="5394959"/>
-            <a:ext cx="892088" cy="256032"/>
-          </a:xfrm>
-          <a:prstGeom prst="roundRect">
-            <a:avLst>
-              <a:gd name="adj" fmla="val 50000"/>
-            </a:avLst>
-          </a:prstGeom>
-          <a:solidFill>
-            <a:srgbClr val="FAFAFA"/>
-          </a:solidFill>
-          <a:ln w="9525">
-            <a:solidFill>
-              <a:srgbClr val="DADADB"/>
-            </a:solidFill>
-          </a:ln>
-          <a:effectLst/>
-        </p:spPr>
-        <p:style>
-          <a:lnRef idx="1">
-            <a:schemeClr val="accent1"/>
-          </a:lnRef>
-          <a:fillRef idx="3">
-            <a:schemeClr val="accent1"/>
-          </a:fillRef>
-          <a:effectRef idx="2">
-            <a:schemeClr val="accent1"/>
-          </a:effectRef>
-          <a:fontRef idx="minor">
-            <a:schemeClr val="lt1"/>
-          </a:fontRef>
-        </p:style>
-        <p:txBody>
-          <a:bodyPr wrap="none" lIns="0" tIns="0" rIns="0" bIns="0" rtlCol="0" anchor="ctr"/>
-          <a:lstStyle/>
-          <a:p>
-            <a:pPr algn="ctr"/>
-            <a:r>
-              <a:rPr sz="850" b="0">
-                <a:solidFill>
-                  <a:srgbClr val="4A4C4F"/>
-                </a:solidFill>
-                <a:latin typeface="Arial"/>
-              </a:rPr>
-              <a:t>honor_optout</a:t>
-            </a:r>
-          </a:p>
-        </p:txBody>
-      </p:sp>
-      <p:sp>
-        <p:nvSpPr>
-          <p:cNvPr id="42" name="Rounded Rectangle 41"/>
-          <p:cNvSpPr/>
-          <p:nvPr/>
-        </p:nvSpPr>
-        <p:spPr>
-          <a:xfrm>
-            <a:off x="822960" y="6492240"/>
+            <a:off x="822960" y="7269480"/>
             <a:ext cx="2090318" cy="274320"/>
           </a:xfrm>
           <a:prstGeom prst="roundRect">
@@ -4696,13 +5724,13 @@
       </p:sp>
       <p:sp>
         <p:nvSpPr>
-          <p:cNvPr id="43" name="Rounded Rectangle 42"/>
+          <p:cNvPr id="60" name="Rounded Rectangle 59"/>
           <p:cNvSpPr/>
           <p:nvPr/>
         </p:nvSpPr>
         <p:spPr>
           <a:xfrm>
-            <a:off x="3114446" y="6492240"/>
+            <a:off x="3114446" y="7269480"/>
             <a:ext cx="2154509" cy="274320"/>
           </a:xfrm>
           <a:prstGeom prst="roundRect">
@@ -4751,13 +5779,13 @@
       </p:sp>
       <p:sp>
         <p:nvSpPr>
-          <p:cNvPr id="44" name="Rounded Rectangle 43"/>
+          <p:cNvPr id="61" name="Rounded Rectangle 60"/>
           <p:cNvSpPr/>
           <p:nvPr/>
         </p:nvSpPr>
         <p:spPr>
           <a:xfrm>
-            <a:off x="5470123" y="6492240"/>
+            <a:off x="5470123" y="7269480"/>
             <a:ext cx="549737" cy="274320"/>
           </a:xfrm>
           <a:prstGeom prst="roundRect">
@@ -4806,13 +5834,13 @@
       </p:sp>
       <p:sp>
         <p:nvSpPr>
-          <p:cNvPr id="45" name="Rounded Rectangle 44"/>
+          <p:cNvPr id="62" name="Rounded Rectangle 61"/>
           <p:cNvSpPr/>
           <p:nvPr/>
         </p:nvSpPr>
         <p:spPr>
           <a:xfrm>
-            <a:off x="6221028" y="6492240"/>
+            <a:off x="6221028" y="7269480"/>
             <a:ext cx="421355" cy="274320"/>
           </a:xfrm>
           <a:prstGeom prst="roundRect">
@@ -4860,6 +5888,11 @@
         </p:txBody>
       </p:sp>
     </p:spTree>
+    <p:extLst>
+      <p:ext uri="{BB962C8B-B14F-4D97-AF65-F5344CB8AC3E}">
+        <p14:creationId xmlns:p14="http://schemas.microsoft.com/office/powerpoint/2010/main" val="1590284914"/>
+      </p:ext>
+    </p:extLst>
   </p:cSld>
   <p:clrMapOvr>
     <a:masterClrMapping/>
@@ -4957,7 +5990,7 @@
                 </a:solidFill>
                 <a:latin typeface="Arial"/>
               </a:rPr>
-              <a:t>Persistence &amp; fallback</a:t>
+              <a:t>Routing &amp; specialists</a:t>
             </a:r>
           </a:p>
         </p:txBody>
@@ -4996,7 +6029,7 @@
                 </a:solidFill>
                 <a:latin typeface="Arial"/>
               </a:rPr>
-              <a:t>Saving the turn and returning a reply — plus the safety net that keeps every response a 200.</a:t>
+              <a:t>The remaining three specialists on the shared Claude Sonnet node — pricing, out-of-area, and the FAQ catch-all (2 of 2).</a:t>
             </a:r>
           </a:p>
         </p:txBody>
@@ -5098,21 +6131,125 @@
                 </a:solidFill>
                 <a:latin typeface="Arial"/>
               </a:rPr>
-              <a:t>11 / 17</a:t>
-            </a:r>
-          </a:p>
-        </p:txBody>
-      </p:sp>
-      <p:sp>
-        <p:nvSpPr>
-          <p:cNvPr id="8" name="TextBox 7"/>
-          <p:cNvSpPr txBox="1"/>
+              <a:t>10 / 17</a:t>
+            </a:r>
+          </a:p>
+        </p:txBody>
+      </p:sp>
+      <p:sp>
+        <p:nvSpPr>
+          <p:cNvPr id="8" name="Rounded Rectangle 7"/>
+          <p:cNvSpPr/>
           <p:nvPr/>
         </p:nvSpPr>
         <p:spPr>
           <a:xfrm>
             <a:off x="822960" y="1783080"/>
-            <a:ext cx="6263640" cy="274320"/>
+            <a:ext cx="12984480" cy="676656"/>
+          </a:xfrm>
+          <a:prstGeom prst="roundRect">
+            <a:avLst>
+              <a:gd name="adj" fmla="val 13513"/>
+            </a:avLst>
+          </a:prstGeom>
+          <a:solidFill>
+            <a:srgbClr val="F7F0FF"/>
+          </a:solidFill>
+          <a:ln w="12700">
+            <a:solidFill>
+              <a:srgbClr val="F2E5FF"/>
+            </a:solidFill>
+          </a:ln>
+          <a:effectLst/>
+        </p:spPr>
+        <p:style>
+          <a:lnRef idx="1">
+            <a:schemeClr val="accent1"/>
+          </a:lnRef>
+          <a:fillRef idx="3">
+            <a:schemeClr val="accent1"/>
+          </a:fillRef>
+          <a:effectRef idx="2">
+            <a:schemeClr val="accent1"/>
+          </a:effectRef>
+          <a:fontRef idx="minor">
+            <a:schemeClr val="lt1"/>
+          </a:fontRef>
+        </p:style>
+        <p:txBody>
+          <a:bodyPr rtlCol="0" anchor="ctr"/>
+          <a:lstStyle/>
+          <a:p>
+            <a:pPr algn="ctr"/>
+            <a:endParaRPr/>
+          </a:p>
+        </p:txBody>
+      </p:sp>
+      <p:sp>
+        <p:nvSpPr>
+          <p:cNvPr id="9" name="Rounded Rectangle 8"/>
+          <p:cNvSpPr/>
+          <p:nvPr/>
+        </p:nvSpPr>
+        <p:spPr>
+          <a:xfrm>
+            <a:off x="12258812" y="1929384"/>
+            <a:ext cx="1320027" cy="274320"/>
+          </a:xfrm>
+          <a:prstGeom prst="roundRect">
+            <a:avLst>
+              <a:gd name="adj" fmla="val 50000"/>
+            </a:avLst>
+          </a:prstGeom>
+          <a:solidFill>
+            <a:srgbClr val="F2E5FF"/>
+          </a:solidFill>
+          <a:ln>
+            <a:noFill/>
+          </a:ln>
+          <a:effectLst/>
+        </p:spPr>
+        <p:style>
+          <a:lnRef idx="1">
+            <a:schemeClr val="accent1"/>
+          </a:lnRef>
+          <a:fillRef idx="3">
+            <a:schemeClr val="accent1"/>
+          </a:fillRef>
+          <a:effectRef idx="2">
+            <a:schemeClr val="accent1"/>
+          </a:effectRef>
+          <a:fontRef idx="minor">
+            <a:schemeClr val="lt1"/>
+          </a:fontRef>
+        </p:style>
+        <p:txBody>
+          <a:bodyPr wrap="none" lIns="0" tIns="0" rIns="0" bIns="0" rtlCol="0" anchor="ctr"/>
+          <a:lstStyle/>
+          <a:p>
+            <a:pPr algn="ctr"/>
+            <a:r>
+              <a:rPr sz="900" b="1">
+                <a:solidFill>
+                  <a:srgbClr val="6600CC"/>
+                </a:solidFill>
+                <a:latin typeface="Arial"/>
+              </a:rPr>
+              <a:t>AI · Claude Sonnet</a:t>
+            </a:r>
+          </a:p>
+        </p:txBody>
+      </p:sp>
+      <p:sp>
+        <p:nvSpPr>
+          <p:cNvPr id="10" name="TextBox 9"/>
+          <p:cNvSpPr txBox="1"/>
+          <p:nvPr/>
+        </p:nvSpPr>
+        <p:spPr>
+          <a:xfrm>
+            <a:off x="1078992" y="1911095"/>
+            <a:ext cx="8686800" cy="292608"/>
           </a:xfrm>
           <a:prstGeom prst="rect">
             <a:avLst/>
@@ -5131,27 +6268,27 @@
               </a:lnSpc>
             </a:pPr>
             <a:r>
-              <a:rPr sz="1100" b="0" i="1">
-                <a:solidFill>
-                  <a:srgbClr val="4A4C4F"/>
+              <a:rPr sz="1400" b="1" i="0">
+                <a:solidFill>
+                  <a:srgbClr val="6600CC"/>
                 </a:solidFill>
                 <a:latin typeface="Arial"/>
               </a:rPr>
-              <a:t>from specialist agent output  ↓</a:t>
-            </a:r>
-          </a:p>
-        </p:txBody>
-      </p:sp>
-      <p:sp>
-        <p:nvSpPr>
-          <p:cNvPr id="9" name="TextBox 8"/>
-          <p:cNvSpPr txBox="1"/>
-          <p:nvPr/>
-        </p:nvSpPr>
-        <p:spPr>
-          <a:xfrm>
-            <a:off x="7543800" y="1783080"/>
-            <a:ext cx="6263640" cy="274320"/>
+              <a:t>All six specialists share one Claude Sonnet model node</a:t>
+            </a:r>
+          </a:p>
+        </p:txBody>
+      </p:sp>
+      <p:sp>
+        <p:nvSpPr>
+          <p:cNvPr id="11" name="TextBox 10"/>
+          <p:cNvSpPr txBox="1"/>
+          <p:nvPr/>
+        </p:nvSpPr>
+        <p:spPr>
+          <a:xfrm>
+            <a:off x="1078992" y="2203704"/>
+            <a:ext cx="10972800" cy="237744"/>
           </a:xfrm>
           <a:prstGeom prst="rect">
             <a:avLst/>
@@ -5170,31 +6307,70 @@
               </a:lnSpc>
             </a:pPr>
             <a:r>
-              <a:rPr sz="1100" b="0" i="1">
+              <a:rPr sz="1050" b="0" i="0">
                 <a:solidFill>
                   <a:srgbClr val="4A4C4F"/>
                 </a:solidFill>
                 <a:latin typeface="Arial"/>
               </a:rPr>
-              <a:t>from any LLM / agent / persist error  ↓</a:t>
-            </a:r>
-          </a:p>
-        </p:txBody>
-      </p:sp>
-      <p:sp>
-        <p:nvSpPr>
-          <p:cNvPr id="10" name="Rounded Rectangle 9"/>
+              <a:t>temperature 0.3 · 1024 tokens · least-privilege tools · no raw SQL · routed to exactly one agent</a:t>
+            </a:r>
+          </a:p>
+        </p:txBody>
+      </p:sp>
+      <p:sp>
+        <p:nvSpPr>
+          <p:cNvPr id="12" name="TextBox 11"/>
+          <p:cNvSpPr txBox="1"/>
+          <p:nvPr/>
+        </p:nvSpPr>
+        <p:spPr>
+          <a:xfrm>
+            <a:off x="7132320" y="2514600"/>
+            <a:ext cx="365760" cy="274320"/>
+          </a:xfrm>
+          <a:prstGeom prst="rect">
+            <a:avLst/>
+          </a:prstGeom>
+          <a:noFill/>
+        </p:spPr>
+        <p:txBody>
+          <a:bodyPr wrap="none" lIns="0" tIns="0" rIns="0" bIns="0" anchor="ctr">
+            <a:spAutoFit/>
+          </a:bodyPr>
+          <a:lstStyle/>
+          <a:p>
+            <a:pPr algn="ctr">
+              <a:lnSpc>
+                <a:spcPct val="100000"/>
+              </a:lnSpc>
+            </a:pPr>
+            <a:r>
+              <a:rPr sz="1500" b="0" i="0">
+                <a:solidFill>
+                  <a:srgbClr val="8F9193"/>
+                </a:solidFill>
+                <a:latin typeface="Arial"/>
+              </a:rPr>
+              <a:t>↓</a:t>
+            </a:r>
+          </a:p>
+        </p:txBody>
+      </p:sp>
+      <p:sp>
+        <p:nvSpPr>
+          <p:cNvPr id="13" name="Rounded Rectangle 12"/>
           <p:cNvSpPr/>
           <p:nvPr/>
         </p:nvSpPr>
         <p:spPr>
           <a:xfrm>
-            <a:off x="822960" y="2148840"/>
-            <a:ext cx="6263640" cy="1508760"/>
+            <a:off x="822960" y="2788920"/>
+            <a:ext cx="4084319" cy="3429000"/>
           </a:xfrm>
           <a:prstGeom prst="roundRect">
             <a:avLst>
-              <a:gd name="adj" fmla="val 6060"/>
+              <a:gd name="adj" fmla="val 2666"/>
             </a:avLst>
           </a:prstGeom>
           <a:solidFill>
@@ -5232,14 +6408,108 @@
       </p:sp>
       <p:sp>
         <p:nvSpPr>
-          <p:cNvPr id="11" name="Rounded Rectangle 10"/>
+          <p:cNvPr id="14" name="Rounded Rectangle 13"/>
           <p:cNvSpPr/>
           <p:nvPr/>
         </p:nvSpPr>
         <p:spPr>
           <a:xfrm>
-            <a:off x="5308640" y="2331720"/>
-            <a:ext cx="1576791" cy="274320"/>
+            <a:off x="3753398" y="2971800"/>
+            <a:ext cx="952713" cy="274320"/>
+          </a:xfrm>
+          <a:prstGeom prst="roundRect">
+            <a:avLst>
+              <a:gd name="adj" fmla="val 50000"/>
+            </a:avLst>
+          </a:prstGeom>
+          <a:solidFill>
+            <a:srgbClr val="F2E5FF"/>
+          </a:solidFill>
+          <a:ln>
+            <a:noFill/>
+          </a:ln>
+          <a:effectLst/>
+        </p:spPr>
+        <p:style>
+          <a:lnRef idx="1">
+            <a:schemeClr val="accent1"/>
+          </a:lnRef>
+          <a:fillRef idx="3">
+            <a:schemeClr val="accent1"/>
+          </a:fillRef>
+          <a:effectRef idx="2">
+            <a:schemeClr val="accent1"/>
+          </a:effectRef>
+          <a:fontRef idx="minor">
+            <a:schemeClr val="lt1"/>
+          </a:fontRef>
+        </p:style>
+        <p:txBody>
+          <a:bodyPr wrap="none" lIns="0" tIns="0" rIns="0" bIns="0" rtlCol="0" anchor="ctr"/>
+          <a:lstStyle/>
+          <a:p>
+            <a:pPr algn="ctr"/>
+            <a:r>
+              <a:rPr sz="850" b="1">
+                <a:solidFill>
+                  <a:srgbClr val="6600CC"/>
+                </a:solidFill>
+                <a:latin typeface="Arial"/>
+              </a:rPr>
+              <a:t>Claude Sonnet</a:t>
+            </a:r>
+          </a:p>
+        </p:txBody>
+      </p:sp>
+      <p:sp>
+        <p:nvSpPr>
+          <p:cNvPr id="15" name="TextBox 14"/>
+          <p:cNvSpPr txBox="1"/>
+          <p:nvPr/>
+        </p:nvSpPr>
+        <p:spPr>
+          <a:xfrm>
+            <a:off x="1024128" y="2990088"/>
+            <a:ext cx="2619542" cy="310896"/>
+          </a:xfrm>
+          <a:prstGeom prst="rect">
+            <a:avLst/>
+          </a:prstGeom>
+          <a:noFill/>
+        </p:spPr>
+        <p:txBody>
+          <a:bodyPr wrap="square" lIns="0" tIns="0" rIns="0" bIns="0" anchor="t">
+            <a:spAutoFit/>
+          </a:bodyPr>
+          <a:lstStyle/>
+          <a:p>
+            <a:pPr algn="l">
+              <a:lnSpc>
+                <a:spcPct val="100000"/>
+              </a:lnSpc>
+            </a:pPr>
+            <a:r>
+              <a:rPr sz="1400" b="1" i="0">
+                <a:solidFill>
+                  <a:srgbClr val="070A0E"/>
+                </a:solidFill>
+                <a:latin typeface="Arial"/>
+              </a:rPr>
+              <a:t>Pricing-Quote</a:t>
+            </a:r>
+          </a:p>
+        </p:txBody>
+      </p:sp>
+      <p:sp>
+        <p:nvSpPr>
+          <p:cNvPr id="16" name="Rounded Rectangle 15"/>
+          <p:cNvSpPr/>
+          <p:nvPr/>
+        </p:nvSpPr>
+        <p:spPr>
+          <a:xfrm>
+            <a:off x="1024128" y="3392424"/>
+            <a:ext cx="1073962" cy="256032"/>
           </a:xfrm>
           <a:prstGeom prst="roundRect">
             <a:avLst>
@@ -5274,66 +6544,27 @@
           <a:p>
             <a:pPr algn="ctr"/>
             <a:r>
-              <a:rPr sz="900" b="1">
+              <a:rPr sz="850" b="0">
                 <a:solidFill>
                   <a:srgbClr val="4A4C4F"/>
                 </a:solidFill>
                 <a:latin typeface="Arial"/>
               </a:rPr>
-              <a:t>Code · Supabase writes</a:t>
-            </a:r>
-          </a:p>
-        </p:txBody>
-      </p:sp>
-      <p:sp>
-        <p:nvSpPr>
-          <p:cNvPr id="12" name="TextBox 11"/>
-          <p:cNvSpPr txBox="1"/>
-          <p:nvPr/>
-        </p:nvSpPr>
-        <p:spPr>
-          <a:xfrm>
-            <a:off x="1024128" y="2350008"/>
-            <a:ext cx="4147352" cy="365760"/>
-          </a:xfrm>
-          <a:prstGeom prst="rect">
-            <a:avLst/>
-          </a:prstGeom>
-          <a:noFill/>
-        </p:spPr>
-        <p:txBody>
-          <a:bodyPr wrap="square" lIns="0" tIns="0" rIns="0" bIns="0" anchor="t">
-            <a:spAutoFit/>
-          </a:bodyPr>
-          <a:lstStyle/>
-          <a:p>
-            <a:pPr algn="l">
-              <a:lnSpc>
-                <a:spcPct val="100000"/>
-              </a:lnSpc>
-            </a:pPr>
-            <a:r>
-              <a:rPr sz="1500" b="1" i="0">
-                <a:solidFill>
-                  <a:srgbClr val="070A0E"/>
-                </a:solidFill>
-                <a:latin typeface="Arial"/>
-              </a:rPr>
-              <a:t>Persist + eval</a:t>
-            </a:r>
-          </a:p>
-        </p:txBody>
-      </p:sp>
-      <p:sp>
-        <p:nvSpPr>
-          <p:cNvPr id="13" name="TextBox 12"/>
-          <p:cNvSpPr txBox="1"/>
-          <p:nvPr/>
-        </p:nvSpPr>
-        <p:spPr>
-          <a:xfrm>
-            <a:off x="1024128" y="2770632"/>
-            <a:ext cx="5861303" cy="362711"/>
+              <a:t>intent: pricing</a:t>
+            </a:r>
+          </a:p>
+        </p:txBody>
+      </p:sp>
+      <p:sp>
+        <p:nvSpPr>
+          <p:cNvPr id="17" name="TextBox 16"/>
+          <p:cNvSpPr txBox="1"/>
+          <p:nvPr/>
+        </p:nvSpPr>
+        <p:spPr>
+          <a:xfrm>
+            <a:off x="1024128" y="3758184"/>
+            <a:ext cx="3681983" cy="566928"/>
           </a:xfrm>
           <a:prstGeom prst="rect">
             <a:avLst/>
@@ -5352,27 +6583,27 @@
               </a:lnSpc>
             </a:pPr>
             <a:r>
-              <a:rPr sz="1100" b="0" i="0">
+              <a:rPr sz="1050" b="0" i="0">
                 <a:solidFill>
                   <a:srgbClr val="4A4C4F"/>
                 </a:solidFill>
                 <a:latin typeface="Arial"/>
               </a:rPr>
-              <a:t>Saves both turns and the scoring record, then updates the conversation. No AI.</a:t>
-            </a:r>
-          </a:p>
-        </p:txBody>
-      </p:sp>
-      <p:sp>
-        <p:nvSpPr>
-          <p:cNvPr id="14" name="Rounded Rectangle 13"/>
+              <a:t>Answers cost / quote questions using configured price ranges only.</a:t>
+            </a:r>
+          </a:p>
+        </p:txBody>
+      </p:sp>
+      <p:sp>
+        <p:nvSpPr>
+          <p:cNvPr id="18" name="Rounded Rectangle 17"/>
           <p:cNvSpPr/>
           <p:nvPr/>
         </p:nvSpPr>
         <p:spPr>
           <a:xfrm>
-            <a:off x="1024128" y="3206496"/>
-            <a:ext cx="1448409" cy="256032"/>
+            <a:off x="1024128" y="4434840"/>
+            <a:ext cx="1437711" cy="256032"/>
           </a:xfrm>
           <a:prstGeom prst="roundRect">
             <a:avLst>
@@ -5409,27 +6640,27 @@
           <a:p>
             <a:pPr algn="ctr"/>
             <a:r>
-              <a:rPr sz="900" b="0">
+              <a:rPr sz="850" b="0">
                 <a:solidFill>
                   <a:srgbClr val="4A4C4F"/>
                 </a:solidFill>
                 <a:latin typeface="Arial"/>
               </a:rPr>
-              <a:t>messages — user turn</a:t>
-            </a:r>
-          </a:p>
-        </p:txBody>
-      </p:sp>
-      <p:sp>
-        <p:nvSpPr>
-          <p:cNvPr id="15" name="Rounded Rectangle 14"/>
+              <a:t>check_service_offered</a:t>
+            </a:r>
+          </a:p>
+        </p:txBody>
+      </p:sp>
+      <p:sp>
+        <p:nvSpPr>
+          <p:cNvPr id="19" name="Rounded Rectangle 18"/>
           <p:cNvSpPr/>
           <p:nvPr/>
         </p:nvSpPr>
         <p:spPr>
           <a:xfrm>
-            <a:off x="2545689" y="3206496"/>
-            <a:ext cx="1897745" cy="256032"/>
+            <a:off x="2534991" y="4434840"/>
+            <a:ext cx="1316461" cy="256032"/>
           </a:xfrm>
           <a:prstGeom prst="roundRect">
             <a:avLst>
@@ -5466,27 +6697,27 @@
           <a:p>
             <a:pPr algn="ctr"/>
             <a:r>
-              <a:rPr sz="900" b="0">
+              <a:rPr sz="850" b="0">
                 <a:solidFill>
                   <a:srgbClr val="4A4C4F"/>
                 </a:solidFill>
                 <a:latin typeface="Arial"/>
               </a:rPr>
-              <a:t>messages — assistant + eval</a:t>
-            </a:r>
-          </a:p>
-        </p:txBody>
-      </p:sp>
-      <p:sp>
-        <p:nvSpPr>
-          <p:cNvPr id="16" name="Rounded Rectangle 15"/>
+              <a:t>get_service_pricing</a:t>
+            </a:r>
+          </a:p>
+        </p:txBody>
+      </p:sp>
+      <p:sp>
+        <p:nvSpPr>
+          <p:cNvPr id="20" name="Rounded Rectangle 19"/>
           <p:cNvSpPr/>
           <p:nvPr/>
         </p:nvSpPr>
         <p:spPr>
           <a:xfrm>
-            <a:off x="4516587" y="3206496"/>
-            <a:ext cx="1897745" cy="256032"/>
+            <a:off x="1024128" y="4754879"/>
+            <a:ext cx="892088" cy="256032"/>
           </a:xfrm>
           <a:prstGeom prst="roundRect">
             <a:avLst>
@@ -5523,27 +6754,264 @@
           <a:p>
             <a:pPr algn="ctr"/>
             <a:r>
-              <a:rPr sz="900" b="0">
+              <a:rPr sz="850" b="0">
                 <a:solidFill>
                   <a:srgbClr val="4A4C4F"/>
                 </a:solidFill>
                 <a:latin typeface="Arial"/>
               </a:rPr>
-              <a:t>conversations · last_intent</a:t>
-            </a:r>
-          </a:p>
-        </p:txBody>
-      </p:sp>
-      <p:sp>
-        <p:nvSpPr>
-          <p:cNvPr id="17" name="Rounded Rectangle 16"/>
+              <a:t>capture_lead</a:t>
+            </a:r>
+          </a:p>
+        </p:txBody>
+      </p:sp>
+      <p:sp>
+        <p:nvSpPr>
+          <p:cNvPr id="21" name="Rounded Rectangle 20"/>
           <p:cNvSpPr/>
           <p:nvPr/>
         </p:nvSpPr>
         <p:spPr>
           <a:xfrm>
-            <a:off x="1024128" y="3535680"/>
-            <a:ext cx="1576791" cy="256032"/>
+            <a:off x="5273040" y="2788920"/>
+            <a:ext cx="4084319" cy="3429000"/>
+          </a:xfrm>
+          <a:prstGeom prst="roundRect">
+            <a:avLst>
+              <a:gd name="adj" fmla="val 2666"/>
+            </a:avLst>
+          </a:prstGeom>
+          <a:solidFill>
+            <a:srgbClr val="FFFFFF"/>
+          </a:solidFill>
+          <a:ln w="12700">
+            <a:solidFill>
+              <a:srgbClr val="DADADB"/>
+            </a:solidFill>
+          </a:ln>
+          <a:effectLst/>
+        </p:spPr>
+        <p:style>
+          <a:lnRef idx="1">
+            <a:schemeClr val="accent1"/>
+          </a:lnRef>
+          <a:fillRef idx="3">
+            <a:schemeClr val="accent1"/>
+          </a:fillRef>
+          <a:effectRef idx="2">
+            <a:schemeClr val="accent1"/>
+          </a:effectRef>
+          <a:fontRef idx="minor">
+            <a:schemeClr val="lt1"/>
+          </a:fontRef>
+        </p:style>
+        <p:txBody>
+          <a:bodyPr rtlCol="0" anchor="ctr"/>
+          <a:lstStyle/>
+          <a:p>
+            <a:pPr algn="ctr"/>
+            <a:endParaRPr/>
+          </a:p>
+        </p:txBody>
+      </p:sp>
+      <p:sp>
+        <p:nvSpPr>
+          <p:cNvPr id="22" name="Rounded Rectangle 21"/>
+          <p:cNvSpPr/>
+          <p:nvPr/>
+        </p:nvSpPr>
+        <p:spPr>
+          <a:xfrm>
+            <a:off x="8203478" y="2971800"/>
+            <a:ext cx="952713" cy="274320"/>
+          </a:xfrm>
+          <a:prstGeom prst="roundRect">
+            <a:avLst>
+              <a:gd name="adj" fmla="val 50000"/>
+            </a:avLst>
+          </a:prstGeom>
+          <a:solidFill>
+            <a:srgbClr val="F2E5FF"/>
+          </a:solidFill>
+          <a:ln>
+            <a:noFill/>
+          </a:ln>
+          <a:effectLst/>
+        </p:spPr>
+        <p:style>
+          <a:lnRef idx="1">
+            <a:schemeClr val="accent1"/>
+          </a:lnRef>
+          <a:fillRef idx="3">
+            <a:schemeClr val="accent1"/>
+          </a:fillRef>
+          <a:effectRef idx="2">
+            <a:schemeClr val="accent1"/>
+          </a:effectRef>
+          <a:fontRef idx="minor">
+            <a:schemeClr val="lt1"/>
+          </a:fontRef>
+        </p:style>
+        <p:txBody>
+          <a:bodyPr wrap="none" lIns="0" tIns="0" rIns="0" bIns="0" rtlCol="0" anchor="ctr"/>
+          <a:lstStyle/>
+          <a:p>
+            <a:pPr algn="ctr"/>
+            <a:r>
+              <a:rPr sz="850" b="1">
+                <a:solidFill>
+                  <a:srgbClr val="6600CC"/>
+                </a:solidFill>
+                <a:latin typeface="Arial"/>
+              </a:rPr>
+              <a:t>Claude Sonnet</a:t>
+            </a:r>
+          </a:p>
+        </p:txBody>
+      </p:sp>
+      <p:sp>
+        <p:nvSpPr>
+          <p:cNvPr id="23" name="TextBox 22"/>
+          <p:cNvSpPr txBox="1"/>
+          <p:nvPr/>
+        </p:nvSpPr>
+        <p:spPr>
+          <a:xfrm>
+            <a:off x="5474208" y="2990088"/>
+            <a:ext cx="2619542" cy="310896"/>
+          </a:xfrm>
+          <a:prstGeom prst="rect">
+            <a:avLst/>
+          </a:prstGeom>
+          <a:noFill/>
+        </p:spPr>
+        <p:txBody>
+          <a:bodyPr wrap="square" lIns="0" tIns="0" rIns="0" bIns="0" anchor="t">
+            <a:spAutoFit/>
+          </a:bodyPr>
+          <a:lstStyle/>
+          <a:p>
+            <a:pPr algn="l">
+              <a:lnSpc>
+                <a:spcPct val="100000"/>
+              </a:lnSpc>
+            </a:pPr>
+            <a:r>
+              <a:rPr sz="1400" b="1" i="0">
+                <a:solidFill>
+                  <a:srgbClr val="070A0E"/>
+                </a:solidFill>
+                <a:latin typeface="Arial"/>
+              </a:rPr>
+              <a:t>Out-of-Area</a:t>
+            </a:r>
+          </a:p>
+        </p:txBody>
+      </p:sp>
+      <p:sp>
+        <p:nvSpPr>
+          <p:cNvPr id="24" name="Rounded Rectangle 23"/>
+          <p:cNvSpPr/>
+          <p:nvPr/>
+        </p:nvSpPr>
+        <p:spPr>
+          <a:xfrm>
+            <a:off x="5474208" y="3392424"/>
+            <a:ext cx="1316461" cy="256032"/>
+          </a:xfrm>
+          <a:prstGeom prst="roundRect">
+            <a:avLst>
+              <a:gd name="adj" fmla="val 50000"/>
+            </a:avLst>
+          </a:prstGeom>
+          <a:solidFill>
+            <a:srgbClr val="F0F0F1"/>
+          </a:solidFill>
+          <a:ln>
+            <a:noFill/>
+          </a:ln>
+          <a:effectLst/>
+        </p:spPr>
+        <p:style>
+          <a:lnRef idx="1">
+            <a:schemeClr val="accent1"/>
+          </a:lnRef>
+          <a:fillRef idx="3">
+            <a:schemeClr val="accent1"/>
+          </a:fillRef>
+          <a:effectRef idx="2">
+            <a:schemeClr val="accent1"/>
+          </a:effectRef>
+          <a:fontRef idx="minor">
+            <a:schemeClr val="lt1"/>
+          </a:fontRef>
+        </p:style>
+        <p:txBody>
+          <a:bodyPr wrap="none" lIns="0" tIns="0" rIns="0" bIns="0" rtlCol="0" anchor="ctr"/>
+          <a:lstStyle/>
+          <a:p>
+            <a:pPr algn="ctr"/>
+            <a:r>
+              <a:rPr sz="850" b="0">
+                <a:solidFill>
+                  <a:srgbClr val="4A4C4F"/>
+                </a:solidFill>
+                <a:latin typeface="Arial"/>
+              </a:rPr>
+              <a:t>intent: out_of_area</a:t>
+            </a:r>
+          </a:p>
+        </p:txBody>
+      </p:sp>
+      <p:sp>
+        <p:nvSpPr>
+          <p:cNvPr id="25" name="TextBox 24"/>
+          <p:cNvSpPr txBox="1"/>
+          <p:nvPr/>
+        </p:nvSpPr>
+        <p:spPr>
+          <a:xfrm>
+            <a:off x="5474208" y="3758184"/>
+            <a:ext cx="3681983" cy="566928"/>
+          </a:xfrm>
+          <a:prstGeom prst="rect">
+            <a:avLst/>
+          </a:prstGeom>
+          <a:noFill/>
+        </p:spPr>
+        <p:txBody>
+          <a:bodyPr wrap="square" lIns="0" tIns="0" rIns="0" bIns="0" anchor="t">
+            <a:spAutoFit/>
+          </a:bodyPr>
+          <a:lstStyle/>
+          <a:p>
+            <a:pPr algn="l">
+              <a:lnSpc>
+                <a:spcPct val="105000"/>
+              </a:lnSpc>
+            </a:pPr>
+            <a:r>
+              <a:rPr sz="1050" b="0" i="0">
+                <a:solidFill>
+                  <a:srgbClr val="4A4C4F"/>
+                </a:solidFill>
+                <a:latin typeface="Arial"/>
+              </a:rPr>
+              <a:t>Handles requests outside the service area and captures the lead.</a:t>
+            </a:r>
+          </a:p>
+        </p:txBody>
+      </p:sp>
+      <p:sp>
+        <p:nvSpPr>
+          <p:cNvPr id="26" name="Rounded Rectangle 25"/>
+          <p:cNvSpPr/>
+          <p:nvPr/>
+        </p:nvSpPr>
+        <p:spPr>
+          <a:xfrm>
+            <a:off x="5474208" y="4434840"/>
+            <a:ext cx="1437711" cy="256032"/>
           </a:xfrm>
           <a:prstGeom prst="roundRect">
             <a:avLst>
@@ -5580,6 +7048,1765 @@
           <a:p>
             <a:pPr algn="ctr"/>
             <a:r>
+              <a:rPr sz="850" b="0">
+                <a:solidFill>
+                  <a:srgbClr val="4A4C4F"/>
+                </a:solidFill>
+                <a:latin typeface="Arial"/>
+              </a:rPr>
+              <a:t>validate_service_area</a:t>
+            </a:r>
+          </a:p>
+        </p:txBody>
+      </p:sp>
+      <p:sp>
+        <p:nvSpPr>
+          <p:cNvPr id="27" name="Rounded Rectangle 26"/>
+          <p:cNvSpPr/>
+          <p:nvPr/>
+        </p:nvSpPr>
+        <p:spPr>
+          <a:xfrm>
+            <a:off x="6985071" y="4434840"/>
+            <a:ext cx="892088" cy="256032"/>
+          </a:xfrm>
+          <a:prstGeom prst="roundRect">
+            <a:avLst>
+              <a:gd name="adj" fmla="val 50000"/>
+            </a:avLst>
+          </a:prstGeom>
+          <a:solidFill>
+            <a:srgbClr val="FAFAFA"/>
+          </a:solidFill>
+          <a:ln w="9525">
+            <a:solidFill>
+              <a:srgbClr val="DADADB"/>
+            </a:solidFill>
+          </a:ln>
+          <a:effectLst/>
+        </p:spPr>
+        <p:style>
+          <a:lnRef idx="1">
+            <a:schemeClr val="accent1"/>
+          </a:lnRef>
+          <a:fillRef idx="3">
+            <a:schemeClr val="accent1"/>
+          </a:fillRef>
+          <a:effectRef idx="2">
+            <a:schemeClr val="accent1"/>
+          </a:effectRef>
+          <a:fontRef idx="minor">
+            <a:schemeClr val="lt1"/>
+          </a:fontRef>
+        </p:style>
+        <p:txBody>
+          <a:bodyPr wrap="none" lIns="0" tIns="0" rIns="0" bIns="0" rtlCol="0" anchor="ctr"/>
+          <a:lstStyle/>
+          <a:p>
+            <a:pPr algn="ctr"/>
+            <a:r>
+              <a:rPr sz="850" b="0">
+                <a:solidFill>
+                  <a:srgbClr val="4A4C4F"/>
+                </a:solidFill>
+                <a:latin typeface="Arial"/>
+              </a:rPr>
+              <a:t>capture_lead</a:t>
+            </a:r>
+          </a:p>
+        </p:txBody>
+      </p:sp>
+      <p:sp>
+        <p:nvSpPr>
+          <p:cNvPr id="28" name="Rounded Rectangle 27"/>
+          <p:cNvSpPr/>
+          <p:nvPr/>
+        </p:nvSpPr>
+        <p:spPr>
+          <a:xfrm>
+            <a:off x="9723120" y="2788920"/>
+            <a:ext cx="4084319" cy="3429000"/>
+          </a:xfrm>
+          <a:prstGeom prst="roundRect">
+            <a:avLst>
+              <a:gd name="adj" fmla="val 2666"/>
+            </a:avLst>
+          </a:prstGeom>
+          <a:solidFill>
+            <a:srgbClr val="FFFFFF"/>
+          </a:solidFill>
+          <a:ln w="12700">
+            <a:solidFill>
+              <a:srgbClr val="DADADB"/>
+            </a:solidFill>
+          </a:ln>
+          <a:effectLst/>
+        </p:spPr>
+        <p:style>
+          <a:lnRef idx="1">
+            <a:schemeClr val="accent1"/>
+          </a:lnRef>
+          <a:fillRef idx="3">
+            <a:schemeClr val="accent1"/>
+          </a:fillRef>
+          <a:effectRef idx="2">
+            <a:schemeClr val="accent1"/>
+          </a:effectRef>
+          <a:fontRef idx="minor">
+            <a:schemeClr val="lt1"/>
+          </a:fontRef>
+        </p:style>
+        <p:txBody>
+          <a:bodyPr rtlCol="0" anchor="ctr"/>
+          <a:lstStyle/>
+          <a:p>
+            <a:pPr algn="ctr"/>
+            <a:endParaRPr/>
+          </a:p>
+        </p:txBody>
+      </p:sp>
+      <p:sp>
+        <p:nvSpPr>
+          <p:cNvPr id="29" name="Rounded Rectangle 28"/>
+          <p:cNvSpPr/>
+          <p:nvPr/>
+        </p:nvSpPr>
+        <p:spPr>
+          <a:xfrm>
+            <a:off x="12653558" y="2971800"/>
+            <a:ext cx="952713" cy="274320"/>
+          </a:xfrm>
+          <a:prstGeom prst="roundRect">
+            <a:avLst>
+              <a:gd name="adj" fmla="val 50000"/>
+            </a:avLst>
+          </a:prstGeom>
+          <a:solidFill>
+            <a:srgbClr val="F2E5FF"/>
+          </a:solidFill>
+          <a:ln>
+            <a:noFill/>
+          </a:ln>
+          <a:effectLst/>
+        </p:spPr>
+        <p:style>
+          <a:lnRef idx="1">
+            <a:schemeClr val="accent1"/>
+          </a:lnRef>
+          <a:fillRef idx="3">
+            <a:schemeClr val="accent1"/>
+          </a:fillRef>
+          <a:effectRef idx="2">
+            <a:schemeClr val="accent1"/>
+          </a:effectRef>
+          <a:fontRef idx="minor">
+            <a:schemeClr val="lt1"/>
+          </a:fontRef>
+        </p:style>
+        <p:txBody>
+          <a:bodyPr wrap="none" lIns="0" tIns="0" rIns="0" bIns="0" rtlCol="0" anchor="ctr"/>
+          <a:lstStyle/>
+          <a:p>
+            <a:pPr algn="ctr"/>
+            <a:r>
+              <a:rPr sz="850" b="1">
+                <a:solidFill>
+                  <a:srgbClr val="6600CC"/>
+                </a:solidFill>
+                <a:latin typeface="Arial"/>
+              </a:rPr>
+              <a:t>Claude Sonnet</a:t>
+            </a:r>
+          </a:p>
+        </p:txBody>
+      </p:sp>
+      <p:sp>
+        <p:nvSpPr>
+          <p:cNvPr id="30" name="TextBox 29"/>
+          <p:cNvSpPr txBox="1"/>
+          <p:nvPr/>
+        </p:nvSpPr>
+        <p:spPr>
+          <a:xfrm>
+            <a:off x="9924288" y="2990088"/>
+            <a:ext cx="2619542" cy="310896"/>
+          </a:xfrm>
+          <a:prstGeom prst="rect">
+            <a:avLst/>
+          </a:prstGeom>
+          <a:noFill/>
+        </p:spPr>
+        <p:txBody>
+          <a:bodyPr wrap="square" lIns="0" tIns="0" rIns="0" bIns="0" anchor="t">
+            <a:spAutoFit/>
+          </a:bodyPr>
+          <a:lstStyle/>
+          <a:p>
+            <a:pPr algn="l">
+              <a:lnSpc>
+                <a:spcPct val="100000"/>
+              </a:lnSpc>
+            </a:pPr>
+            <a:r>
+              <a:rPr sz="1400" b="1" i="0">
+                <a:solidFill>
+                  <a:srgbClr val="070A0E"/>
+                </a:solidFill>
+                <a:latin typeface="Arial"/>
+              </a:rPr>
+              <a:t>General-FAQ</a:t>
+            </a:r>
+          </a:p>
+        </p:txBody>
+      </p:sp>
+      <p:sp>
+        <p:nvSpPr>
+          <p:cNvPr id="31" name="Rounded Rectangle 30"/>
+          <p:cNvSpPr/>
+          <p:nvPr/>
+        </p:nvSpPr>
+        <p:spPr>
+          <a:xfrm>
+            <a:off x="9924288" y="3392424"/>
+            <a:ext cx="1255836" cy="256032"/>
+          </a:xfrm>
+          <a:prstGeom prst="roundRect">
+            <a:avLst>
+              <a:gd name="adj" fmla="val 50000"/>
+            </a:avLst>
+          </a:prstGeom>
+          <a:solidFill>
+            <a:srgbClr val="F0F0F1"/>
+          </a:solidFill>
+          <a:ln>
+            <a:noFill/>
+          </a:ln>
+          <a:effectLst/>
+        </p:spPr>
+        <p:style>
+          <a:lnRef idx="1">
+            <a:schemeClr val="accent1"/>
+          </a:lnRef>
+          <a:fillRef idx="3">
+            <a:schemeClr val="accent1"/>
+          </a:fillRef>
+          <a:effectRef idx="2">
+            <a:schemeClr val="accent1"/>
+          </a:effectRef>
+          <a:fontRef idx="minor">
+            <a:schemeClr val="lt1"/>
+          </a:fontRef>
+        </p:style>
+        <p:txBody>
+          <a:bodyPr wrap="none" lIns="0" tIns="0" rIns="0" bIns="0" rtlCol="0" anchor="ctr"/>
+          <a:lstStyle/>
+          <a:p>
+            <a:pPr algn="ctr"/>
+            <a:r>
+              <a:rPr sz="850" b="0">
+                <a:solidFill>
+                  <a:srgbClr val="4A4C4F"/>
+                </a:solidFill>
+                <a:latin typeface="Arial"/>
+              </a:rPr>
+              <a:t>intent: faq / else</a:t>
+            </a:r>
+          </a:p>
+        </p:txBody>
+      </p:sp>
+      <p:sp>
+        <p:nvSpPr>
+          <p:cNvPr id="32" name="TextBox 31"/>
+          <p:cNvSpPr txBox="1"/>
+          <p:nvPr/>
+        </p:nvSpPr>
+        <p:spPr>
+          <a:xfrm>
+            <a:off x="9924288" y="3758184"/>
+            <a:ext cx="3681983" cy="566928"/>
+          </a:xfrm>
+          <a:prstGeom prst="rect">
+            <a:avLst/>
+          </a:prstGeom>
+          <a:noFill/>
+        </p:spPr>
+        <p:txBody>
+          <a:bodyPr wrap="square" lIns="0" tIns="0" rIns="0" bIns="0" anchor="t">
+            <a:spAutoFit/>
+          </a:bodyPr>
+          <a:lstStyle/>
+          <a:p>
+            <a:pPr algn="l">
+              <a:lnSpc>
+                <a:spcPct val="105000"/>
+              </a:lnSpc>
+            </a:pPr>
+            <a:r>
+              <a:rPr sz="1050" b="0" i="0">
+                <a:solidFill>
+                  <a:srgbClr val="4A4C4F"/>
+                </a:solidFill>
+                <a:latin typeface="Arial"/>
+              </a:rPr>
+              <a:t>Answers questions, status / ETA, confirmations, callbacks, opt-out, and human handoff.</a:t>
+            </a:r>
+          </a:p>
+        </p:txBody>
+      </p:sp>
+      <p:sp>
+        <p:nvSpPr>
+          <p:cNvPr id="33" name="Rounded Rectangle 32"/>
+          <p:cNvSpPr/>
+          <p:nvPr/>
+        </p:nvSpPr>
+        <p:spPr>
+          <a:xfrm>
+            <a:off x="9924288" y="4434840"/>
+            <a:ext cx="1255836" cy="256032"/>
+          </a:xfrm>
+          <a:prstGeom prst="roundRect">
+            <a:avLst>
+              <a:gd name="adj" fmla="val 50000"/>
+            </a:avLst>
+          </a:prstGeom>
+          <a:solidFill>
+            <a:srgbClr val="FAFAFA"/>
+          </a:solidFill>
+          <a:ln w="9525">
+            <a:solidFill>
+              <a:srgbClr val="DADADB"/>
+            </a:solidFill>
+          </a:ln>
+          <a:effectLst/>
+        </p:spPr>
+        <p:style>
+          <a:lnRef idx="1">
+            <a:schemeClr val="accent1"/>
+          </a:lnRef>
+          <a:fillRef idx="3">
+            <a:schemeClr val="accent1"/>
+          </a:fillRef>
+          <a:effectRef idx="2">
+            <a:schemeClr val="accent1"/>
+          </a:effectRef>
+          <a:fontRef idx="minor">
+            <a:schemeClr val="lt1"/>
+          </a:fontRef>
+        </p:style>
+        <p:txBody>
+          <a:bodyPr wrap="none" lIns="0" tIns="0" rIns="0" bIns="0" rtlCol="0" anchor="ctr"/>
+          <a:lstStyle/>
+          <a:p>
+            <a:pPr algn="ctr"/>
+            <a:r>
+              <a:rPr sz="850" b="0">
+                <a:solidFill>
+                  <a:srgbClr val="4A4C4F"/>
+                </a:solidFill>
+                <a:latin typeface="Arial"/>
+              </a:rPr>
+              <a:t>lookup_appointment</a:t>
+            </a:r>
+          </a:p>
+        </p:txBody>
+      </p:sp>
+      <p:sp>
+        <p:nvSpPr>
+          <p:cNvPr id="34" name="Rounded Rectangle 33"/>
+          <p:cNvSpPr/>
+          <p:nvPr/>
+        </p:nvSpPr>
+        <p:spPr>
+          <a:xfrm>
+            <a:off x="11253276" y="4434840"/>
+            <a:ext cx="1316461" cy="256032"/>
+          </a:xfrm>
+          <a:prstGeom prst="roundRect">
+            <a:avLst>
+              <a:gd name="adj" fmla="val 50000"/>
+            </a:avLst>
+          </a:prstGeom>
+          <a:solidFill>
+            <a:srgbClr val="FAFAFA"/>
+          </a:solidFill>
+          <a:ln w="9525">
+            <a:solidFill>
+              <a:srgbClr val="DADADB"/>
+            </a:solidFill>
+          </a:ln>
+          <a:effectLst/>
+        </p:spPr>
+        <p:style>
+          <a:lnRef idx="1">
+            <a:schemeClr val="accent1"/>
+          </a:lnRef>
+          <a:fillRef idx="3">
+            <a:schemeClr val="accent1"/>
+          </a:fillRef>
+          <a:effectRef idx="2">
+            <a:schemeClr val="accent1"/>
+          </a:effectRef>
+          <a:fontRef idx="minor">
+            <a:schemeClr val="lt1"/>
+          </a:fontRef>
+        </p:style>
+        <p:txBody>
+          <a:bodyPr wrap="none" lIns="0" tIns="0" rIns="0" bIns="0" rtlCol="0" anchor="ctr"/>
+          <a:lstStyle/>
+          <a:p>
+            <a:pPr algn="ctr"/>
+            <a:r>
+              <a:rPr sz="850" b="0">
+                <a:solidFill>
+                  <a:srgbClr val="4A4C4F"/>
+                </a:solidFill>
+                <a:latin typeface="Arial"/>
+              </a:rPr>
+              <a:t>get_service_pricing</a:t>
+            </a:r>
+          </a:p>
+        </p:txBody>
+      </p:sp>
+      <p:sp>
+        <p:nvSpPr>
+          <p:cNvPr id="35" name="Rounded Rectangle 34"/>
+          <p:cNvSpPr/>
+          <p:nvPr/>
+        </p:nvSpPr>
+        <p:spPr>
+          <a:xfrm>
+            <a:off x="9924288" y="4754879"/>
+            <a:ext cx="1255836" cy="256032"/>
+          </a:xfrm>
+          <a:prstGeom prst="roundRect">
+            <a:avLst>
+              <a:gd name="adj" fmla="val 50000"/>
+            </a:avLst>
+          </a:prstGeom>
+          <a:solidFill>
+            <a:srgbClr val="FAFAFA"/>
+          </a:solidFill>
+          <a:ln w="9525">
+            <a:solidFill>
+              <a:srgbClr val="DADADB"/>
+            </a:solidFill>
+          </a:ln>
+          <a:effectLst/>
+        </p:spPr>
+        <p:style>
+          <a:lnRef idx="1">
+            <a:schemeClr val="accent1"/>
+          </a:lnRef>
+          <a:fillRef idx="3">
+            <a:schemeClr val="accent1"/>
+          </a:fillRef>
+          <a:effectRef idx="2">
+            <a:schemeClr val="accent1"/>
+          </a:effectRef>
+          <a:fontRef idx="minor">
+            <a:schemeClr val="lt1"/>
+          </a:fontRef>
+        </p:style>
+        <p:txBody>
+          <a:bodyPr wrap="none" lIns="0" tIns="0" rIns="0" bIns="0" rtlCol="0" anchor="ctr"/>
+          <a:lstStyle/>
+          <a:p>
+            <a:pPr algn="ctr"/>
+            <a:r>
+              <a:rPr sz="850" b="0">
+                <a:solidFill>
+                  <a:srgbClr val="4A4C4F"/>
+                </a:solidFill>
+                <a:latin typeface="Arial"/>
+              </a:rPr>
+              <a:t>get_business_facts</a:t>
+            </a:r>
+          </a:p>
+        </p:txBody>
+      </p:sp>
+      <p:sp>
+        <p:nvSpPr>
+          <p:cNvPr id="36" name="Rounded Rectangle 35"/>
+          <p:cNvSpPr/>
+          <p:nvPr/>
+        </p:nvSpPr>
+        <p:spPr>
+          <a:xfrm>
+            <a:off x="11253276" y="4754879"/>
+            <a:ext cx="1013338" cy="256032"/>
+          </a:xfrm>
+          <a:prstGeom prst="roundRect">
+            <a:avLst>
+              <a:gd name="adj" fmla="val 50000"/>
+            </a:avLst>
+          </a:prstGeom>
+          <a:solidFill>
+            <a:srgbClr val="FAFAFA"/>
+          </a:solidFill>
+          <a:ln w="9525">
+            <a:solidFill>
+              <a:srgbClr val="DADADB"/>
+            </a:solidFill>
+          </a:ln>
+          <a:effectLst/>
+        </p:spPr>
+        <p:style>
+          <a:lnRef idx="1">
+            <a:schemeClr val="accent1"/>
+          </a:lnRef>
+          <a:fillRef idx="3">
+            <a:schemeClr val="accent1"/>
+          </a:fillRef>
+          <a:effectRef idx="2">
+            <a:schemeClr val="accent1"/>
+          </a:effectRef>
+          <a:fontRef idx="minor">
+            <a:schemeClr val="lt1"/>
+          </a:fontRef>
+        </p:style>
+        <p:txBody>
+          <a:bodyPr wrap="none" lIns="0" tIns="0" rIns="0" bIns="0" rtlCol="0" anchor="ctr"/>
+          <a:lstStyle/>
+          <a:p>
+            <a:pPr algn="ctr"/>
+            <a:r>
+              <a:rPr sz="850" b="0">
+                <a:solidFill>
+                  <a:srgbClr val="4A4C4F"/>
+                </a:solidFill>
+                <a:latin typeface="Arial"/>
+              </a:rPr>
+              <a:t>mark_confirmed</a:t>
+            </a:r>
+          </a:p>
+        </p:txBody>
+      </p:sp>
+      <p:sp>
+        <p:nvSpPr>
+          <p:cNvPr id="37" name="Rounded Rectangle 36"/>
+          <p:cNvSpPr/>
+          <p:nvPr/>
+        </p:nvSpPr>
+        <p:spPr>
+          <a:xfrm>
+            <a:off x="12339767" y="4754879"/>
+            <a:ext cx="952713" cy="256032"/>
+          </a:xfrm>
+          <a:prstGeom prst="roundRect">
+            <a:avLst>
+              <a:gd name="adj" fmla="val 50000"/>
+            </a:avLst>
+          </a:prstGeom>
+          <a:solidFill>
+            <a:srgbClr val="FAFAFA"/>
+          </a:solidFill>
+          <a:ln w="9525">
+            <a:solidFill>
+              <a:srgbClr val="DADADB"/>
+            </a:solidFill>
+          </a:ln>
+          <a:effectLst/>
+        </p:spPr>
+        <p:style>
+          <a:lnRef idx="1">
+            <a:schemeClr val="accent1"/>
+          </a:lnRef>
+          <a:fillRef idx="3">
+            <a:schemeClr val="accent1"/>
+          </a:fillRef>
+          <a:effectRef idx="2">
+            <a:schemeClr val="accent1"/>
+          </a:effectRef>
+          <a:fontRef idx="minor">
+            <a:schemeClr val="lt1"/>
+          </a:fontRef>
+        </p:style>
+        <p:txBody>
+          <a:bodyPr wrap="none" lIns="0" tIns="0" rIns="0" bIns="0" rtlCol="0" anchor="ctr"/>
+          <a:lstStyle/>
+          <a:p>
+            <a:pPr algn="ctr"/>
+            <a:r>
+              <a:rPr sz="850" b="0">
+                <a:solidFill>
+                  <a:srgbClr val="4A4C4F"/>
+                </a:solidFill>
+                <a:latin typeface="Arial"/>
+              </a:rPr>
+              <a:t>capture_notes</a:t>
+            </a:r>
+          </a:p>
+        </p:txBody>
+      </p:sp>
+      <p:sp>
+        <p:nvSpPr>
+          <p:cNvPr id="38" name="Rounded Rectangle 37"/>
+          <p:cNvSpPr/>
+          <p:nvPr/>
+        </p:nvSpPr>
+        <p:spPr>
+          <a:xfrm>
+            <a:off x="9924288" y="5074919"/>
+            <a:ext cx="1195212" cy="256032"/>
+          </a:xfrm>
+          <a:prstGeom prst="roundRect">
+            <a:avLst>
+              <a:gd name="adj" fmla="val 50000"/>
+            </a:avLst>
+          </a:prstGeom>
+          <a:solidFill>
+            <a:srgbClr val="FAFAFA"/>
+          </a:solidFill>
+          <a:ln w="9525">
+            <a:solidFill>
+              <a:srgbClr val="DADADB"/>
+            </a:solidFill>
+          </a:ln>
+          <a:effectLst/>
+        </p:spPr>
+        <p:style>
+          <a:lnRef idx="1">
+            <a:schemeClr val="accent1"/>
+          </a:lnRef>
+          <a:fillRef idx="3">
+            <a:schemeClr val="accent1"/>
+          </a:fillRef>
+          <a:effectRef idx="2">
+            <a:schemeClr val="accent1"/>
+          </a:effectRef>
+          <a:fontRef idx="minor">
+            <a:schemeClr val="lt1"/>
+          </a:fontRef>
+        </p:style>
+        <p:txBody>
+          <a:bodyPr wrap="none" lIns="0" tIns="0" rIns="0" bIns="0" rtlCol="0" anchor="ctr"/>
+          <a:lstStyle/>
+          <a:p>
+            <a:pPr algn="ctr"/>
+            <a:r>
+              <a:rPr sz="850" b="0">
+                <a:solidFill>
+                  <a:srgbClr val="4A4C4F"/>
+                </a:solidFill>
+                <a:latin typeface="Arial"/>
+              </a:rPr>
+              <a:t>schedule_callback</a:t>
+            </a:r>
+          </a:p>
+        </p:txBody>
+      </p:sp>
+      <p:sp>
+        <p:nvSpPr>
+          <p:cNvPr id="39" name="Rounded Rectangle 38"/>
+          <p:cNvSpPr/>
+          <p:nvPr/>
+        </p:nvSpPr>
+        <p:spPr>
+          <a:xfrm>
+            <a:off x="11192652" y="5074919"/>
+            <a:ext cx="892088" cy="256032"/>
+          </a:xfrm>
+          <a:prstGeom prst="roundRect">
+            <a:avLst>
+              <a:gd name="adj" fmla="val 50000"/>
+            </a:avLst>
+          </a:prstGeom>
+          <a:solidFill>
+            <a:srgbClr val="FAFAFA"/>
+          </a:solidFill>
+          <a:ln w="9525">
+            <a:solidFill>
+              <a:srgbClr val="DADADB"/>
+            </a:solidFill>
+          </a:ln>
+          <a:effectLst/>
+        </p:spPr>
+        <p:style>
+          <a:lnRef idx="1">
+            <a:schemeClr val="accent1"/>
+          </a:lnRef>
+          <a:fillRef idx="3">
+            <a:schemeClr val="accent1"/>
+          </a:fillRef>
+          <a:effectRef idx="2">
+            <a:schemeClr val="accent1"/>
+          </a:effectRef>
+          <a:fontRef idx="minor">
+            <a:schemeClr val="lt1"/>
+          </a:fontRef>
+        </p:style>
+        <p:txBody>
+          <a:bodyPr wrap="none" lIns="0" tIns="0" rIns="0" bIns="0" rtlCol="0" anchor="ctr"/>
+          <a:lstStyle/>
+          <a:p>
+            <a:pPr algn="ctr"/>
+            <a:r>
+              <a:rPr sz="850" b="0">
+                <a:solidFill>
+                  <a:srgbClr val="4A4C4F"/>
+                </a:solidFill>
+                <a:latin typeface="Arial"/>
+              </a:rPr>
+              <a:t>capture_lead</a:t>
+            </a:r>
+          </a:p>
+        </p:txBody>
+      </p:sp>
+      <p:sp>
+        <p:nvSpPr>
+          <p:cNvPr id="40" name="Rounded Rectangle 39"/>
+          <p:cNvSpPr/>
+          <p:nvPr/>
+        </p:nvSpPr>
+        <p:spPr>
+          <a:xfrm>
+            <a:off x="12157892" y="5074919"/>
+            <a:ext cx="1195212" cy="256032"/>
+          </a:xfrm>
+          <a:prstGeom prst="roundRect">
+            <a:avLst>
+              <a:gd name="adj" fmla="val 50000"/>
+            </a:avLst>
+          </a:prstGeom>
+          <a:solidFill>
+            <a:srgbClr val="FAFAFA"/>
+          </a:solidFill>
+          <a:ln w="9525">
+            <a:solidFill>
+              <a:srgbClr val="DADADB"/>
+            </a:solidFill>
+          </a:ln>
+          <a:effectLst/>
+        </p:spPr>
+        <p:style>
+          <a:lnRef idx="1">
+            <a:schemeClr val="accent1"/>
+          </a:lnRef>
+          <a:fillRef idx="3">
+            <a:schemeClr val="accent1"/>
+          </a:fillRef>
+          <a:effectRef idx="2">
+            <a:schemeClr val="accent1"/>
+          </a:effectRef>
+          <a:fontRef idx="minor">
+            <a:schemeClr val="lt1"/>
+          </a:fontRef>
+        </p:style>
+        <p:txBody>
+          <a:bodyPr wrap="none" lIns="0" tIns="0" rIns="0" bIns="0" rtlCol="0" anchor="ctr"/>
+          <a:lstStyle/>
+          <a:p>
+            <a:pPr algn="ctr"/>
+            <a:r>
+              <a:rPr sz="850" b="0">
+                <a:solidFill>
+                  <a:srgbClr val="4A4C4F"/>
+                </a:solidFill>
+                <a:latin typeface="Arial"/>
+              </a:rPr>
+              <a:t>escalate_to_human</a:t>
+            </a:r>
+          </a:p>
+        </p:txBody>
+      </p:sp>
+      <p:sp>
+        <p:nvSpPr>
+          <p:cNvPr id="41" name="Rounded Rectangle 40"/>
+          <p:cNvSpPr/>
+          <p:nvPr/>
+        </p:nvSpPr>
+        <p:spPr>
+          <a:xfrm>
+            <a:off x="9924288" y="5394959"/>
+            <a:ext cx="892088" cy="256032"/>
+          </a:xfrm>
+          <a:prstGeom prst="roundRect">
+            <a:avLst>
+              <a:gd name="adj" fmla="val 50000"/>
+            </a:avLst>
+          </a:prstGeom>
+          <a:solidFill>
+            <a:srgbClr val="FAFAFA"/>
+          </a:solidFill>
+          <a:ln w="9525">
+            <a:solidFill>
+              <a:srgbClr val="DADADB"/>
+            </a:solidFill>
+          </a:ln>
+          <a:effectLst/>
+        </p:spPr>
+        <p:style>
+          <a:lnRef idx="1">
+            <a:schemeClr val="accent1"/>
+          </a:lnRef>
+          <a:fillRef idx="3">
+            <a:schemeClr val="accent1"/>
+          </a:fillRef>
+          <a:effectRef idx="2">
+            <a:schemeClr val="accent1"/>
+          </a:effectRef>
+          <a:fontRef idx="minor">
+            <a:schemeClr val="lt1"/>
+          </a:fontRef>
+        </p:style>
+        <p:txBody>
+          <a:bodyPr wrap="none" lIns="0" tIns="0" rIns="0" bIns="0" rtlCol="0" anchor="ctr"/>
+          <a:lstStyle/>
+          <a:p>
+            <a:pPr algn="ctr"/>
+            <a:r>
+              <a:rPr sz="850" b="0">
+                <a:solidFill>
+                  <a:srgbClr val="4A4C4F"/>
+                </a:solidFill>
+                <a:latin typeface="Arial"/>
+              </a:rPr>
+              <a:t>honor_optout</a:t>
+            </a:r>
+          </a:p>
+        </p:txBody>
+      </p:sp>
+      <p:sp>
+        <p:nvSpPr>
+          <p:cNvPr id="42" name="Rounded Rectangle 41"/>
+          <p:cNvSpPr/>
+          <p:nvPr/>
+        </p:nvSpPr>
+        <p:spPr>
+          <a:xfrm>
+            <a:off x="822960" y="6492240"/>
+            <a:ext cx="2090318" cy="274320"/>
+          </a:xfrm>
+          <a:prstGeom prst="roundRect">
+            <a:avLst>
+              <a:gd name="adj" fmla="val 50000"/>
+            </a:avLst>
+          </a:prstGeom>
+          <a:solidFill>
+            <a:srgbClr val="E7EFFC"/>
+          </a:solidFill>
+          <a:ln>
+            <a:noFill/>
+          </a:ln>
+          <a:effectLst/>
+        </p:spPr>
+        <p:style>
+          <a:lnRef idx="1">
+            <a:schemeClr val="accent1"/>
+          </a:lnRef>
+          <a:fillRef idx="3">
+            <a:schemeClr val="accent1"/>
+          </a:fillRef>
+          <a:effectRef idx="2">
+            <a:schemeClr val="accent1"/>
+          </a:effectRef>
+          <a:fontRef idx="minor">
+            <a:schemeClr val="lt1"/>
+          </a:fontRef>
+        </p:style>
+        <p:txBody>
+          <a:bodyPr wrap="none" lIns="0" tIns="0" rIns="0" bIns="0" rtlCol="0" anchor="ctr"/>
+          <a:lstStyle/>
+          <a:p>
+            <a:pPr algn="ctr"/>
+            <a:r>
+              <a:rPr sz="900" b="1">
+                <a:solidFill>
+                  <a:srgbClr val="115ACB"/>
+                </a:solidFill>
+                <a:latin typeface="Arial"/>
+              </a:rPr>
+              <a:t>Claude Haiku — classifier (AI)</a:t>
+            </a:r>
+          </a:p>
+        </p:txBody>
+      </p:sp>
+      <p:sp>
+        <p:nvSpPr>
+          <p:cNvPr id="43" name="Rounded Rectangle 42"/>
+          <p:cNvSpPr/>
+          <p:nvPr/>
+        </p:nvSpPr>
+        <p:spPr>
+          <a:xfrm>
+            <a:off x="3114446" y="6492240"/>
+            <a:ext cx="2154509" cy="274320"/>
+          </a:xfrm>
+          <a:prstGeom prst="roundRect">
+            <a:avLst>
+              <a:gd name="adj" fmla="val 50000"/>
+            </a:avLst>
+          </a:prstGeom>
+          <a:solidFill>
+            <a:srgbClr val="F2E5FF"/>
+          </a:solidFill>
+          <a:ln>
+            <a:noFill/>
+          </a:ln>
+          <a:effectLst/>
+        </p:spPr>
+        <p:style>
+          <a:lnRef idx="1">
+            <a:schemeClr val="accent1"/>
+          </a:lnRef>
+          <a:fillRef idx="3">
+            <a:schemeClr val="accent1"/>
+          </a:fillRef>
+          <a:effectRef idx="2">
+            <a:schemeClr val="accent1"/>
+          </a:effectRef>
+          <a:fontRef idx="minor">
+            <a:schemeClr val="lt1"/>
+          </a:fontRef>
+        </p:style>
+        <p:txBody>
+          <a:bodyPr wrap="none" lIns="0" tIns="0" rIns="0" bIns="0" rtlCol="0" anchor="ctr"/>
+          <a:lstStyle/>
+          <a:p>
+            <a:pPr algn="ctr"/>
+            <a:r>
+              <a:rPr sz="900" b="1">
+                <a:solidFill>
+                  <a:srgbClr val="6600CC"/>
+                </a:solidFill>
+                <a:latin typeface="Arial"/>
+              </a:rPr>
+              <a:t>Claude Sonnet — specialist (AI)</a:t>
+            </a:r>
+          </a:p>
+        </p:txBody>
+      </p:sp>
+      <p:sp>
+        <p:nvSpPr>
+          <p:cNvPr id="44" name="Rounded Rectangle 43"/>
+          <p:cNvSpPr/>
+          <p:nvPr/>
+        </p:nvSpPr>
+        <p:spPr>
+          <a:xfrm>
+            <a:off x="5470123" y="6492240"/>
+            <a:ext cx="549737" cy="274320"/>
+          </a:xfrm>
+          <a:prstGeom prst="roundRect">
+            <a:avLst>
+              <a:gd name="adj" fmla="val 50000"/>
+            </a:avLst>
+          </a:prstGeom>
+          <a:solidFill>
+            <a:srgbClr val="F0F0F1"/>
+          </a:solidFill>
+          <a:ln>
+            <a:noFill/>
+          </a:ln>
+          <a:effectLst/>
+        </p:spPr>
+        <p:style>
+          <a:lnRef idx="1">
+            <a:schemeClr val="accent1"/>
+          </a:lnRef>
+          <a:fillRef idx="3">
+            <a:schemeClr val="accent1"/>
+          </a:fillRef>
+          <a:effectRef idx="2">
+            <a:schemeClr val="accent1"/>
+          </a:effectRef>
+          <a:fontRef idx="minor">
+            <a:schemeClr val="lt1"/>
+          </a:fontRef>
+        </p:style>
+        <p:txBody>
+          <a:bodyPr wrap="none" lIns="0" tIns="0" rIns="0" bIns="0" rtlCol="0" anchor="ctr"/>
+          <a:lstStyle/>
+          <a:p>
+            <a:pPr algn="ctr"/>
+            <a:r>
+              <a:rPr sz="900" b="1">
+                <a:solidFill>
+                  <a:srgbClr val="4A4C4F"/>
+                </a:solidFill>
+                <a:latin typeface="Arial"/>
+              </a:rPr>
+              <a:t>intent</a:t>
+            </a:r>
+          </a:p>
+        </p:txBody>
+      </p:sp>
+      <p:sp>
+        <p:nvSpPr>
+          <p:cNvPr id="45" name="Rounded Rectangle 44"/>
+          <p:cNvSpPr/>
+          <p:nvPr/>
+        </p:nvSpPr>
+        <p:spPr>
+          <a:xfrm>
+            <a:off x="6221028" y="6492240"/>
+            <a:ext cx="421355" cy="274320"/>
+          </a:xfrm>
+          <a:prstGeom prst="roundRect">
+            <a:avLst>
+              <a:gd name="adj" fmla="val 50000"/>
+            </a:avLst>
+          </a:prstGeom>
+          <a:solidFill>
+            <a:srgbClr val="F0F0F1"/>
+          </a:solidFill>
+          <a:ln>
+            <a:noFill/>
+          </a:ln>
+          <a:effectLst/>
+        </p:spPr>
+        <p:style>
+          <a:lnRef idx="1">
+            <a:schemeClr val="accent1"/>
+          </a:lnRef>
+          <a:fillRef idx="3">
+            <a:schemeClr val="accent1"/>
+          </a:fillRef>
+          <a:effectRef idx="2">
+            <a:schemeClr val="accent1"/>
+          </a:effectRef>
+          <a:fontRef idx="minor">
+            <a:schemeClr val="lt1"/>
+          </a:fontRef>
+        </p:style>
+        <p:txBody>
+          <a:bodyPr wrap="none" lIns="0" tIns="0" rIns="0" bIns="0" rtlCol="0" anchor="ctr"/>
+          <a:lstStyle/>
+          <a:p>
+            <a:pPr algn="ctr"/>
+            <a:r>
+              <a:rPr sz="900" b="1">
+                <a:solidFill>
+                  <a:srgbClr val="4A4C4F"/>
+                </a:solidFill>
+                <a:latin typeface="Arial"/>
+              </a:rPr>
+              <a:t>tool</a:t>
+            </a:r>
+          </a:p>
+        </p:txBody>
+      </p:sp>
+    </p:spTree>
+  </p:cSld>
+  <p:clrMapOvr>
+    <a:masterClrMapping/>
+  </p:clrMapOvr>
+</p:sld>
+</file>
+
+<file path=ppt/slides/slide12.xml><?xml version="1.0" encoding="utf-8"?>
+<p:sld xmlns:a="http://schemas.openxmlformats.org/drawingml/2006/main" xmlns:r="http://schemas.openxmlformats.org/officeDocument/2006/relationships" xmlns:p="http://schemas.openxmlformats.org/presentationml/2006/main">
+  <p:cSld>
+    <p:spTree>
+      <p:nvGrpSpPr>
+        <p:cNvPr id="1" name=""/>
+        <p:cNvGrpSpPr/>
+        <p:nvPr/>
+      </p:nvGrpSpPr>
+      <p:grpSpPr>
+        <a:xfrm>
+          <a:off x="0" y="0"/>
+          <a:ext cx="0" cy="0"/>
+          <a:chOff x="0" y="0"/>
+          <a:chExt cx="0" cy="0"/>
+        </a:xfrm>
+      </p:grpSpPr>
+      <p:sp>
+        <p:nvSpPr>
+          <p:cNvPr id="2" name="TextBox 1"/>
+          <p:cNvSpPr txBox="1"/>
+          <p:nvPr/>
+        </p:nvSpPr>
+        <p:spPr>
+          <a:xfrm>
+            <a:off x="822960" y="512064"/>
+            <a:ext cx="11887200" cy="274320"/>
+          </a:xfrm>
+          <a:prstGeom prst="rect">
+            <a:avLst/>
+          </a:prstGeom>
+          <a:noFill/>
+        </p:spPr>
+        <p:txBody>
+          <a:bodyPr wrap="square" lIns="0" tIns="0" rIns="0" bIns="0" anchor="t">
+            <a:spAutoFit/>
+          </a:bodyPr>
+          <a:lstStyle/>
+          <a:p>
+            <a:pPr algn="l">
+              <a:lnSpc>
+                <a:spcPct val="100000"/>
+              </a:lnSpc>
+            </a:pPr>
+            <a:r>
+              <a:rPr sz="1200" b="1" i="0">
+                <a:solidFill>
+                  <a:srgbClr val="115ACB"/>
+                </a:solidFill>
+                <a:latin typeface="Arial"/>
+              </a:rPr>
+              <a:t>ARCHITECTURE · N8N IMPLEMENTATION</a:t>
+            </a:r>
+          </a:p>
+        </p:txBody>
+      </p:sp>
+      <p:sp>
+        <p:nvSpPr>
+          <p:cNvPr id="3" name="TextBox 2"/>
+          <p:cNvSpPr txBox="1"/>
+          <p:nvPr/>
+        </p:nvSpPr>
+        <p:spPr>
+          <a:xfrm>
+            <a:off x="822960" y="804672"/>
+            <a:ext cx="11887200" cy="548640"/>
+          </a:xfrm>
+          <a:prstGeom prst="rect">
+            <a:avLst/>
+          </a:prstGeom>
+          <a:noFill/>
+        </p:spPr>
+        <p:txBody>
+          <a:bodyPr wrap="square" lIns="0" tIns="0" rIns="0" bIns="0" anchor="t">
+            <a:spAutoFit/>
+          </a:bodyPr>
+          <a:lstStyle/>
+          <a:p>
+            <a:pPr algn="l">
+              <a:lnSpc>
+                <a:spcPct val="100000"/>
+              </a:lnSpc>
+            </a:pPr>
+            <a:r>
+              <a:rPr sz="2600" b="1" i="0">
+                <a:solidFill>
+                  <a:srgbClr val="070A0E"/>
+                </a:solidFill>
+                <a:latin typeface="Arial"/>
+              </a:rPr>
+              <a:t>Persistence &amp; fallback</a:t>
+            </a:r>
+          </a:p>
+        </p:txBody>
+      </p:sp>
+      <p:sp>
+        <p:nvSpPr>
+          <p:cNvPr id="4" name="TextBox 3"/>
+          <p:cNvSpPr txBox="1"/>
+          <p:nvPr/>
+        </p:nvSpPr>
+        <p:spPr>
+          <a:xfrm>
+            <a:off x="822960" y="1371600"/>
+            <a:ext cx="12435840" cy="365760"/>
+          </a:xfrm>
+          <a:prstGeom prst="rect">
+            <a:avLst/>
+          </a:prstGeom>
+          <a:noFill/>
+        </p:spPr>
+        <p:txBody>
+          <a:bodyPr wrap="square" lIns="0" tIns="0" rIns="0" bIns="0" anchor="t">
+            <a:spAutoFit/>
+          </a:bodyPr>
+          <a:lstStyle/>
+          <a:p>
+            <a:pPr algn="l">
+              <a:lnSpc>
+                <a:spcPct val="100000"/>
+              </a:lnSpc>
+            </a:pPr>
+            <a:r>
+              <a:rPr sz="1300" b="0" i="0">
+                <a:solidFill>
+                  <a:srgbClr val="4A4C4F"/>
+                </a:solidFill>
+                <a:latin typeface="Arial"/>
+              </a:rPr>
+              <a:t>Saving the turn and returning a reply — plus the safety net that keeps every response a 200.</a:t>
+            </a:r>
+          </a:p>
+        </p:txBody>
+      </p:sp>
+      <p:pic>
+        <p:nvPicPr>
+          <p:cNvPr id="5" name="Picture 4" descr="image.png"/>
+          <p:cNvPicPr>
+            <a:picLocks noChangeAspect="1"/>
+          </p:cNvPicPr>
+          <p:nvPr/>
+        </p:nvPicPr>
+        <p:blipFill>
+          <a:blip r:embed="rId2"/>
+          <a:stretch>
+            <a:fillRect/>
+          </a:stretch>
+        </p:blipFill>
+        <p:spPr>
+          <a:xfrm>
+            <a:off x="13514832" y="493776"/>
+            <a:ext cx="347472" cy="347472"/>
+          </a:xfrm>
+          <a:prstGeom prst="rect">
+            <a:avLst/>
+          </a:prstGeom>
+        </p:spPr>
+      </p:pic>
+      <p:sp>
+        <p:nvSpPr>
+          <p:cNvPr id="6" name="TextBox 5"/>
+          <p:cNvSpPr txBox="1"/>
+          <p:nvPr/>
+        </p:nvSpPr>
+        <p:spPr>
+          <a:xfrm>
+            <a:off x="822960" y="7818120"/>
+            <a:ext cx="3657600" cy="274320"/>
+          </a:xfrm>
+          <a:prstGeom prst="rect">
+            <a:avLst/>
+          </a:prstGeom>
+          <a:noFill/>
+        </p:spPr>
+        <p:txBody>
+          <a:bodyPr wrap="square" lIns="0" tIns="0" rIns="0" bIns="0" anchor="t">
+            <a:spAutoFit/>
+          </a:bodyPr>
+          <a:lstStyle/>
+          <a:p>
+            <a:pPr algn="l">
+              <a:lnSpc>
+                <a:spcPct val="100000"/>
+              </a:lnSpc>
+            </a:pPr>
+            <a:r>
+              <a:rPr sz="1000" b="0" i="0">
+                <a:solidFill>
+                  <a:srgbClr val="8F9193"/>
+                </a:solidFill>
+                <a:latin typeface="Arial"/>
+              </a:rPr>
+              <a:t>handled.ai</a:t>
+            </a:r>
+          </a:p>
+        </p:txBody>
+      </p:sp>
+      <p:sp>
+        <p:nvSpPr>
+          <p:cNvPr id="7" name="TextBox 6"/>
+          <p:cNvSpPr txBox="1"/>
+          <p:nvPr/>
+        </p:nvSpPr>
+        <p:spPr>
+          <a:xfrm>
+            <a:off x="11978640" y="7818120"/>
+            <a:ext cx="1828800" cy="274320"/>
+          </a:xfrm>
+          <a:prstGeom prst="rect">
+            <a:avLst/>
+          </a:prstGeom>
+          <a:noFill/>
+        </p:spPr>
+        <p:txBody>
+          <a:bodyPr wrap="square" lIns="0" tIns="0" rIns="0" bIns="0" anchor="t">
+            <a:spAutoFit/>
+          </a:bodyPr>
+          <a:lstStyle/>
+          <a:p>
+            <a:pPr algn="r">
+              <a:lnSpc>
+                <a:spcPct val="100000"/>
+              </a:lnSpc>
+            </a:pPr>
+            <a:r>
+              <a:rPr sz="1000" b="0" i="0">
+                <a:solidFill>
+                  <a:srgbClr val="8F9193"/>
+                </a:solidFill>
+                <a:latin typeface="Arial"/>
+              </a:rPr>
+              <a:t>11 / 17</a:t>
+            </a:r>
+          </a:p>
+        </p:txBody>
+      </p:sp>
+      <p:sp>
+        <p:nvSpPr>
+          <p:cNvPr id="8" name="TextBox 7"/>
+          <p:cNvSpPr txBox="1"/>
+          <p:nvPr/>
+        </p:nvSpPr>
+        <p:spPr>
+          <a:xfrm>
+            <a:off x="822960" y="1783080"/>
+            <a:ext cx="6263640" cy="274320"/>
+          </a:xfrm>
+          <a:prstGeom prst="rect">
+            <a:avLst/>
+          </a:prstGeom>
+          <a:noFill/>
+        </p:spPr>
+        <p:txBody>
+          <a:bodyPr wrap="square" lIns="0" tIns="0" rIns="0" bIns="0" anchor="t">
+            <a:spAutoFit/>
+          </a:bodyPr>
+          <a:lstStyle/>
+          <a:p>
+            <a:pPr algn="l">
+              <a:lnSpc>
+                <a:spcPct val="100000"/>
+              </a:lnSpc>
+            </a:pPr>
+            <a:r>
+              <a:rPr sz="1100" b="0" i="1">
+                <a:solidFill>
+                  <a:srgbClr val="4A4C4F"/>
+                </a:solidFill>
+                <a:latin typeface="Arial"/>
+              </a:rPr>
+              <a:t>from specialist agent output  ↓</a:t>
+            </a:r>
+          </a:p>
+        </p:txBody>
+      </p:sp>
+      <p:sp>
+        <p:nvSpPr>
+          <p:cNvPr id="9" name="TextBox 8"/>
+          <p:cNvSpPr txBox="1"/>
+          <p:nvPr/>
+        </p:nvSpPr>
+        <p:spPr>
+          <a:xfrm>
+            <a:off x="7543800" y="1783080"/>
+            <a:ext cx="6263640" cy="274320"/>
+          </a:xfrm>
+          <a:prstGeom prst="rect">
+            <a:avLst/>
+          </a:prstGeom>
+          <a:noFill/>
+        </p:spPr>
+        <p:txBody>
+          <a:bodyPr wrap="square" lIns="0" tIns="0" rIns="0" bIns="0" anchor="t">
+            <a:spAutoFit/>
+          </a:bodyPr>
+          <a:lstStyle/>
+          <a:p>
+            <a:pPr algn="l">
+              <a:lnSpc>
+                <a:spcPct val="100000"/>
+              </a:lnSpc>
+            </a:pPr>
+            <a:r>
+              <a:rPr sz="1100" b="0" i="1">
+                <a:solidFill>
+                  <a:srgbClr val="4A4C4F"/>
+                </a:solidFill>
+                <a:latin typeface="Arial"/>
+              </a:rPr>
+              <a:t>from any LLM / agent / persist error  ↓</a:t>
+            </a:r>
+          </a:p>
+        </p:txBody>
+      </p:sp>
+      <p:sp>
+        <p:nvSpPr>
+          <p:cNvPr id="10" name="Rounded Rectangle 9"/>
+          <p:cNvSpPr/>
+          <p:nvPr/>
+        </p:nvSpPr>
+        <p:spPr>
+          <a:xfrm>
+            <a:off x="822960" y="2148840"/>
+            <a:ext cx="6263640" cy="1508760"/>
+          </a:xfrm>
+          <a:prstGeom prst="roundRect">
+            <a:avLst>
+              <a:gd name="adj" fmla="val 6060"/>
+            </a:avLst>
+          </a:prstGeom>
+          <a:solidFill>
+            <a:srgbClr val="FFFFFF"/>
+          </a:solidFill>
+          <a:ln w="12700">
+            <a:solidFill>
+              <a:srgbClr val="DADADB"/>
+            </a:solidFill>
+          </a:ln>
+          <a:effectLst/>
+        </p:spPr>
+        <p:style>
+          <a:lnRef idx="1">
+            <a:schemeClr val="accent1"/>
+          </a:lnRef>
+          <a:fillRef idx="3">
+            <a:schemeClr val="accent1"/>
+          </a:fillRef>
+          <a:effectRef idx="2">
+            <a:schemeClr val="accent1"/>
+          </a:effectRef>
+          <a:fontRef idx="minor">
+            <a:schemeClr val="lt1"/>
+          </a:fontRef>
+        </p:style>
+        <p:txBody>
+          <a:bodyPr rtlCol="0" anchor="ctr"/>
+          <a:lstStyle/>
+          <a:p>
+            <a:pPr algn="ctr"/>
+            <a:endParaRPr/>
+          </a:p>
+        </p:txBody>
+      </p:sp>
+      <p:sp>
+        <p:nvSpPr>
+          <p:cNvPr id="11" name="Rounded Rectangle 10"/>
+          <p:cNvSpPr/>
+          <p:nvPr/>
+        </p:nvSpPr>
+        <p:spPr>
+          <a:xfrm>
+            <a:off x="5308640" y="2331720"/>
+            <a:ext cx="1576791" cy="274320"/>
+          </a:xfrm>
+          <a:prstGeom prst="roundRect">
+            <a:avLst>
+              <a:gd name="adj" fmla="val 50000"/>
+            </a:avLst>
+          </a:prstGeom>
+          <a:solidFill>
+            <a:srgbClr val="F0F0F1"/>
+          </a:solidFill>
+          <a:ln>
+            <a:noFill/>
+          </a:ln>
+          <a:effectLst/>
+        </p:spPr>
+        <p:style>
+          <a:lnRef idx="1">
+            <a:schemeClr val="accent1"/>
+          </a:lnRef>
+          <a:fillRef idx="3">
+            <a:schemeClr val="accent1"/>
+          </a:fillRef>
+          <a:effectRef idx="2">
+            <a:schemeClr val="accent1"/>
+          </a:effectRef>
+          <a:fontRef idx="minor">
+            <a:schemeClr val="lt1"/>
+          </a:fontRef>
+        </p:style>
+        <p:txBody>
+          <a:bodyPr wrap="none" lIns="0" tIns="0" rIns="0" bIns="0" rtlCol="0" anchor="ctr"/>
+          <a:lstStyle/>
+          <a:p>
+            <a:pPr algn="ctr"/>
+            <a:r>
+              <a:rPr sz="900" b="1">
+                <a:solidFill>
+                  <a:srgbClr val="4A4C4F"/>
+                </a:solidFill>
+                <a:latin typeface="Arial"/>
+              </a:rPr>
+              <a:t>Code · Supabase writes</a:t>
+            </a:r>
+          </a:p>
+        </p:txBody>
+      </p:sp>
+      <p:sp>
+        <p:nvSpPr>
+          <p:cNvPr id="12" name="TextBox 11"/>
+          <p:cNvSpPr txBox="1"/>
+          <p:nvPr/>
+        </p:nvSpPr>
+        <p:spPr>
+          <a:xfrm>
+            <a:off x="1024128" y="2350008"/>
+            <a:ext cx="4147352" cy="365760"/>
+          </a:xfrm>
+          <a:prstGeom prst="rect">
+            <a:avLst/>
+          </a:prstGeom>
+          <a:noFill/>
+        </p:spPr>
+        <p:txBody>
+          <a:bodyPr wrap="square" lIns="0" tIns="0" rIns="0" bIns="0" anchor="t">
+            <a:spAutoFit/>
+          </a:bodyPr>
+          <a:lstStyle/>
+          <a:p>
+            <a:pPr algn="l">
+              <a:lnSpc>
+                <a:spcPct val="100000"/>
+              </a:lnSpc>
+            </a:pPr>
+            <a:r>
+              <a:rPr sz="1500" b="1" i="0">
+                <a:solidFill>
+                  <a:srgbClr val="070A0E"/>
+                </a:solidFill>
+                <a:latin typeface="Arial"/>
+              </a:rPr>
+              <a:t>Persist + eval</a:t>
+            </a:r>
+          </a:p>
+        </p:txBody>
+      </p:sp>
+      <p:sp>
+        <p:nvSpPr>
+          <p:cNvPr id="13" name="TextBox 12"/>
+          <p:cNvSpPr txBox="1"/>
+          <p:nvPr/>
+        </p:nvSpPr>
+        <p:spPr>
+          <a:xfrm>
+            <a:off x="1024128" y="2770632"/>
+            <a:ext cx="5861303" cy="362711"/>
+          </a:xfrm>
+          <a:prstGeom prst="rect">
+            <a:avLst/>
+          </a:prstGeom>
+          <a:noFill/>
+        </p:spPr>
+        <p:txBody>
+          <a:bodyPr wrap="square" lIns="0" tIns="0" rIns="0" bIns="0" anchor="t">
+            <a:spAutoFit/>
+          </a:bodyPr>
+          <a:lstStyle/>
+          <a:p>
+            <a:pPr algn="l">
+              <a:lnSpc>
+                <a:spcPct val="105000"/>
+              </a:lnSpc>
+            </a:pPr>
+            <a:r>
+              <a:rPr sz="1100" b="0" i="0">
+                <a:solidFill>
+                  <a:srgbClr val="4A4C4F"/>
+                </a:solidFill>
+                <a:latin typeface="Arial"/>
+              </a:rPr>
+              <a:t>Saves both turns and the scoring record, then updates the conversation. No AI.</a:t>
+            </a:r>
+          </a:p>
+        </p:txBody>
+      </p:sp>
+      <p:sp>
+        <p:nvSpPr>
+          <p:cNvPr id="14" name="Rounded Rectangle 13"/>
+          <p:cNvSpPr/>
+          <p:nvPr/>
+        </p:nvSpPr>
+        <p:spPr>
+          <a:xfrm>
+            <a:off x="1024128" y="3206496"/>
+            <a:ext cx="1448409" cy="256032"/>
+          </a:xfrm>
+          <a:prstGeom prst="roundRect">
+            <a:avLst>
+              <a:gd name="adj" fmla="val 50000"/>
+            </a:avLst>
+          </a:prstGeom>
+          <a:solidFill>
+            <a:srgbClr val="FAFAFA"/>
+          </a:solidFill>
+          <a:ln w="9525">
+            <a:solidFill>
+              <a:srgbClr val="DADADB"/>
+            </a:solidFill>
+          </a:ln>
+          <a:effectLst/>
+        </p:spPr>
+        <p:style>
+          <a:lnRef idx="1">
+            <a:schemeClr val="accent1"/>
+          </a:lnRef>
+          <a:fillRef idx="3">
+            <a:schemeClr val="accent1"/>
+          </a:fillRef>
+          <a:effectRef idx="2">
+            <a:schemeClr val="accent1"/>
+          </a:effectRef>
+          <a:fontRef idx="minor">
+            <a:schemeClr val="lt1"/>
+          </a:fontRef>
+        </p:style>
+        <p:txBody>
+          <a:bodyPr wrap="none" lIns="0" tIns="0" rIns="0" bIns="0" rtlCol="0" anchor="ctr"/>
+          <a:lstStyle/>
+          <a:p>
+            <a:pPr algn="ctr"/>
+            <a:r>
+              <a:rPr sz="900" b="0">
+                <a:solidFill>
+                  <a:srgbClr val="4A4C4F"/>
+                </a:solidFill>
+                <a:latin typeface="Arial"/>
+              </a:rPr>
+              <a:t>messages — user turn</a:t>
+            </a:r>
+          </a:p>
+        </p:txBody>
+      </p:sp>
+      <p:sp>
+        <p:nvSpPr>
+          <p:cNvPr id="15" name="Rounded Rectangle 14"/>
+          <p:cNvSpPr/>
+          <p:nvPr/>
+        </p:nvSpPr>
+        <p:spPr>
+          <a:xfrm>
+            <a:off x="2545689" y="3206496"/>
+            <a:ext cx="1897745" cy="256032"/>
+          </a:xfrm>
+          <a:prstGeom prst="roundRect">
+            <a:avLst>
+              <a:gd name="adj" fmla="val 50000"/>
+            </a:avLst>
+          </a:prstGeom>
+          <a:solidFill>
+            <a:srgbClr val="FAFAFA"/>
+          </a:solidFill>
+          <a:ln w="9525">
+            <a:solidFill>
+              <a:srgbClr val="DADADB"/>
+            </a:solidFill>
+          </a:ln>
+          <a:effectLst/>
+        </p:spPr>
+        <p:style>
+          <a:lnRef idx="1">
+            <a:schemeClr val="accent1"/>
+          </a:lnRef>
+          <a:fillRef idx="3">
+            <a:schemeClr val="accent1"/>
+          </a:fillRef>
+          <a:effectRef idx="2">
+            <a:schemeClr val="accent1"/>
+          </a:effectRef>
+          <a:fontRef idx="minor">
+            <a:schemeClr val="lt1"/>
+          </a:fontRef>
+        </p:style>
+        <p:txBody>
+          <a:bodyPr wrap="none" lIns="0" tIns="0" rIns="0" bIns="0" rtlCol="0" anchor="ctr"/>
+          <a:lstStyle/>
+          <a:p>
+            <a:pPr algn="ctr"/>
+            <a:r>
+              <a:rPr sz="900" b="0">
+                <a:solidFill>
+                  <a:srgbClr val="4A4C4F"/>
+                </a:solidFill>
+                <a:latin typeface="Arial"/>
+              </a:rPr>
+              <a:t>messages — assistant + eval</a:t>
+            </a:r>
+          </a:p>
+        </p:txBody>
+      </p:sp>
+      <p:sp>
+        <p:nvSpPr>
+          <p:cNvPr id="16" name="Rounded Rectangle 15"/>
+          <p:cNvSpPr/>
+          <p:nvPr/>
+        </p:nvSpPr>
+        <p:spPr>
+          <a:xfrm>
+            <a:off x="4516587" y="3206496"/>
+            <a:ext cx="1897745" cy="256032"/>
+          </a:xfrm>
+          <a:prstGeom prst="roundRect">
+            <a:avLst>
+              <a:gd name="adj" fmla="val 50000"/>
+            </a:avLst>
+          </a:prstGeom>
+          <a:solidFill>
+            <a:srgbClr val="FAFAFA"/>
+          </a:solidFill>
+          <a:ln w="9525">
+            <a:solidFill>
+              <a:srgbClr val="DADADB"/>
+            </a:solidFill>
+          </a:ln>
+          <a:effectLst/>
+        </p:spPr>
+        <p:style>
+          <a:lnRef idx="1">
+            <a:schemeClr val="accent1"/>
+          </a:lnRef>
+          <a:fillRef idx="3">
+            <a:schemeClr val="accent1"/>
+          </a:fillRef>
+          <a:effectRef idx="2">
+            <a:schemeClr val="accent1"/>
+          </a:effectRef>
+          <a:fontRef idx="minor">
+            <a:schemeClr val="lt1"/>
+          </a:fontRef>
+        </p:style>
+        <p:txBody>
+          <a:bodyPr wrap="none" lIns="0" tIns="0" rIns="0" bIns="0" rtlCol="0" anchor="ctr"/>
+          <a:lstStyle/>
+          <a:p>
+            <a:pPr algn="ctr"/>
+            <a:r>
+              <a:rPr sz="900" b="0">
+                <a:solidFill>
+                  <a:srgbClr val="4A4C4F"/>
+                </a:solidFill>
+                <a:latin typeface="Arial"/>
+              </a:rPr>
+              <a:t>conversations · last_intent</a:t>
+            </a:r>
+          </a:p>
+        </p:txBody>
+      </p:sp>
+      <p:sp>
+        <p:nvSpPr>
+          <p:cNvPr id="17" name="Rounded Rectangle 16"/>
+          <p:cNvSpPr/>
+          <p:nvPr/>
+        </p:nvSpPr>
+        <p:spPr>
+          <a:xfrm>
+            <a:off x="1024128" y="3535680"/>
+            <a:ext cx="1576791" cy="256032"/>
+          </a:xfrm>
+          <a:prstGeom prst="roundRect">
+            <a:avLst>
+              <a:gd name="adj" fmla="val 50000"/>
+            </a:avLst>
+          </a:prstGeom>
+          <a:solidFill>
+            <a:srgbClr val="FAFAFA"/>
+          </a:solidFill>
+          <a:ln w="9525">
+            <a:solidFill>
+              <a:srgbClr val="DADADB"/>
+            </a:solidFill>
+          </a:ln>
+          <a:effectLst/>
+        </p:spPr>
+        <p:style>
+          <a:lnRef idx="1">
+            <a:schemeClr val="accent1"/>
+          </a:lnRef>
+          <a:fillRef idx="3">
+            <a:schemeClr val="accent1"/>
+          </a:fillRef>
+          <a:effectRef idx="2">
+            <a:schemeClr val="accent1"/>
+          </a:effectRef>
+          <a:fontRef idx="minor">
+            <a:schemeClr val="lt1"/>
+          </a:fontRef>
+        </p:style>
+        <p:txBody>
+          <a:bodyPr wrap="none" lIns="0" tIns="0" rIns="0" bIns="0" rtlCol="0" anchor="ctr"/>
+          <a:lstStyle/>
+          <a:p>
+            <a:pPr algn="ctr"/>
+            <a:r>
               <a:rPr sz="900" b="0">
                 <a:solidFill>
                   <a:srgbClr val="4A4C4F"/>
@@ -6656,7 +9883,7 @@
 </p:sld>
 </file>
 
-<file path=ppt/slides/slide12.xml><?xml version="1.0" encoding="utf-8"?>
+<file path=ppt/slides/slide13.xml><?xml version="1.0" encoding="utf-8"?>
 <p:sld xmlns:a="http://schemas.openxmlformats.org/drawingml/2006/main" xmlns:r="http://schemas.openxmlformats.org/officeDocument/2006/relationships" xmlns:p="http://schemas.openxmlformats.org/presentationml/2006/main">
   <p:cSld name="Slide 8">
     <p:bg>
@@ -8326,7 +11553,7 @@
 </p:sld>
 </file>
 
-<file path=ppt/slides/slide13.xml><?xml version="1.0" encoding="utf-8"?>
+<file path=ppt/slides/slide14.xml><?xml version="1.0" encoding="utf-8"?>
 <p:sld xmlns:a="http://schemas.openxmlformats.org/drawingml/2006/main" xmlns:r="http://schemas.openxmlformats.org/officeDocument/2006/relationships" xmlns:p="http://schemas.openxmlformats.org/presentationml/2006/main">
   <p:cSld>
     <p:bg>
@@ -8749,7 +11976,7 @@
 </p:sld>
 </file>
 
-<file path=ppt/slides/slide14.xml><?xml version="1.0" encoding="utf-8"?>
+<file path=ppt/slides/slide15.xml><?xml version="1.0" encoding="utf-8"?>
 <p:sld xmlns:a="http://schemas.openxmlformats.org/drawingml/2006/main" xmlns:r="http://schemas.openxmlformats.org/officeDocument/2006/relationships" xmlns:p="http://schemas.openxmlformats.org/presentationml/2006/main">
   <p:cSld name="Slide 10">
     <p:bg>
@@ -10314,7 +13541,7 @@
 </p:sld>
 </file>
 
-<file path=ppt/slides/slide15.xml><?xml version="1.0" encoding="utf-8"?>
+<file path=ppt/slides/slide16.xml><?xml version="1.0" encoding="utf-8"?>
 <p:sld xmlns:a="http://schemas.openxmlformats.org/drawingml/2006/main" xmlns:r="http://schemas.openxmlformats.org/officeDocument/2006/relationships" xmlns:p="http://schemas.openxmlformats.org/presentationml/2006/main">
   <p:cSld name="Slide 11">
     <p:bg>
@@ -11608,7 +14835,7 @@
 </p:sld>
 </file>
 
-<file path=ppt/slides/slide16.xml><?xml version="1.0" encoding="utf-8"?>
+<file path=ppt/slides/slide17.xml><?xml version="1.0" encoding="utf-8"?>
 <p:sld xmlns:a="http://schemas.openxmlformats.org/drawingml/2006/main" xmlns:r="http://schemas.openxmlformats.org/officeDocument/2006/relationships" xmlns:p="http://schemas.openxmlformats.org/presentationml/2006/main">
   <p:cSld name="Slide 12">
     <p:bg>
@@ -13370,7 +16597,7 @@
 </p:sld>
 </file>
 
-<file path=ppt/slides/slide17.xml><?xml version="1.0" encoding="utf-8"?>
+<file path=ppt/slides/slide18.xml><?xml version="1.0" encoding="utf-8"?>
 <p:sld xmlns:a="http://schemas.openxmlformats.org/drawingml/2006/main" xmlns:r="http://schemas.openxmlformats.org/officeDocument/2006/relationships" xmlns:p="http://schemas.openxmlformats.org/presentationml/2006/main">
   <p:cSld name="Slide 13">
     <p:bg>
@@ -14754,7 +17981,7 @@
 </p:sld>
 </file>
 
-<file path=ppt/slides/slide18.xml><?xml version="1.0" encoding="utf-8"?>
+<file path=ppt/slides/slide19.xml><?xml version="1.0" encoding="utf-8"?>
 <p:sld xmlns:a="http://schemas.openxmlformats.org/drawingml/2006/main" xmlns:r="http://schemas.openxmlformats.org/officeDocument/2006/relationships" xmlns:p="http://schemas.openxmlformats.org/presentationml/2006/main">
   <p:cSld name="Slide 14">
     <p:bg>
@@ -15544,6 +18771,822 @@
 
 <file path=ppt/slides/slide2.xml><?xml version="1.0" encoding="utf-8"?>
 <p:sld xmlns:a="http://schemas.openxmlformats.org/drawingml/2006/main" xmlns:r="http://schemas.openxmlformats.org/officeDocument/2006/relationships" xmlns:p="http://schemas.openxmlformats.org/presentationml/2006/main">
+  <p:cSld>
+    <p:bg>
+      <p:bgPr>
+        <a:solidFill>
+          <a:srgbClr val="082A5E"/>
+        </a:solidFill>
+        <a:effectLst/>
+      </p:bgPr>
+    </p:bg>
+    <p:spTree>
+      <p:nvGrpSpPr>
+        <p:cNvPr id="1" name="">
+          <a:extLst>
+            <a:ext uri="{FF2B5EF4-FFF2-40B4-BE49-F238E27FC236}">
+              <a16:creationId xmlns:a16="http://schemas.microsoft.com/office/drawing/2014/main" id="{1A27AB12-9E3A-054B-7CD4-CA04DD4378EA}"/>
+            </a:ext>
+          </a:extLst>
+        </p:cNvPr>
+        <p:cNvGrpSpPr/>
+        <p:nvPr/>
+      </p:nvGrpSpPr>
+      <p:grpSpPr>
+        <a:xfrm>
+          <a:off x="0" y="0"/>
+          <a:ext cx="0" cy="0"/>
+          <a:chOff x="0" y="0"/>
+          <a:chExt cx="0" cy="0"/>
+        </a:xfrm>
+      </p:grpSpPr>
+      <p:pic>
+        <p:nvPicPr>
+          <p:cNvPr id="2" name="Image 0" descr="assets/logo-mark.png">
+            <a:extLst>
+              <a:ext uri="{FF2B5EF4-FFF2-40B4-BE49-F238E27FC236}">
+                <a16:creationId xmlns:a16="http://schemas.microsoft.com/office/drawing/2014/main" id="{92DF0E28-CCEE-0F67-36AA-875C773A2968}"/>
+              </a:ext>
+            </a:extLst>
+          </p:cNvPr>
+          <p:cNvPicPr>
+            <a:picLocks noChangeAspect="1"/>
+          </p:cNvPicPr>
+          <p:nvPr/>
+        </p:nvPicPr>
+        <p:blipFill>
+          <a:blip r:embed="rId3"/>
+          <a:stretch>
+            <a:fillRect/>
+          </a:stretch>
+        </p:blipFill>
+        <p:spPr>
+          <a:xfrm>
+            <a:off x="822960" y="731520"/>
+            <a:ext cx="566928" cy="566928"/>
+          </a:xfrm>
+          <a:prstGeom prst="rect">
+            <a:avLst/>
+          </a:prstGeom>
+        </p:spPr>
+      </p:pic>
+      <p:sp>
+        <p:nvSpPr>
+          <p:cNvPr id="3" name="Text 0">
+            <a:extLst>
+              <a:ext uri="{FF2B5EF4-FFF2-40B4-BE49-F238E27FC236}">
+                <a16:creationId xmlns:a16="http://schemas.microsoft.com/office/drawing/2014/main" id="{9B57BDAE-84D7-0245-882C-E3B362F0DE5E}"/>
+              </a:ext>
+            </a:extLst>
+          </p:cNvPr>
+          <p:cNvSpPr txBox="1"/>
+          <p:nvPr/>
+        </p:nvSpPr>
+        <p:spPr>
+          <a:xfrm>
+            <a:off x="1481328" y="768096"/>
+            <a:ext cx="3657600" cy="548640"/>
+          </a:xfrm>
+          <a:prstGeom prst="rect">
+            <a:avLst/>
+          </a:prstGeom>
+          <a:noFill/>
+          <a:ln/>
+        </p:spPr>
+        <p:txBody>
+          <a:bodyPr wrap="square" rtlCol="0" anchor="ctr"/>
+          <a:lstStyle/>
+          <a:p>
+            <a:pPr marL="0" indent="0">
+              <a:buNone/>
+            </a:pPr>
+            <a:r>
+              <a:rPr lang="en-US" sz="2800" b="1" dirty="0">
+                <a:solidFill>
+                  <a:srgbClr val="FFFFFF"/>
+                </a:solidFill>
+                <a:latin typeface="Arial" pitchFamily="34" charset="0"/>
+                <a:ea typeface="Arial" pitchFamily="34" charset="-122"/>
+                <a:cs typeface="Arial" pitchFamily="34" charset="-120"/>
+              </a:rPr>
+              <a:t>Handled</a:t>
+            </a:r>
+            <a:endParaRPr lang="en-US" sz="2800" dirty="0"/>
+          </a:p>
+        </p:txBody>
+      </p:sp>
+      <p:sp>
+        <p:nvSpPr>
+          <p:cNvPr id="4" name="Text 1">
+            <a:extLst>
+              <a:ext uri="{FF2B5EF4-FFF2-40B4-BE49-F238E27FC236}">
+                <a16:creationId xmlns:a16="http://schemas.microsoft.com/office/drawing/2014/main" id="{F6F7054E-0880-8A8C-B205-7CB3453DE1D6}"/>
+              </a:ext>
+            </a:extLst>
+          </p:cNvPr>
+          <p:cNvSpPr txBox="1"/>
+          <p:nvPr/>
+        </p:nvSpPr>
+        <p:spPr>
+          <a:xfrm>
+            <a:off x="822960" y="2697480"/>
+            <a:ext cx="8229600" cy="320040"/>
+          </a:xfrm>
+          <a:prstGeom prst="rect">
+            <a:avLst/>
+          </a:prstGeom>
+          <a:noFill/>
+          <a:ln/>
+        </p:spPr>
+        <p:txBody>
+          <a:bodyPr wrap="square" rtlCol="0" anchor="ctr"/>
+          <a:lstStyle/>
+          <a:p>
+            <a:pPr marL="0" indent="0">
+              <a:buNone/>
+            </a:pPr>
+            <a:r>
+              <a:rPr lang="en-US" sz="1300" b="1" kern="0" spc="150" dirty="0">
+                <a:solidFill>
+                  <a:srgbClr val="89B7FF"/>
+                </a:solidFill>
+                <a:latin typeface="Arial" pitchFamily="34" charset="0"/>
+                <a:ea typeface="Arial" pitchFamily="34" charset="-122"/>
+                <a:cs typeface="Arial" pitchFamily="34" charset="-120"/>
+              </a:rPr>
+              <a:t>AI OFFICE MANAGER  ·  PRODUCT CAPSTONE</a:t>
+            </a:r>
+            <a:endParaRPr lang="en-US" sz="1300" dirty="0"/>
+          </a:p>
+        </p:txBody>
+      </p:sp>
+      <p:sp>
+        <p:nvSpPr>
+          <p:cNvPr id="5" name="Text 2">
+            <a:extLst>
+              <a:ext uri="{FF2B5EF4-FFF2-40B4-BE49-F238E27FC236}">
+                <a16:creationId xmlns:a16="http://schemas.microsoft.com/office/drawing/2014/main" id="{B38ACC5A-76C9-B2CD-E37E-865041A25DCE}"/>
+              </a:ext>
+            </a:extLst>
+          </p:cNvPr>
+          <p:cNvSpPr txBox="1"/>
+          <p:nvPr/>
+        </p:nvSpPr>
+        <p:spPr>
+          <a:xfrm>
+            <a:off x="822960" y="3063240"/>
+            <a:ext cx="8595360" cy="2103120"/>
+          </a:xfrm>
+          <a:prstGeom prst="rect">
+            <a:avLst/>
+          </a:prstGeom>
+          <a:noFill/>
+          <a:ln/>
+        </p:spPr>
+        <p:txBody>
+          <a:bodyPr wrap="square" rtlCol="0" anchor="ctr"/>
+          <a:lstStyle/>
+          <a:p>
+            <a:pPr marL="0" indent="0">
+              <a:lnSpc>
+                <a:spcPct val="102000"/>
+              </a:lnSpc>
+              <a:buNone/>
+            </a:pPr>
+            <a:r>
+              <a:rPr lang="en-US" sz="4000" b="1" dirty="0">
+                <a:solidFill>
+                  <a:srgbClr val="FFFFFF"/>
+                </a:solidFill>
+                <a:latin typeface="Arial" pitchFamily="34" charset="0"/>
+                <a:ea typeface="Arial" pitchFamily="34" charset="-122"/>
+                <a:cs typeface="Arial" pitchFamily="34" charset="-120"/>
+              </a:rPr>
+              <a:t>The AI office manager for home &amp; local service businesses</a:t>
+            </a:r>
+            <a:endParaRPr lang="en-US" sz="4000" dirty="0"/>
+          </a:p>
+        </p:txBody>
+      </p:sp>
+      <p:sp>
+        <p:nvSpPr>
+          <p:cNvPr id="6" name="Text 3">
+            <a:extLst>
+              <a:ext uri="{FF2B5EF4-FFF2-40B4-BE49-F238E27FC236}">
+                <a16:creationId xmlns:a16="http://schemas.microsoft.com/office/drawing/2014/main" id="{DCCFA204-9609-DD22-F31E-EDE282C7C99F}"/>
+              </a:ext>
+            </a:extLst>
+          </p:cNvPr>
+          <p:cNvSpPr txBox="1"/>
+          <p:nvPr/>
+        </p:nvSpPr>
+        <p:spPr>
+          <a:xfrm>
+            <a:off x="822960" y="5257800"/>
+            <a:ext cx="8138160" cy="1188720"/>
+          </a:xfrm>
+          <a:prstGeom prst="rect">
+            <a:avLst/>
+          </a:prstGeom>
+          <a:noFill/>
+          <a:ln/>
+        </p:spPr>
+        <p:txBody>
+          <a:bodyPr wrap="square" rtlCol="0" anchor="ctr"/>
+          <a:lstStyle/>
+          <a:p>
+            <a:pPr marL="0" indent="0">
+              <a:lnSpc>
+                <a:spcPct val="112000"/>
+              </a:lnSpc>
+              <a:buNone/>
+            </a:pPr>
+            <a:r>
+              <a:rPr lang="en-US" sz="1600" dirty="0">
+                <a:solidFill>
+                  <a:srgbClr val="B6CFF5"/>
+                </a:solidFill>
+                <a:latin typeface="Arial" pitchFamily="34" charset="0"/>
+                <a:ea typeface="Arial" pitchFamily="34" charset="-122"/>
+                <a:cs typeface="Arial" pitchFamily="34" charset="-120"/>
+              </a:rPr>
+              <a:t>Handled answers every text, books the job into your field-service schedule, and follows up — so owner-operators stop losing revenue to the competitor who picked up first.</a:t>
+            </a:r>
+            <a:endParaRPr lang="en-US" sz="1600" dirty="0"/>
+          </a:p>
+        </p:txBody>
+      </p:sp>
+      <p:sp>
+        <p:nvSpPr>
+          <p:cNvPr id="7" name="Text 4">
+            <a:extLst>
+              <a:ext uri="{FF2B5EF4-FFF2-40B4-BE49-F238E27FC236}">
+                <a16:creationId xmlns:a16="http://schemas.microsoft.com/office/drawing/2014/main" id="{4414C17C-A5D8-BB54-2389-D35E14AB3E69}"/>
+              </a:ext>
+            </a:extLst>
+          </p:cNvPr>
+          <p:cNvSpPr txBox="1"/>
+          <p:nvPr/>
+        </p:nvSpPr>
+        <p:spPr>
+          <a:xfrm>
+            <a:off x="822960" y="7086600"/>
+            <a:ext cx="8595360" cy="365760"/>
+          </a:xfrm>
+          <a:prstGeom prst="rect">
+            <a:avLst/>
+          </a:prstGeom>
+          <a:noFill/>
+          <a:ln/>
+        </p:spPr>
+        <p:txBody>
+          <a:bodyPr wrap="square" rtlCol="0" anchor="ctr"/>
+          <a:lstStyle/>
+          <a:p>
+            <a:pPr marL="0" indent="0">
+              <a:buNone/>
+            </a:pPr>
+            <a:r>
+              <a:rPr lang="en-US" sz="1300" b="1" dirty="0">
+                <a:solidFill>
+                  <a:srgbClr val="FFFFFF"/>
+                </a:solidFill>
+                <a:latin typeface="Arial" pitchFamily="34" charset="0"/>
+                <a:ea typeface="Arial" pitchFamily="34" charset="-122"/>
+                <a:cs typeface="Arial" pitchFamily="34" charset="-120"/>
+              </a:rPr>
+              <a:t>John Francis</a:t>
+            </a:r>
+            <a:r>
+              <a:rPr lang="en-US" sz="1300" dirty="0">
+                <a:solidFill>
+                  <a:srgbClr val="89B7FF"/>
+                </a:solidFill>
+                <a:latin typeface="Arial" pitchFamily="34" charset="0"/>
+                <a:ea typeface="Arial" pitchFamily="34" charset="-122"/>
+                <a:cs typeface="Arial" pitchFamily="34" charset="-120"/>
+              </a:rPr>
+              <a:t>      Designed, built &amp; deployed — website · customer app · test harness</a:t>
+            </a:r>
+            <a:endParaRPr lang="en-US" sz="1300" dirty="0"/>
+          </a:p>
+        </p:txBody>
+      </p:sp>
+      <p:sp>
+        <p:nvSpPr>
+          <p:cNvPr id="8" name="Shape 5">
+            <a:extLst>
+              <a:ext uri="{FF2B5EF4-FFF2-40B4-BE49-F238E27FC236}">
+                <a16:creationId xmlns:a16="http://schemas.microsoft.com/office/drawing/2014/main" id="{B9A0283C-CBD5-3385-D83A-56C059CBAC9B}"/>
+              </a:ext>
+            </a:extLst>
+          </p:cNvPr>
+          <p:cNvSpPr/>
+          <p:nvPr/>
+        </p:nvSpPr>
+        <p:spPr>
+          <a:xfrm>
+            <a:off x="9829800" y="2743200"/>
+            <a:ext cx="3977640" cy="3566160"/>
+          </a:xfrm>
+          <a:prstGeom prst="roundRect">
+            <a:avLst>
+              <a:gd name="adj" fmla="val 3077"/>
+            </a:avLst>
+          </a:prstGeom>
+          <a:solidFill>
+            <a:srgbClr val="0A367B"/>
+          </a:solidFill>
+          <a:ln/>
+        </p:spPr>
+        <p:txBody>
+          <a:bodyPr/>
+          <a:lstStyle/>
+          <a:p>
+            <a:endParaRPr lang="en-US"/>
+          </a:p>
+        </p:txBody>
+      </p:sp>
+      <p:sp>
+        <p:nvSpPr>
+          <p:cNvPr id="9" name="Shape 6">
+            <a:extLst>
+              <a:ext uri="{FF2B5EF4-FFF2-40B4-BE49-F238E27FC236}">
+                <a16:creationId xmlns:a16="http://schemas.microsoft.com/office/drawing/2014/main" id="{A18C4CFD-C813-5E92-A9A8-429151C58483}"/>
+              </a:ext>
+            </a:extLst>
+          </p:cNvPr>
+          <p:cNvSpPr/>
+          <p:nvPr/>
+        </p:nvSpPr>
+        <p:spPr>
+          <a:xfrm>
+            <a:off x="10104120" y="3063240"/>
+            <a:ext cx="658368" cy="658368"/>
+          </a:xfrm>
+          <a:prstGeom prst="roundRect">
+            <a:avLst>
+              <a:gd name="adj" fmla="val 16667"/>
+            </a:avLst>
+          </a:prstGeom>
+          <a:solidFill>
+            <a:srgbClr val="115ACB"/>
+          </a:solidFill>
+          <a:ln/>
+        </p:spPr>
+        <p:txBody>
+          <a:bodyPr/>
+          <a:lstStyle/>
+          <a:p>
+            <a:endParaRPr lang="en-US"/>
+          </a:p>
+        </p:txBody>
+      </p:sp>
+      <p:pic>
+        <p:nvPicPr>
+          <p:cNvPr id="10" name="Image 1" descr="assets/icons/phone-call_FFFFFF.png">
+            <a:extLst>
+              <a:ext uri="{FF2B5EF4-FFF2-40B4-BE49-F238E27FC236}">
+                <a16:creationId xmlns:a16="http://schemas.microsoft.com/office/drawing/2014/main" id="{30A2BB75-5FD2-92FE-37B4-18CE58198B6D}"/>
+              </a:ext>
+            </a:extLst>
+          </p:cNvPr>
+          <p:cNvPicPr>
+            <a:picLocks noChangeAspect="1"/>
+          </p:cNvPicPr>
+          <p:nvPr/>
+        </p:nvPicPr>
+        <p:blipFill>
+          <a:blip r:embed="rId4"/>
+          <a:stretch>
+            <a:fillRect/>
+          </a:stretch>
+        </p:blipFill>
+        <p:spPr>
+          <a:xfrm>
+            <a:off x="10262128" y="3221248"/>
+            <a:ext cx="342351" cy="342351"/>
+          </a:xfrm>
+          <a:prstGeom prst="rect">
+            <a:avLst/>
+          </a:prstGeom>
+        </p:spPr>
+      </p:pic>
+      <p:sp>
+        <p:nvSpPr>
+          <p:cNvPr id="11" name="Text 7">
+            <a:extLst>
+              <a:ext uri="{FF2B5EF4-FFF2-40B4-BE49-F238E27FC236}">
+                <a16:creationId xmlns:a16="http://schemas.microsoft.com/office/drawing/2014/main" id="{62B8C548-5849-E539-1552-AFA8D44A6BE9}"/>
+              </a:ext>
+            </a:extLst>
+          </p:cNvPr>
+          <p:cNvSpPr txBox="1"/>
+          <p:nvPr/>
+        </p:nvSpPr>
+        <p:spPr>
+          <a:xfrm>
+            <a:off x="10927080" y="3081528"/>
+            <a:ext cx="2651760" cy="320040"/>
+          </a:xfrm>
+          <a:prstGeom prst="rect">
+            <a:avLst/>
+          </a:prstGeom>
+          <a:noFill/>
+          <a:ln/>
+        </p:spPr>
+        <p:txBody>
+          <a:bodyPr wrap="square" rtlCol="0" anchor="ctr"/>
+          <a:lstStyle/>
+          <a:p>
+            <a:pPr marL="0" indent="0">
+              <a:buNone/>
+            </a:pPr>
+            <a:r>
+              <a:rPr lang="en-US" sz="1400" b="1" dirty="0">
+                <a:solidFill>
+                  <a:srgbClr val="FFFFFF"/>
+                </a:solidFill>
+                <a:latin typeface="Arial" pitchFamily="34" charset="0"/>
+                <a:ea typeface="Arial" pitchFamily="34" charset="-122"/>
+                <a:cs typeface="Arial" pitchFamily="34" charset="-120"/>
+              </a:rPr>
+              <a:t>Answers every text</a:t>
+            </a:r>
+            <a:endParaRPr lang="en-US" sz="1400" dirty="0"/>
+          </a:p>
+        </p:txBody>
+      </p:sp>
+      <p:sp>
+        <p:nvSpPr>
+          <p:cNvPr id="12" name="Text 8">
+            <a:extLst>
+              <a:ext uri="{FF2B5EF4-FFF2-40B4-BE49-F238E27FC236}">
+                <a16:creationId xmlns:a16="http://schemas.microsoft.com/office/drawing/2014/main" id="{D645364E-A63B-38BA-04E5-00EC62193D44}"/>
+              </a:ext>
+            </a:extLst>
+          </p:cNvPr>
+          <p:cNvSpPr txBox="1"/>
+          <p:nvPr/>
+        </p:nvSpPr>
+        <p:spPr>
+          <a:xfrm>
+            <a:off x="10927080" y="3410712"/>
+            <a:ext cx="2651760" cy="457200"/>
+          </a:xfrm>
+          <a:prstGeom prst="rect">
+            <a:avLst/>
+          </a:prstGeom>
+          <a:noFill/>
+          <a:ln/>
+        </p:spPr>
+        <p:txBody>
+          <a:bodyPr wrap="square" rtlCol="0" anchor="ctr"/>
+          <a:lstStyle/>
+          <a:p>
+            <a:pPr marL="0" indent="0">
+              <a:buNone/>
+            </a:pPr>
+            <a:r>
+              <a:rPr lang="en-US" sz="1100" dirty="0">
+                <a:solidFill>
+                  <a:srgbClr val="B6CFF5"/>
+                </a:solidFill>
+                <a:latin typeface="Arial" pitchFamily="34" charset="0"/>
+                <a:ea typeface="Arial" pitchFamily="34" charset="-122"/>
+                <a:cs typeface="Arial" pitchFamily="34" charset="-120"/>
+              </a:rPr>
+              <a:t>24/7, natural conversation</a:t>
+            </a:r>
+            <a:endParaRPr lang="en-US" sz="1100" dirty="0"/>
+          </a:p>
+        </p:txBody>
+      </p:sp>
+      <p:sp>
+        <p:nvSpPr>
+          <p:cNvPr id="13" name="Shape 9">
+            <a:extLst>
+              <a:ext uri="{FF2B5EF4-FFF2-40B4-BE49-F238E27FC236}">
+                <a16:creationId xmlns:a16="http://schemas.microsoft.com/office/drawing/2014/main" id="{02CC78A3-9CAE-BDEA-0E87-6E90539754B9}"/>
+              </a:ext>
+            </a:extLst>
+          </p:cNvPr>
+          <p:cNvSpPr/>
+          <p:nvPr/>
+        </p:nvSpPr>
+        <p:spPr>
+          <a:xfrm>
+            <a:off x="10104120" y="4133088"/>
+            <a:ext cx="658368" cy="658368"/>
+          </a:xfrm>
+          <a:prstGeom prst="roundRect">
+            <a:avLst>
+              <a:gd name="adj" fmla="val 16667"/>
+            </a:avLst>
+          </a:prstGeom>
+          <a:solidFill>
+            <a:srgbClr val="115ACB"/>
+          </a:solidFill>
+          <a:ln/>
+        </p:spPr>
+        <p:txBody>
+          <a:bodyPr/>
+          <a:lstStyle/>
+          <a:p>
+            <a:endParaRPr lang="en-US"/>
+          </a:p>
+        </p:txBody>
+      </p:sp>
+      <p:pic>
+        <p:nvPicPr>
+          <p:cNvPr id="14" name="Image 2" descr="assets/icons/calendar-check_FFFFFF.png">
+            <a:extLst>
+              <a:ext uri="{FF2B5EF4-FFF2-40B4-BE49-F238E27FC236}">
+                <a16:creationId xmlns:a16="http://schemas.microsoft.com/office/drawing/2014/main" id="{4B7569E6-5837-526B-55E5-48D408A85BDE}"/>
+              </a:ext>
+            </a:extLst>
+          </p:cNvPr>
+          <p:cNvPicPr>
+            <a:picLocks noChangeAspect="1"/>
+          </p:cNvPicPr>
+          <p:nvPr/>
+        </p:nvPicPr>
+        <p:blipFill>
+          <a:blip r:embed="rId5"/>
+          <a:stretch>
+            <a:fillRect/>
+          </a:stretch>
+        </p:blipFill>
+        <p:spPr>
+          <a:xfrm>
+            <a:off x="10262128" y="4291096"/>
+            <a:ext cx="342351" cy="342351"/>
+          </a:xfrm>
+          <a:prstGeom prst="rect">
+            <a:avLst/>
+          </a:prstGeom>
+        </p:spPr>
+      </p:pic>
+      <p:sp>
+        <p:nvSpPr>
+          <p:cNvPr id="15" name="Text 10">
+            <a:extLst>
+              <a:ext uri="{FF2B5EF4-FFF2-40B4-BE49-F238E27FC236}">
+                <a16:creationId xmlns:a16="http://schemas.microsoft.com/office/drawing/2014/main" id="{52682F09-1481-FFDE-823A-23552D434BC4}"/>
+              </a:ext>
+            </a:extLst>
+          </p:cNvPr>
+          <p:cNvSpPr txBox="1"/>
+          <p:nvPr/>
+        </p:nvSpPr>
+        <p:spPr>
+          <a:xfrm>
+            <a:off x="10927080" y="4151376"/>
+            <a:ext cx="2651760" cy="320040"/>
+          </a:xfrm>
+          <a:prstGeom prst="rect">
+            <a:avLst/>
+          </a:prstGeom>
+          <a:noFill/>
+          <a:ln/>
+        </p:spPr>
+        <p:txBody>
+          <a:bodyPr wrap="square" rtlCol="0" anchor="ctr"/>
+          <a:lstStyle/>
+          <a:p>
+            <a:pPr marL="0" indent="0">
+              <a:buNone/>
+            </a:pPr>
+            <a:r>
+              <a:rPr lang="en-US" sz="1400" b="1" dirty="0">
+                <a:solidFill>
+                  <a:srgbClr val="FFFFFF"/>
+                </a:solidFill>
+                <a:latin typeface="Arial" pitchFamily="34" charset="0"/>
+                <a:ea typeface="Arial" pitchFamily="34" charset="-122"/>
+                <a:cs typeface="Arial" pitchFamily="34" charset="-120"/>
+              </a:rPr>
+              <a:t>Books into your FSM (Soon)</a:t>
+            </a:r>
+            <a:endParaRPr lang="en-US" sz="1400" dirty="0"/>
+          </a:p>
+        </p:txBody>
+      </p:sp>
+      <p:sp>
+        <p:nvSpPr>
+          <p:cNvPr id="16" name="Text 11">
+            <a:extLst>
+              <a:ext uri="{FF2B5EF4-FFF2-40B4-BE49-F238E27FC236}">
+                <a16:creationId xmlns:a16="http://schemas.microsoft.com/office/drawing/2014/main" id="{31104D5E-FC85-E616-1CBA-C5519447E650}"/>
+              </a:ext>
+            </a:extLst>
+          </p:cNvPr>
+          <p:cNvSpPr txBox="1"/>
+          <p:nvPr/>
+        </p:nvSpPr>
+        <p:spPr>
+          <a:xfrm>
+            <a:off x="10927080" y="4480560"/>
+            <a:ext cx="2651760" cy="457200"/>
+          </a:xfrm>
+          <a:prstGeom prst="rect">
+            <a:avLst/>
+          </a:prstGeom>
+          <a:noFill/>
+          <a:ln/>
+        </p:spPr>
+        <p:txBody>
+          <a:bodyPr wrap="square" rtlCol="0" anchor="ctr"/>
+          <a:lstStyle/>
+          <a:p>
+            <a:pPr marL="0" indent="0">
+              <a:buNone/>
+            </a:pPr>
+            <a:r>
+              <a:rPr lang="en-US" sz="1100" dirty="0">
+                <a:solidFill>
+                  <a:srgbClr val="B6CFF5"/>
+                </a:solidFill>
+                <a:latin typeface="Arial" pitchFamily="34" charset="0"/>
+                <a:ea typeface="Arial" pitchFamily="34" charset="-122"/>
+                <a:cs typeface="Arial" pitchFamily="34" charset="-120"/>
+              </a:rPr>
+              <a:t>Jobber · Housecall Pro · ServiceTitan</a:t>
+            </a:r>
+            <a:endParaRPr lang="en-US" sz="1100" dirty="0"/>
+          </a:p>
+        </p:txBody>
+      </p:sp>
+      <p:sp>
+        <p:nvSpPr>
+          <p:cNvPr id="17" name="Shape 12">
+            <a:extLst>
+              <a:ext uri="{FF2B5EF4-FFF2-40B4-BE49-F238E27FC236}">
+                <a16:creationId xmlns:a16="http://schemas.microsoft.com/office/drawing/2014/main" id="{1DE88951-1F40-8D97-93B3-BB89226A25A5}"/>
+              </a:ext>
+            </a:extLst>
+          </p:cNvPr>
+          <p:cNvSpPr/>
+          <p:nvPr/>
+        </p:nvSpPr>
+        <p:spPr>
+          <a:xfrm>
+            <a:off x="10104120" y="5202936"/>
+            <a:ext cx="658368" cy="658368"/>
+          </a:xfrm>
+          <a:prstGeom prst="roundRect">
+            <a:avLst>
+              <a:gd name="adj" fmla="val 16667"/>
+            </a:avLst>
+          </a:prstGeom>
+          <a:solidFill>
+            <a:srgbClr val="115ACB"/>
+          </a:solidFill>
+          <a:ln/>
+        </p:spPr>
+        <p:txBody>
+          <a:bodyPr/>
+          <a:lstStyle/>
+          <a:p>
+            <a:endParaRPr lang="en-US"/>
+          </a:p>
+        </p:txBody>
+      </p:sp>
+      <p:pic>
+        <p:nvPicPr>
+          <p:cNvPr id="18" name="Image 3" descr="assets/icons/briefcase_FFFFFF.png">
+            <a:extLst>
+              <a:ext uri="{FF2B5EF4-FFF2-40B4-BE49-F238E27FC236}">
+                <a16:creationId xmlns:a16="http://schemas.microsoft.com/office/drawing/2014/main" id="{F2F2AEF7-F0A1-5F56-1799-0627792CC2E2}"/>
+              </a:ext>
+            </a:extLst>
+          </p:cNvPr>
+          <p:cNvPicPr>
+            <a:picLocks noChangeAspect="1"/>
+          </p:cNvPicPr>
+          <p:nvPr/>
+        </p:nvPicPr>
+        <p:blipFill>
+          <a:blip r:embed="rId6"/>
+          <a:stretch>
+            <a:fillRect/>
+          </a:stretch>
+        </p:blipFill>
+        <p:spPr>
+          <a:xfrm>
+            <a:off x="10262128" y="5360944"/>
+            <a:ext cx="342351" cy="342351"/>
+          </a:xfrm>
+          <a:prstGeom prst="rect">
+            <a:avLst/>
+          </a:prstGeom>
+        </p:spPr>
+      </p:pic>
+      <p:sp>
+        <p:nvSpPr>
+          <p:cNvPr id="19" name="Text 13">
+            <a:extLst>
+              <a:ext uri="{FF2B5EF4-FFF2-40B4-BE49-F238E27FC236}">
+                <a16:creationId xmlns:a16="http://schemas.microsoft.com/office/drawing/2014/main" id="{F32BBAAD-A120-080F-8C10-6E73BDDACFD4}"/>
+              </a:ext>
+            </a:extLst>
+          </p:cNvPr>
+          <p:cNvSpPr txBox="1"/>
+          <p:nvPr/>
+        </p:nvSpPr>
+        <p:spPr>
+          <a:xfrm>
+            <a:off x="10927080" y="5221224"/>
+            <a:ext cx="2651760" cy="320040"/>
+          </a:xfrm>
+          <a:prstGeom prst="rect">
+            <a:avLst/>
+          </a:prstGeom>
+          <a:noFill/>
+          <a:ln/>
+        </p:spPr>
+        <p:txBody>
+          <a:bodyPr wrap="square" rtlCol="0" anchor="ctr"/>
+          <a:lstStyle/>
+          <a:p>
+            <a:pPr marL="0" indent="0">
+              <a:buNone/>
+            </a:pPr>
+            <a:r>
+              <a:rPr lang="en-US" sz="1400" b="1" dirty="0">
+                <a:solidFill>
+                  <a:srgbClr val="FFFFFF"/>
+                </a:solidFill>
+                <a:latin typeface="Arial" pitchFamily="34" charset="0"/>
+                <a:ea typeface="Arial" pitchFamily="34" charset="-122"/>
+                <a:cs typeface="Arial" pitchFamily="34" charset="-120"/>
+              </a:rPr>
+              <a:t>Office-manager scope</a:t>
+            </a:r>
+            <a:endParaRPr lang="en-US" sz="1400" dirty="0"/>
+          </a:p>
+        </p:txBody>
+      </p:sp>
+      <p:sp>
+        <p:nvSpPr>
+          <p:cNvPr id="20" name="Text 14">
+            <a:extLst>
+              <a:ext uri="{FF2B5EF4-FFF2-40B4-BE49-F238E27FC236}">
+                <a16:creationId xmlns:a16="http://schemas.microsoft.com/office/drawing/2014/main" id="{14728A38-3279-9FE6-F8BE-84DD2DBA076F}"/>
+              </a:ext>
+            </a:extLst>
+          </p:cNvPr>
+          <p:cNvSpPr txBox="1"/>
+          <p:nvPr/>
+        </p:nvSpPr>
+        <p:spPr>
+          <a:xfrm>
+            <a:off x="10927080" y="5550408"/>
+            <a:ext cx="2651760" cy="457200"/>
+          </a:xfrm>
+          <a:prstGeom prst="rect">
+            <a:avLst/>
+          </a:prstGeom>
+          <a:noFill/>
+          <a:ln/>
+        </p:spPr>
+        <p:txBody>
+          <a:bodyPr wrap="square" rtlCol="0" anchor="ctr"/>
+          <a:lstStyle/>
+          <a:p>
+            <a:pPr marL="0" indent="0">
+              <a:buNone/>
+            </a:pPr>
+            <a:r>
+              <a:rPr lang="en-US" sz="1100" dirty="0">
+                <a:solidFill>
+                  <a:srgbClr val="B6CFF5"/>
+                </a:solidFill>
+                <a:latin typeface="Arial" pitchFamily="34" charset="0"/>
+                <a:ea typeface="Arial" pitchFamily="34" charset="-122"/>
+                <a:cs typeface="Arial" pitchFamily="34" charset="-120"/>
+              </a:rPr>
+              <a:t>Text-back, follow-up, triage</a:t>
+            </a:r>
+            <a:endParaRPr lang="en-US" sz="1100" dirty="0"/>
+          </a:p>
+        </p:txBody>
+      </p:sp>
+    </p:spTree>
+    <p:extLst>
+      <p:ext uri="{BB962C8B-B14F-4D97-AF65-F5344CB8AC3E}">
+        <p14:creationId xmlns:p14="http://schemas.microsoft.com/office/powerpoint/2010/main" val="384866149"/>
+      </p:ext>
+    </p:extLst>
+  </p:cSld>
+  <p:clrMapOvr>
+    <a:masterClrMapping/>
+  </p:clrMapOvr>
+</p:sld>
+</file>
+
+<file path=ppt/slides/slide3.xml><?xml version="1.0" encoding="utf-8"?>
+<p:sld xmlns:a="http://schemas.openxmlformats.org/drawingml/2006/main" xmlns:r="http://schemas.openxmlformats.org/officeDocument/2006/relationships" xmlns:p="http://schemas.openxmlformats.org/presentationml/2006/main">
   <p:cSld name="Slide 2">
     <p:bg>
       <p:bgPr>
@@ -16743,7 +20786,7 @@
 </p:sld>
 </file>
 
-<file path=ppt/slides/slide3.xml><?xml version="1.0" encoding="utf-8"?>
+<file path=ppt/slides/slide4.xml><?xml version="1.0" encoding="utf-8"?>
 <p:sld xmlns:a="http://schemas.openxmlformats.org/drawingml/2006/main" xmlns:r="http://schemas.openxmlformats.org/officeDocument/2006/relationships" xmlns:p="http://schemas.openxmlformats.org/presentationml/2006/main">
   <p:cSld name="Slide 3">
     <p:bg>
@@ -17779,7 +21822,7 @@
 </p:sld>
 </file>
 
-<file path=ppt/slides/slide4.xml><?xml version="1.0" encoding="utf-8"?>
+<file path=ppt/slides/slide5.xml><?xml version="1.0" encoding="utf-8"?>
 <p:sld xmlns:a="http://schemas.openxmlformats.org/drawingml/2006/main" xmlns:r="http://schemas.openxmlformats.org/officeDocument/2006/relationships" xmlns:p="http://schemas.openxmlformats.org/presentationml/2006/main">
   <p:cSld name="Slide 4">
     <p:bg>
@@ -19932,7 +23975,7 @@
 </p:sld>
 </file>
 
-<file path=ppt/slides/slide5.xml><?xml version="1.0" encoding="utf-8"?>
+<file path=ppt/slides/slide6.xml><?xml version="1.0" encoding="utf-8"?>
 <p:sld xmlns:a="http://schemas.openxmlformats.org/drawingml/2006/main" xmlns:r="http://schemas.openxmlformats.org/officeDocument/2006/relationships" xmlns:p="http://schemas.openxmlformats.org/presentationml/2006/main">
   <p:cSld name="Slide 5">
     <p:bg>
@@ -20868,7 +24911,7 @@
 </p:sld>
 </file>
 
-<file path=ppt/slides/slide6.xml><?xml version="1.0" encoding="utf-8"?>
+<file path=ppt/slides/slide7.xml><?xml version="1.0" encoding="utf-8"?>
 <p:sld xmlns:a="http://schemas.openxmlformats.org/drawingml/2006/main" xmlns:r="http://schemas.openxmlformats.org/officeDocument/2006/relationships" xmlns:p="http://schemas.openxmlformats.org/presentationml/2006/main">
   <p:cSld name="Slide 6">
     <p:bg>
@@ -22017,7 +26060,7 @@
 </p:sld>
 </file>
 
-<file path=ppt/slides/slide7.xml><?xml version="1.0" encoding="utf-8"?>
+<file path=ppt/slides/slide8.xml><?xml version="1.0" encoding="utf-8"?>
 <p:sld xmlns:a="http://schemas.openxmlformats.org/drawingml/2006/main" xmlns:r="http://schemas.openxmlformats.org/officeDocument/2006/relationships" xmlns:p="http://schemas.openxmlformats.org/presentationml/2006/main">
   <p:cSld name="Slide 7">
     <p:bg>
@@ -24142,7 +28185,7 @@
 </p:sld>
 </file>
 
-<file path=ppt/slides/slide8.xml><?xml version="1.0" encoding="utf-8"?>
+<file path=ppt/slides/slide9.xml><?xml version="1.0" encoding="utf-8"?>
 <p:sld xmlns:a="http://schemas.openxmlformats.org/drawingml/2006/main" xmlns:r="http://schemas.openxmlformats.org/officeDocument/2006/relationships" xmlns:p="http://schemas.openxmlformats.org/presentationml/2006/main">
   <p:cSld>
     <p:spTree>
@@ -27203,3124 +31246,6 @@
     <p:extLst>
       <p:ext uri="{BB962C8B-B14F-4D97-AF65-F5344CB8AC3E}">
         <p14:creationId xmlns:p14="http://schemas.microsoft.com/office/powerpoint/2010/main" val="3130291462"/>
-      </p:ext>
-    </p:extLst>
-  </p:cSld>
-  <p:clrMapOvr>
-    <a:masterClrMapping/>
-  </p:clrMapOvr>
-</p:sld>
-</file>
-
-<file path=ppt/slides/slide9.xml><?xml version="1.0" encoding="utf-8"?>
-<p:sld xmlns:a="http://schemas.openxmlformats.org/drawingml/2006/main" xmlns:r="http://schemas.openxmlformats.org/officeDocument/2006/relationships" xmlns:p="http://schemas.openxmlformats.org/presentationml/2006/main">
-  <p:cSld>
-    <p:bg>
-      <p:bgPr>
-        <a:solidFill>
-          <a:srgbClr val="FFFFFF"/>
-        </a:solidFill>
-        <a:effectLst/>
-      </p:bgPr>
-    </p:bg>
-    <p:spTree>
-      <p:nvGrpSpPr>
-        <p:cNvPr id="1" name="">
-          <a:extLst>
-            <a:ext uri="{FF2B5EF4-FFF2-40B4-BE49-F238E27FC236}">
-              <a16:creationId xmlns:a16="http://schemas.microsoft.com/office/drawing/2014/main" id="{25E26790-9AEB-6A23-6401-7AA4F182E8F9}"/>
-            </a:ext>
-          </a:extLst>
-        </p:cNvPr>
-        <p:cNvGrpSpPr/>
-        <p:nvPr/>
-      </p:nvGrpSpPr>
-      <p:grpSpPr>
-        <a:xfrm>
-          <a:off x="0" y="0"/>
-          <a:ext cx="0" cy="0"/>
-          <a:chOff x="0" y="0"/>
-          <a:chExt cx="0" cy="0"/>
-        </a:xfrm>
-      </p:grpSpPr>
-      <p:sp>
-        <p:nvSpPr>
-          <p:cNvPr id="2" name="TextBox 1"/>
-          <p:cNvSpPr txBox="1"/>
-          <p:nvPr/>
-        </p:nvSpPr>
-        <p:spPr>
-          <a:xfrm>
-            <a:off x="822960" y="512064"/>
-            <a:ext cx="11887200" cy="274320"/>
-          </a:xfrm>
-          <a:prstGeom prst="rect">
-            <a:avLst/>
-          </a:prstGeom>
-          <a:noFill/>
-        </p:spPr>
-        <p:txBody>
-          <a:bodyPr wrap="square" lIns="0" tIns="0" rIns="0" bIns="0" anchor="t">
-            <a:spAutoFit/>
-          </a:bodyPr>
-          <a:lstStyle/>
-          <a:p>
-            <a:pPr algn="l">
-              <a:lnSpc>
-                <a:spcPct val="100000"/>
-              </a:lnSpc>
-            </a:pPr>
-            <a:r>
-              <a:rPr sz="1200" b="1" i="0">
-                <a:solidFill>
-                  <a:srgbClr val="115ACB"/>
-                </a:solidFill>
-                <a:latin typeface="Arial"/>
-              </a:rPr>
-              <a:t>ARCHITECTURE · N8N IMPLEMENTATION</a:t>
-            </a:r>
-          </a:p>
-        </p:txBody>
-      </p:sp>
-      <p:sp>
-        <p:nvSpPr>
-          <p:cNvPr id="3" name="TextBox 2"/>
-          <p:cNvSpPr txBox="1"/>
-          <p:nvPr/>
-        </p:nvSpPr>
-        <p:spPr>
-          <a:xfrm>
-            <a:off x="822960" y="804672"/>
-            <a:ext cx="11887200" cy="548640"/>
-          </a:xfrm>
-          <a:prstGeom prst="rect">
-            <a:avLst/>
-          </a:prstGeom>
-          <a:noFill/>
-        </p:spPr>
-        <p:txBody>
-          <a:bodyPr wrap="square" lIns="0" tIns="0" rIns="0" bIns="0" anchor="t">
-            <a:spAutoFit/>
-          </a:bodyPr>
-          <a:lstStyle/>
-          <a:p>
-            <a:pPr algn="l">
-              <a:lnSpc>
-                <a:spcPct val="100000"/>
-              </a:lnSpc>
-            </a:pPr>
-            <a:r>
-              <a:rPr sz="2600" b="1" i="0">
-                <a:solidFill>
-                  <a:srgbClr val="070A0E"/>
-                </a:solidFill>
-                <a:latin typeface="Arial"/>
-              </a:rPr>
-              <a:t>Routing &amp; specialists</a:t>
-            </a:r>
-          </a:p>
-        </p:txBody>
-      </p:sp>
-      <p:sp>
-        <p:nvSpPr>
-          <p:cNvPr id="4" name="TextBox 3"/>
-          <p:cNvSpPr txBox="1"/>
-          <p:nvPr/>
-        </p:nvSpPr>
-        <p:spPr>
-          <a:xfrm>
-            <a:off x="822960" y="1371600"/>
-            <a:ext cx="12435840" cy="365760"/>
-          </a:xfrm>
-          <a:prstGeom prst="rect">
-            <a:avLst/>
-          </a:prstGeom>
-          <a:noFill/>
-        </p:spPr>
-        <p:txBody>
-          <a:bodyPr wrap="square" lIns="0" tIns="0" rIns="0" bIns="0" anchor="t">
-            <a:spAutoFit/>
-          </a:bodyPr>
-          <a:lstStyle/>
-          <a:p>
-            <a:pPr algn="l">
-              <a:lnSpc>
-                <a:spcPct val="100000"/>
-              </a:lnSpc>
-            </a:pPr>
-            <a:r>
-              <a:rPr sz="1300" b="0" i="0">
-                <a:solidFill>
-                  <a:srgbClr val="4A4C4F"/>
-                </a:solidFill>
-                <a:latin typeface="Arial"/>
-              </a:rPr>
-              <a:t>The intent / language router, then six specialist agents on one shared Claude Sonnet node (1 of 2).</a:t>
-            </a:r>
-          </a:p>
-        </p:txBody>
-      </p:sp>
-      <p:pic>
-        <p:nvPicPr>
-          <p:cNvPr id="5" name="Picture 4" descr="image.png"/>
-          <p:cNvPicPr>
-            <a:picLocks noChangeAspect="1"/>
-          </p:cNvPicPr>
-          <p:nvPr/>
-        </p:nvPicPr>
-        <p:blipFill>
-          <a:blip r:embed="rId3"/>
-          <a:stretch>
-            <a:fillRect/>
-          </a:stretch>
-        </p:blipFill>
-        <p:spPr>
-          <a:xfrm>
-            <a:off x="13514832" y="493776"/>
-            <a:ext cx="347472" cy="347472"/>
-          </a:xfrm>
-          <a:prstGeom prst="rect">
-            <a:avLst/>
-          </a:prstGeom>
-        </p:spPr>
-      </p:pic>
-      <p:sp>
-        <p:nvSpPr>
-          <p:cNvPr id="6" name="TextBox 5"/>
-          <p:cNvSpPr txBox="1"/>
-          <p:nvPr/>
-        </p:nvSpPr>
-        <p:spPr>
-          <a:xfrm>
-            <a:off x="822960" y="7818120"/>
-            <a:ext cx="3657600" cy="274320"/>
-          </a:xfrm>
-          <a:prstGeom prst="rect">
-            <a:avLst/>
-          </a:prstGeom>
-          <a:noFill/>
-        </p:spPr>
-        <p:txBody>
-          <a:bodyPr wrap="square" lIns="0" tIns="0" rIns="0" bIns="0" anchor="t">
-            <a:spAutoFit/>
-          </a:bodyPr>
-          <a:lstStyle/>
-          <a:p>
-            <a:pPr algn="l">
-              <a:lnSpc>
-                <a:spcPct val="100000"/>
-              </a:lnSpc>
-            </a:pPr>
-            <a:r>
-              <a:rPr sz="1000" b="0" i="0">
-                <a:solidFill>
-                  <a:srgbClr val="8F9193"/>
-                </a:solidFill>
-                <a:latin typeface="Arial"/>
-              </a:rPr>
-              <a:t>handled.ai</a:t>
-            </a:r>
-          </a:p>
-        </p:txBody>
-      </p:sp>
-      <p:sp>
-        <p:nvSpPr>
-          <p:cNvPr id="7" name="TextBox 6"/>
-          <p:cNvSpPr txBox="1"/>
-          <p:nvPr/>
-        </p:nvSpPr>
-        <p:spPr>
-          <a:xfrm>
-            <a:off x="11978640" y="7818120"/>
-            <a:ext cx="1828800" cy="274320"/>
-          </a:xfrm>
-          <a:prstGeom prst="rect">
-            <a:avLst/>
-          </a:prstGeom>
-          <a:noFill/>
-        </p:spPr>
-        <p:txBody>
-          <a:bodyPr wrap="square" lIns="0" tIns="0" rIns="0" bIns="0" anchor="t">
-            <a:spAutoFit/>
-          </a:bodyPr>
-          <a:lstStyle/>
-          <a:p>
-            <a:pPr algn="r">
-              <a:lnSpc>
-                <a:spcPct val="100000"/>
-              </a:lnSpc>
-            </a:pPr>
-            <a:r>
-              <a:rPr sz="1000" b="0" i="0">
-                <a:solidFill>
-                  <a:srgbClr val="8F9193"/>
-                </a:solidFill>
-                <a:latin typeface="Arial"/>
-              </a:rPr>
-              <a:t>09 / 17</a:t>
-            </a:r>
-          </a:p>
-        </p:txBody>
-      </p:sp>
-      <p:sp>
-        <p:nvSpPr>
-          <p:cNvPr id="8" name="Rounded Rectangle 7"/>
-          <p:cNvSpPr/>
-          <p:nvPr/>
-        </p:nvSpPr>
-        <p:spPr>
-          <a:xfrm>
-            <a:off x="822960" y="1737360"/>
-            <a:ext cx="12984480" cy="960120"/>
-          </a:xfrm>
-          <a:prstGeom prst="roundRect">
-            <a:avLst>
-              <a:gd name="adj" fmla="val 9523"/>
-            </a:avLst>
-          </a:prstGeom>
-          <a:solidFill>
-            <a:srgbClr val="FFFFFF"/>
-          </a:solidFill>
-          <a:ln w="12700">
-            <a:solidFill>
-              <a:srgbClr val="DADADB"/>
-            </a:solidFill>
-          </a:ln>
-          <a:effectLst/>
-        </p:spPr>
-        <p:style>
-          <a:lnRef idx="1">
-            <a:schemeClr val="accent1"/>
-          </a:lnRef>
-          <a:fillRef idx="3">
-            <a:schemeClr val="accent1"/>
-          </a:fillRef>
-          <a:effectRef idx="2">
-            <a:schemeClr val="accent1"/>
-          </a:effectRef>
-          <a:fontRef idx="minor">
-            <a:schemeClr val="lt1"/>
-          </a:fontRef>
-        </p:style>
-        <p:txBody>
-          <a:bodyPr rtlCol="0" anchor="ctr"/>
-          <a:lstStyle/>
-          <a:p>
-            <a:pPr algn="ctr"/>
-            <a:endParaRPr/>
-          </a:p>
-        </p:txBody>
-      </p:sp>
-      <p:sp>
-        <p:nvSpPr>
-          <p:cNvPr id="9" name="Rounded Rectangle 8"/>
-          <p:cNvSpPr/>
-          <p:nvPr/>
-        </p:nvSpPr>
-        <p:spPr>
-          <a:xfrm>
-            <a:off x="12350435" y="1920240"/>
-            <a:ext cx="1255836" cy="274320"/>
-          </a:xfrm>
-          <a:prstGeom prst="roundRect">
-            <a:avLst>
-              <a:gd name="adj" fmla="val 50000"/>
-            </a:avLst>
-          </a:prstGeom>
-          <a:solidFill>
-            <a:srgbClr val="E7EFFC"/>
-          </a:solidFill>
-          <a:ln>
-            <a:noFill/>
-          </a:ln>
-          <a:effectLst/>
-        </p:spPr>
-        <p:style>
-          <a:lnRef idx="1">
-            <a:schemeClr val="accent1"/>
-          </a:lnRef>
-          <a:fillRef idx="3">
-            <a:schemeClr val="accent1"/>
-          </a:fillRef>
-          <a:effectRef idx="2">
-            <a:schemeClr val="accent1"/>
-          </a:effectRef>
-          <a:fontRef idx="minor">
-            <a:schemeClr val="lt1"/>
-          </a:fontRef>
-        </p:style>
-        <p:txBody>
-          <a:bodyPr wrap="none" lIns="0" tIns="0" rIns="0" bIns="0" rtlCol="0" anchor="ctr"/>
-          <a:lstStyle/>
-          <a:p>
-            <a:pPr algn="ctr"/>
-            <a:r>
-              <a:rPr sz="900" b="1">
-                <a:solidFill>
-                  <a:srgbClr val="115ACB"/>
-                </a:solidFill>
-                <a:latin typeface="Arial"/>
-              </a:rPr>
-              <a:t>AI · Claude Haiku</a:t>
-            </a:r>
-          </a:p>
-        </p:txBody>
-      </p:sp>
-      <p:sp>
-        <p:nvSpPr>
-          <p:cNvPr id="10" name="TextBox 9"/>
-          <p:cNvSpPr txBox="1"/>
-          <p:nvPr/>
-        </p:nvSpPr>
-        <p:spPr>
-          <a:xfrm>
-            <a:off x="1024128" y="1938528"/>
-            <a:ext cx="11189147" cy="365760"/>
-          </a:xfrm>
-          <a:prstGeom prst="rect">
-            <a:avLst/>
-          </a:prstGeom>
-          <a:noFill/>
-        </p:spPr>
-        <p:txBody>
-          <a:bodyPr wrap="square" lIns="0" tIns="0" rIns="0" bIns="0" anchor="t">
-            <a:spAutoFit/>
-          </a:bodyPr>
-          <a:lstStyle/>
-          <a:p>
-            <a:pPr algn="l">
-              <a:lnSpc>
-                <a:spcPct val="100000"/>
-              </a:lnSpc>
-            </a:pPr>
-            <a:r>
-              <a:rPr sz="1500" b="1" i="0">
-                <a:solidFill>
-                  <a:srgbClr val="070A0E"/>
-                </a:solidFill>
-                <a:latin typeface="Arial"/>
-              </a:rPr>
-              <a:t>Router — intent + language</a:t>
-            </a:r>
-          </a:p>
-        </p:txBody>
-      </p:sp>
-      <p:sp>
-        <p:nvSpPr>
-          <p:cNvPr id="11" name="TextBox 10"/>
-          <p:cNvSpPr txBox="1"/>
-          <p:nvPr/>
-        </p:nvSpPr>
-        <p:spPr>
-          <a:xfrm>
-            <a:off x="1024128" y="2359152"/>
-            <a:ext cx="12582144" cy="347472"/>
-          </a:xfrm>
-          <a:prstGeom prst="rect">
-            <a:avLst/>
-          </a:prstGeom>
-          <a:noFill/>
-        </p:spPr>
-        <p:txBody>
-          <a:bodyPr wrap="square" lIns="0" tIns="0" rIns="0" bIns="0" anchor="t">
-            <a:spAutoFit/>
-          </a:bodyPr>
-          <a:lstStyle/>
-          <a:p>
-            <a:pPr algn="l">
-              <a:lnSpc>
-                <a:spcPct val="105000"/>
-              </a:lnSpc>
-            </a:pPr>
-            <a:r>
-              <a:rPr sz="1050" b="0" i="0">
-                <a:solidFill>
-                  <a:srgbClr val="4A4C4F"/>
-                </a:solidFill>
-                <a:latin typeface="Arial"/>
-              </a:rPr>
-              <a:t>Picks exactly one intent, detects language (en / es) and multi-intent; its output is never sent to the customer. Biases toward emergency when unsure.</a:t>
-            </a:r>
-          </a:p>
-        </p:txBody>
-      </p:sp>
-      <p:sp>
-        <p:nvSpPr>
-          <p:cNvPr id="12" name="Rounded Rectangle 11"/>
-          <p:cNvSpPr/>
-          <p:nvPr/>
-        </p:nvSpPr>
-        <p:spPr>
-          <a:xfrm>
-            <a:off x="1024128" y="2779776"/>
-            <a:ext cx="952713" cy="256032"/>
-          </a:xfrm>
-          <a:prstGeom prst="roundRect">
-            <a:avLst>
-              <a:gd name="adj" fmla="val 50000"/>
-            </a:avLst>
-          </a:prstGeom>
-          <a:solidFill>
-            <a:srgbClr val="FAFAFA"/>
-          </a:solidFill>
-          <a:ln w="9525">
-            <a:solidFill>
-              <a:srgbClr val="DADADB"/>
-            </a:solidFill>
-          </a:ln>
-          <a:effectLst/>
-        </p:spPr>
-        <p:style>
-          <a:lnRef idx="1">
-            <a:schemeClr val="accent1"/>
-          </a:lnRef>
-          <a:fillRef idx="3">
-            <a:schemeClr val="accent1"/>
-          </a:fillRef>
-          <a:effectRef idx="2">
-            <a:schemeClr val="accent1"/>
-          </a:effectRef>
-          <a:fontRef idx="minor">
-            <a:schemeClr val="lt1"/>
-          </a:fontRef>
-        </p:style>
-        <p:txBody>
-          <a:bodyPr wrap="none" lIns="0" tIns="0" rIns="0" bIns="0" rtlCol="0" anchor="ctr"/>
-          <a:lstStyle/>
-          <a:p>
-            <a:pPr algn="ctr"/>
-            <a:r>
-              <a:rPr sz="850" b="0">
-                <a:solidFill>
-                  <a:srgbClr val="4A4C4F"/>
-                </a:solidFill>
-                <a:latin typeface="Arial"/>
-              </a:rPr>
-              <a:t>temperature 0</a:t>
-            </a:r>
-          </a:p>
-        </p:txBody>
-      </p:sp>
-      <p:sp>
-        <p:nvSpPr>
-          <p:cNvPr id="13" name="Rounded Rectangle 12"/>
-          <p:cNvSpPr/>
-          <p:nvPr/>
-        </p:nvSpPr>
-        <p:spPr>
-          <a:xfrm>
-            <a:off x="2049993" y="2779776"/>
-            <a:ext cx="770839" cy="256032"/>
-          </a:xfrm>
-          <a:prstGeom prst="roundRect">
-            <a:avLst>
-              <a:gd name="adj" fmla="val 50000"/>
-            </a:avLst>
-          </a:prstGeom>
-          <a:solidFill>
-            <a:srgbClr val="FAFAFA"/>
-          </a:solidFill>
-          <a:ln w="9525">
-            <a:solidFill>
-              <a:srgbClr val="DADADB"/>
-            </a:solidFill>
-          </a:ln>
-          <a:effectLst/>
-        </p:spPr>
-        <p:style>
-          <a:lnRef idx="1">
-            <a:schemeClr val="accent1"/>
-          </a:lnRef>
-          <a:fillRef idx="3">
-            <a:schemeClr val="accent1"/>
-          </a:fillRef>
-          <a:effectRef idx="2">
-            <a:schemeClr val="accent1"/>
-          </a:effectRef>
-          <a:fontRef idx="minor">
-            <a:schemeClr val="lt1"/>
-          </a:fontRef>
-        </p:style>
-        <p:txBody>
-          <a:bodyPr wrap="none" lIns="0" tIns="0" rIns="0" bIns="0" rtlCol="0" anchor="ctr"/>
-          <a:lstStyle/>
-          <a:p>
-            <a:pPr algn="ctr"/>
-            <a:r>
-              <a:rPr sz="850" b="0">
-                <a:solidFill>
-                  <a:srgbClr val="4A4C4F"/>
-                </a:solidFill>
-                <a:latin typeface="Arial"/>
-              </a:rPr>
-              <a:t>256 tokens</a:t>
-            </a:r>
-          </a:p>
-        </p:txBody>
-      </p:sp>
-      <p:sp>
-        <p:nvSpPr>
-          <p:cNvPr id="14" name="Rounded Rectangle 13"/>
-          <p:cNvSpPr/>
-          <p:nvPr/>
-        </p:nvSpPr>
-        <p:spPr>
-          <a:xfrm>
-            <a:off x="2893984" y="2779776"/>
-            <a:ext cx="407090" cy="256032"/>
-          </a:xfrm>
-          <a:prstGeom prst="roundRect">
-            <a:avLst>
-              <a:gd name="adj" fmla="val 50000"/>
-            </a:avLst>
-          </a:prstGeom>
-          <a:solidFill>
-            <a:srgbClr val="FAFAFA"/>
-          </a:solidFill>
-          <a:ln w="9525">
-            <a:solidFill>
-              <a:srgbClr val="DADADB"/>
-            </a:solidFill>
-          </a:ln>
-          <a:effectLst/>
-        </p:spPr>
-        <p:style>
-          <a:lnRef idx="1">
-            <a:schemeClr val="accent1"/>
-          </a:lnRef>
-          <a:fillRef idx="3">
-            <a:schemeClr val="accent1"/>
-          </a:fillRef>
-          <a:effectRef idx="2">
-            <a:schemeClr val="accent1"/>
-          </a:effectRef>
-          <a:fontRef idx="minor">
-            <a:schemeClr val="lt1"/>
-          </a:fontRef>
-        </p:style>
-        <p:txBody>
-          <a:bodyPr wrap="none" lIns="0" tIns="0" rIns="0" bIns="0" rtlCol="0" anchor="ctr"/>
-          <a:lstStyle/>
-          <a:p>
-            <a:pPr algn="ctr"/>
-            <a:r>
-              <a:rPr sz="850" b="0">
-                <a:solidFill>
-                  <a:srgbClr val="4A4C4F"/>
-                </a:solidFill>
-                <a:latin typeface="Arial"/>
-              </a:rPr>
-              <a:t>book</a:t>
-            </a:r>
-          </a:p>
-        </p:txBody>
-      </p:sp>
-      <p:sp>
-        <p:nvSpPr>
-          <p:cNvPr id="15" name="Rounded Rectangle 14"/>
-          <p:cNvSpPr/>
-          <p:nvPr/>
-        </p:nvSpPr>
-        <p:spPr>
-          <a:xfrm>
-            <a:off x="3374227" y="2779776"/>
-            <a:ext cx="770839" cy="256032"/>
-          </a:xfrm>
-          <a:prstGeom prst="roundRect">
-            <a:avLst>
-              <a:gd name="adj" fmla="val 50000"/>
-            </a:avLst>
-          </a:prstGeom>
-          <a:solidFill>
-            <a:srgbClr val="FAFAFA"/>
-          </a:solidFill>
-          <a:ln w="9525">
-            <a:solidFill>
-              <a:srgbClr val="DADADB"/>
-            </a:solidFill>
-          </a:ln>
-          <a:effectLst/>
-        </p:spPr>
-        <p:style>
-          <a:lnRef idx="1">
-            <a:schemeClr val="accent1"/>
-          </a:lnRef>
-          <a:fillRef idx="3">
-            <a:schemeClr val="accent1"/>
-          </a:fillRef>
-          <a:effectRef idx="2">
-            <a:schemeClr val="accent1"/>
-          </a:effectRef>
-          <a:fontRef idx="minor">
-            <a:schemeClr val="lt1"/>
-          </a:fontRef>
-        </p:style>
-        <p:txBody>
-          <a:bodyPr wrap="none" lIns="0" tIns="0" rIns="0" bIns="0" rtlCol="0" anchor="ctr"/>
-          <a:lstStyle/>
-          <a:p>
-            <a:pPr algn="ctr"/>
-            <a:r>
-              <a:rPr sz="850" b="0">
-                <a:solidFill>
-                  <a:srgbClr val="4A4C4F"/>
-                </a:solidFill>
-                <a:latin typeface="Arial"/>
-              </a:rPr>
-              <a:t>reschedule</a:t>
-            </a:r>
-          </a:p>
-        </p:txBody>
-      </p:sp>
-      <p:sp>
-        <p:nvSpPr>
-          <p:cNvPr id="16" name="Rounded Rectangle 15"/>
-          <p:cNvSpPr/>
-          <p:nvPr/>
-        </p:nvSpPr>
-        <p:spPr>
-          <a:xfrm>
-            <a:off x="4218218" y="2779776"/>
-            <a:ext cx="528340" cy="256032"/>
-          </a:xfrm>
-          <a:prstGeom prst="roundRect">
-            <a:avLst>
-              <a:gd name="adj" fmla="val 50000"/>
-            </a:avLst>
-          </a:prstGeom>
-          <a:solidFill>
-            <a:srgbClr val="FAFAFA"/>
-          </a:solidFill>
-          <a:ln w="9525">
-            <a:solidFill>
-              <a:srgbClr val="DADADB"/>
-            </a:solidFill>
-          </a:ln>
-          <a:effectLst/>
-        </p:spPr>
-        <p:style>
-          <a:lnRef idx="1">
-            <a:schemeClr val="accent1"/>
-          </a:lnRef>
-          <a:fillRef idx="3">
-            <a:schemeClr val="accent1"/>
-          </a:fillRef>
-          <a:effectRef idx="2">
-            <a:schemeClr val="accent1"/>
-          </a:effectRef>
-          <a:fontRef idx="minor">
-            <a:schemeClr val="lt1"/>
-          </a:fontRef>
-        </p:style>
-        <p:txBody>
-          <a:bodyPr wrap="none" lIns="0" tIns="0" rIns="0" bIns="0" rtlCol="0" anchor="ctr"/>
-          <a:lstStyle/>
-          <a:p>
-            <a:pPr algn="ctr"/>
-            <a:r>
-              <a:rPr sz="850" b="0">
-                <a:solidFill>
-                  <a:srgbClr val="4A4C4F"/>
-                </a:solidFill>
-                <a:latin typeface="Arial"/>
-              </a:rPr>
-              <a:t>cancel</a:t>
-            </a:r>
-          </a:p>
-        </p:txBody>
-      </p:sp>
-      <p:sp>
-        <p:nvSpPr>
-          <p:cNvPr id="17" name="Rounded Rectangle 16"/>
-          <p:cNvSpPr/>
-          <p:nvPr/>
-        </p:nvSpPr>
-        <p:spPr>
-          <a:xfrm>
-            <a:off x="4819710" y="2779776"/>
-            <a:ext cx="710214" cy="256032"/>
-          </a:xfrm>
-          <a:prstGeom prst="roundRect">
-            <a:avLst>
-              <a:gd name="adj" fmla="val 50000"/>
-            </a:avLst>
-          </a:prstGeom>
-          <a:solidFill>
-            <a:srgbClr val="FAFAFA"/>
-          </a:solidFill>
-          <a:ln w="9525">
-            <a:solidFill>
-              <a:srgbClr val="DADADB"/>
-            </a:solidFill>
-          </a:ln>
-          <a:effectLst/>
-        </p:spPr>
-        <p:style>
-          <a:lnRef idx="1">
-            <a:schemeClr val="accent1"/>
-          </a:lnRef>
-          <a:fillRef idx="3">
-            <a:schemeClr val="accent1"/>
-          </a:fillRef>
-          <a:effectRef idx="2">
-            <a:schemeClr val="accent1"/>
-          </a:effectRef>
-          <a:fontRef idx="minor">
-            <a:schemeClr val="lt1"/>
-          </a:fontRef>
-        </p:style>
-        <p:txBody>
-          <a:bodyPr wrap="none" lIns="0" tIns="0" rIns="0" bIns="0" rtlCol="0" anchor="ctr"/>
-          <a:lstStyle/>
-          <a:p>
-            <a:pPr algn="ctr"/>
-            <a:r>
-              <a:rPr sz="850" b="0">
-                <a:solidFill>
-                  <a:srgbClr val="4A4C4F"/>
-                </a:solidFill>
-                <a:latin typeface="Arial"/>
-              </a:rPr>
-              <a:t>emergency</a:t>
-            </a:r>
-          </a:p>
-        </p:txBody>
-      </p:sp>
-      <p:sp>
-        <p:nvSpPr>
-          <p:cNvPr id="18" name="Rounded Rectangle 17"/>
-          <p:cNvSpPr/>
-          <p:nvPr/>
-        </p:nvSpPr>
-        <p:spPr>
-          <a:xfrm>
-            <a:off x="5603077" y="2779776"/>
-            <a:ext cx="588965" cy="256032"/>
-          </a:xfrm>
-          <a:prstGeom prst="roundRect">
-            <a:avLst>
-              <a:gd name="adj" fmla="val 50000"/>
-            </a:avLst>
-          </a:prstGeom>
-          <a:solidFill>
-            <a:srgbClr val="FAFAFA"/>
-          </a:solidFill>
-          <a:ln w="9525">
-            <a:solidFill>
-              <a:srgbClr val="DADADB"/>
-            </a:solidFill>
-          </a:ln>
-          <a:effectLst/>
-        </p:spPr>
-        <p:style>
-          <a:lnRef idx="1">
-            <a:schemeClr val="accent1"/>
-          </a:lnRef>
-          <a:fillRef idx="3">
-            <a:schemeClr val="accent1"/>
-          </a:fillRef>
-          <a:effectRef idx="2">
-            <a:schemeClr val="accent1"/>
-          </a:effectRef>
-          <a:fontRef idx="minor">
-            <a:schemeClr val="lt1"/>
-          </a:fontRef>
-        </p:style>
-        <p:txBody>
-          <a:bodyPr wrap="none" lIns="0" tIns="0" rIns="0" bIns="0" rtlCol="0" anchor="ctr"/>
-          <a:lstStyle/>
-          <a:p>
-            <a:pPr algn="ctr"/>
-            <a:r>
-              <a:rPr sz="850" b="0">
-                <a:solidFill>
-                  <a:srgbClr val="4A4C4F"/>
-                </a:solidFill>
-                <a:latin typeface="Arial"/>
-              </a:rPr>
-              <a:t>pricing</a:t>
-            </a:r>
-          </a:p>
-        </p:txBody>
-      </p:sp>
-      <p:sp>
-        <p:nvSpPr>
-          <p:cNvPr id="19" name="Rounded Rectangle 18"/>
-          <p:cNvSpPr/>
-          <p:nvPr/>
-        </p:nvSpPr>
-        <p:spPr>
-          <a:xfrm>
-            <a:off x="6265194" y="2779776"/>
-            <a:ext cx="831463" cy="256032"/>
-          </a:xfrm>
-          <a:prstGeom prst="roundRect">
-            <a:avLst>
-              <a:gd name="adj" fmla="val 50000"/>
-            </a:avLst>
-          </a:prstGeom>
-          <a:solidFill>
-            <a:srgbClr val="FAFAFA"/>
-          </a:solidFill>
-          <a:ln w="9525">
-            <a:solidFill>
-              <a:srgbClr val="DADADB"/>
-            </a:solidFill>
-          </a:ln>
-          <a:effectLst/>
-        </p:spPr>
-        <p:style>
-          <a:lnRef idx="1">
-            <a:schemeClr val="accent1"/>
-          </a:lnRef>
-          <a:fillRef idx="3">
-            <a:schemeClr val="accent1"/>
-          </a:fillRef>
-          <a:effectRef idx="2">
-            <a:schemeClr val="accent1"/>
-          </a:effectRef>
-          <a:fontRef idx="minor">
-            <a:schemeClr val="lt1"/>
-          </a:fontRef>
-        </p:style>
-        <p:txBody>
-          <a:bodyPr wrap="none" lIns="0" tIns="0" rIns="0" bIns="0" rtlCol="0" anchor="ctr"/>
-          <a:lstStyle/>
-          <a:p>
-            <a:pPr algn="ctr"/>
-            <a:r>
-              <a:rPr sz="850" b="0">
-                <a:solidFill>
-                  <a:srgbClr val="4A4C4F"/>
-                </a:solidFill>
-                <a:latin typeface="Arial"/>
-              </a:rPr>
-              <a:t>out_of_area</a:t>
-            </a:r>
-          </a:p>
-        </p:txBody>
-      </p:sp>
-      <p:sp>
-        <p:nvSpPr>
-          <p:cNvPr id="20" name="Rounded Rectangle 19"/>
-          <p:cNvSpPr/>
-          <p:nvPr/>
-        </p:nvSpPr>
-        <p:spPr>
-          <a:xfrm>
-            <a:off x="7169810" y="2779776"/>
-            <a:ext cx="346466" cy="256032"/>
-          </a:xfrm>
-          <a:prstGeom prst="roundRect">
-            <a:avLst>
-              <a:gd name="adj" fmla="val 50000"/>
-            </a:avLst>
-          </a:prstGeom>
-          <a:solidFill>
-            <a:srgbClr val="FAFAFA"/>
-          </a:solidFill>
-          <a:ln w="9525">
-            <a:solidFill>
-              <a:srgbClr val="DADADB"/>
-            </a:solidFill>
-          </a:ln>
-          <a:effectLst/>
-        </p:spPr>
-        <p:style>
-          <a:lnRef idx="1">
-            <a:schemeClr val="accent1"/>
-          </a:lnRef>
-          <a:fillRef idx="3">
-            <a:schemeClr val="accent1"/>
-          </a:fillRef>
-          <a:effectRef idx="2">
-            <a:schemeClr val="accent1"/>
-          </a:effectRef>
-          <a:fontRef idx="minor">
-            <a:schemeClr val="lt1"/>
-          </a:fontRef>
-        </p:style>
-        <p:txBody>
-          <a:bodyPr wrap="none" lIns="0" tIns="0" rIns="0" bIns="0" rtlCol="0" anchor="ctr"/>
-          <a:lstStyle/>
-          <a:p>
-            <a:pPr algn="ctr"/>
-            <a:r>
-              <a:rPr sz="850" b="0">
-                <a:solidFill>
-                  <a:srgbClr val="4A4C4F"/>
-                </a:solidFill>
-                <a:latin typeface="Arial"/>
-              </a:rPr>
-              <a:t>faq</a:t>
-            </a:r>
-          </a:p>
-        </p:txBody>
-      </p:sp>
-      <p:sp>
-        <p:nvSpPr>
-          <p:cNvPr id="21" name="TextBox 20"/>
-          <p:cNvSpPr txBox="1"/>
-          <p:nvPr/>
-        </p:nvSpPr>
-        <p:spPr>
-          <a:xfrm>
-            <a:off x="7132320" y="2724912"/>
-            <a:ext cx="365760" cy="274320"/>
-          </a:xfrm>
-          <a:prstGeom prst="rect">
-            <a:avLst/>
-          </a:prstGeom>
-          <a:noFill/>
-        </p:spPr>
-        <p:txBody>
-          <a:bodyPr wrap="none" lIns="0" tIns="0" rIns="0" bIns="0" anchor="ctr">
-            <a:spAutoFit/>
-          </a:bodyPr>
-          <a:lstStyle/>
-          <a:p>
-            <a:pPr algn="ctr">
-              <a:lnSpc>
-                <a:spcPct val="100000"/>
-              </a:lnSpc>
-            </a:pPr>
-            <a:r>
-              <a:rPr sz="1500" b="0" i="0">
-                <a:solidFill>
-                  <a:srgbClr val="8F9193"/>
-                </a:solidFill>
-                <a:latin typeface="Arial"/>
-              </a:rPr>
-              <a:t>↓</a:t>
-            </a:r>
-          </a:p>
-        </p:txBody>
-      </p:sp>
-      <p:sp>
-        <p:nvSpPr>
-          <p:cNvPr id="22" name="Rounded Rectangle 21"/>
-          <p:cNvSpPr/>
-          <p:nvPr/>
-        </p:nvSpPr>
-        <p:spPr>
-          <a:xfrm>
-            <a:off x="822960" y="2999232"/>
-            <a:ext cx="12984480" cy="676656"/>
-          </a:xfrm>
-          <a:prstGeom prst="roundRect">
-            <a:avLst>
-              <a:gd name="adj" fmla="val 13513"/>
-            </a:avLst>
-          </a:prstGeom>
-          <a:solidFill>
-            <a:srgbClr val="F7F0FF"/>
-          </a:solidFill>
-          <a:ln w="12700">
-            <a:solidFill>
-              <a:srgbClr val="F2E5FF"/>
-            </a:solidFill>
-          </a:ln>
-          <a:effectLst/>
-        </p:spPr>
-        <p:style>
-          <a:lnRef idx="1">
-            <a:schemeClr val="accent1"/>
-          </a:lnRef>
-          <a:fillRef idx="3">
-            <a:schemeClr val="accent1"/>
-          </a:fillRef>
-          <a:effectRef idx="2">
-            <a:schemeClr val="accent1"/>
-          </a:effectRef>
-          <a:fontRef idx="minor">
-            <a:schemeClr val="lt1"/>
-          </a:fontRef>
-        </p:style>
-        <p:txBody>
-          <a:bodyPr rtlCol="0" anchor="ctr"/>
-          <a:lstStyle/>
-          <a:p>
-            <a:pPr algn="ctr"/>
-            <a:endParaRPr/>
-          </a:p>
-        </p:txBody>
-      </p:sp>
-      <p:sp>
-        <p:nvSpPr>
-          <p:cNvPr id="23" name="Rounded Rectangle 22"/>
-          <p:cNvSpPr/>
-          <p:nvPr/>
-        </p:nvSpPr>
-        <p:spPr>
-          <a:xfrm>
-            <a:off x="12258812" y="3145536"/>
-            <a:ext cx="1320027" cy="274320"/>
-          </a:xfrm>
-          <a:prstGeom prst="roundRect">
-            <a:avLst>
-              <a:gd name="adj" fmla="val 50000"/>
-            </a:avLst>
-          </a:prstGeom>
-          <a:solidFill>
-            <a:srgbClr val="F2E5FF"/>
-          </a:solidFill>
-          <a:ln>
-            <a:noFill/>
-          </a:ln>
-          <a:effectLst/>
-        </p:spPr>
-        <p:style>
-          <a:lnRef idx="1">
-            <a:schemeClr val="accent1"/>
-          </a:lnRef>
-          <a:fillRef idx="3">
-            <a:schemeClr val="accent1"/>
-          </a:fillRef>
-          <a:effectRef idx="2">
-            <a:schemeClr val="accent1"/>
-          </a:effectRef>
-          <a:fontRef idx="minor">
-            <a:schemeClr val="lt1"/>
-          </a:fontRef>
-        </p:style>
-        <p:txBody>
-          <a:bodyPr wrap="none" lIns="0" tIns="0" rIns="0" bIns="0" rtlCol="0" anchor="ctr"/>
-          <a:lstStyle/>
-          <a:p>
-            <a:pPr algn="ctr"/>
-            <a:r>
-              <a:rPr sz="900" b="1">
-                <a:solidFill>
-                  <a:srgbClr val="6600CC"/>
-                </a:solidFill>
-                <a:latin typeface="Arial"/>
-              </a:rPr>
-              <a:t>AI · Claude Sonnet</a:t>
-            </a:r>
-          </a:p>
-        </p:txBody>
-      </p:sp>
-      <p:sp>
-        <p:nvSpPr>
-          <p:cNvPr id="24" name="TextBox 23"/>
-          <p:cNvSpPr txBox="1"/>
-          <p:nvPr/>
-        </p:nvSpPr>
-        <p:spPr>
-          <a:xfrm>
-            <a:off x="1078992" y="3127248"/>
-            <a:ext cx="8686800" cy="292608"/>
-          </a:xfrm>
-          <a:prstGeom prst="rect">
-            <a:avLst/>
-          </a:prstGeom>
-          <a:noFill/>
-        </p:spPr>
-        <p:txBody>
-          <a:bodyPr wrap="square" lIns="0" tIns="0" rIns="0" bIns="0" anchor="t">
-            <a:spAutoFit/>
-          </a:bodyPr>
-          <a:lstStyle/>
-          <a:p>
-            <a:pPr algn="l">
-              <a:lnSpc>
-                <a:spcPct val="100000"/>
-              </a:lnSpc>
-            </a:pPr>
-            <a:r>
-              <a:rPr sz="1400" b="1" i="0">
-                <a:solidFill>
-                  <a:srgbClr val="6600CC"/>
-                </a:solidFill>
-                <a:latin typeface="Arial"/>
-              </a:rPr>
-              <a:t>All six specialists share one Claude Sonnet model node</a:t>
-            </a:r>
-          </a:p>
-        </p:txBody>
-      </p:sp>
-      <p:sp>
-        <p:nvSpPr>
-          <p:cNvPr id="25" name="TextBox 24"/>
-          <p:cNvSpPr txBox="1"/>
-          <p:nvPr/>
-        </p:nvSpPr>
-        <p:spPr>
-          <a:xfrm>
-            <a:off x="1078992" y="3419856"/>
-            <a:ext cx="10972800" cy="237744"/>
-          </a:xfrm>
-          <a:prstGeom prst="rect">
-            <a:avLst/>
-          </a:prstGeom>
-          <a:noFill/>
-        </p:spPr>
-        <p:txBody>
-          <a:bodyPr wrap="square" lIns="0" tIns="0" rIns="0" bIns="0" anchor="t">
-            <a:spAutoFit/>
-          </a:bodyPr>
-          <a:lstStyle/>
-          <a:p>
-            <a:pPr algn="l">
-              <a:lnSpc>
-                <a:spcPct val="100000"/>
-              </a:lnSpc>
-            </a:pPr>
-            <a:r>
-              <a:rPr sz="1050" b="0" i="0">
-                <a:solidFill>
-                  <a:srgbClr val="4A4C4F"/>
-                </a:solidFill>
-                <a:latin typeface="Arial"/>
-              </a:rPr>
-              <a:t>temperature 0.3 · 1024 tokens · least-privilege tools · no raw SQL · routed to exactly one agent</a:t>
-            </a:r>
-          </a:p>
-        </p:txBody>
-      </p:sp>
-      <p:sp>
-        <p:nvSpPr>
-          <p:cNvPr id="26" name="TextBox 25"/>
-          <p:cNvSpPr txBox="1"/>
-          <p:nvPr/>
-        </p:nvSpPr>
-        <p:spPr>
-          <a:xfrm>
-            <a:off x="7132320" y="3730752"/>
-            <a:ext cx="365760" cy="274320"/>
-          </a:xfrm>
-          <a:prstGeom prst="rect">
-            <a:avLst/>
-          </a:prstGeom>
-          <a:noFill/>
-        </p:spPr>
-        <p:txBody>
-          <a:bodyPr wrap="none" lIns="0" tIns="0" rIns="0" bIns="0" anchor="ctr">
-            <a:spAutoFit/>
-          </a:bodyPr>
-          <a:lstStyle/>
-          <a:p>
-            <a:pPr algn="ctr">
-              <a:lnSpc>
-                <a:spcPct val="100000"/>
-              </a:lnSpc>
-            </a:pPr>
-            <a:r>
-              <a:rPr sz="1500" b="0" i="0">
-                <a:solidFill>
-                  <a:srgbClr val="8F9193"/>
-                </a:solidFill>
-                <a:latin typeface="Arial"/>
-              </a:rPr>
-              <a:t>↓</a:t>
-            </a:r>
-          </a:p>
-        </p:txBody>
-      </p:sp>
-      <p:sp>
-        <p:nvSpPr>
-          <p:cNvPr id="27" name="Rounded Rectangle 26"/>
-          <p:cNvSpPr/>
-          <p:nvPr/>
-        </p:nvSpPr>
-        <p:spPr>
-          <a:xfrm>
-            <a:off x="822960" y="4005072"/>
-            <a:ext cx="4084319" cy="3017520"/>
-          </a:xfrm>
-          <a:prstGeom prst="roundRect">
-            <a:avLst>
-              <a:gd name="adj" fmla="val 3030"/>
-            </a:avLst>
-          </a:prstGeom>
-          <a:solidFill>
-            <a:srgbClr val="FFFFFF"/>
-          </a:solidFill>
-          <a:ln w="12700">
-            <a:solidFill>
-              <a:srgbClr val="DADADB"/>
-            </a:solidFill>
-          </a:ln>
-          <a:effectLst/>
-        </p:spPr>
-        <p:style>
-          <a:lnRef idx="1">
-            <a:schemeClr val="accent1"/>
-          </a:lnRef>
-          <a:fillRef idx="3">
-            <a:schemeClr val="accent1"/>
-          </a:fillRef>
-          <a:effectRef idx="2">
-            <a:schemeClr val="accent1"/>
-          </a:effectRef>
-          <a:fontRef idx="minor">
-            <a:schemeClr val="lt1"/>
-          </a:fontRef>
-        </p:style>
-        <p:txBody>
-          <a:bodyPr rtlCol="0" anchor="ctr"/>
-          <a:lstStyle/>
-          <a:p>
-            <a:pPr algn="ctr"/>
-            <a:endParaRPr/>
-          </a:p>
-        </p:txBody>
-      </p:sp>
-      <p:sp>
-        <p:nvSpPr>
-          <p:cNvPr id="28" name="Rounded Rectangle 27"/>
-          <p:cNvSpPr/>
-          <p:nvPr/>
-        </p:nvSpPr>
-        <p:spPr>
-          <a:xfrm>
-            <a:off x="3753398" y="4187952"/>
-            <a:ext cx="952713" cy="274320"/>
-          </a:xfrm>
-          <a:prstGeom prst="roundRect">
-            <a:avLst>
-              <a:gd name="adj" fmla="val 50000"/>
-            </a:avLst>
-          </a:prstGeom>
-          <a:solidFill>
-            <a:srgbClr val="F2E5FF"/>
-          </a:solidFill>
-          <a:ln>
-            <a:noFill/>
-          </a:ln>
-          <a:effectLst/>
-        </p:spPr>
-        <p:style>
-          <a:lnRef idx="1">
-            <a:schemeClr val="accent1"/>
-          </a:lnRef>
-          <a:fillRef idx="3">
-            <a:schemeClr val="accent1"/>
-          </a:fillRef>
-          <a:effectRef idx="2">
-            <a:schemeClr val="accent1"/>
-          </a:effectRef>
-          <a:fontRef idx="minor">
-            <a:schemeClr val="lt1"/>
-          </a:fontRef>
-        </p:style>
-        <p:txBody>
-          <a:bodyPr wrap="none" lIns="0" tIns="0" rIns="0" bIns="0" rtlCol="0" anchor="ctr"/>
-          <a:lstStyle/>
-          <a:p>
-            <a:pPr algn="ctr"/>
-            <a:r>
-              <a:rPr sz="850" b="1">
-                <a:solidFill>
-                  <a:srgbClr val="6600CC"/>
-                </a:solidFill>
-                <a:latin typeface="Arial"/>
-              </a:rPr>
-              <a:t>Claude Sonnet</a:t>
-            </a:r>
-          </a:p>
-        </p:txBody>
-      </p:sp>
-      <p:sp>
-        <p:nvSpPr>
-          <p:cNvPr id="29" name="TextBox 28"/>
-          <p:cNvSpPr txBox="1"/>
-          <p:nvPr/>
-        </p:nvSpPr>
-        <p:spPr>
-          <a:xfrm>
-            <a:off x="1024128" y="4206240"/>
-            <a:ext cx="2619542" cy="310896"/>
-          </a:xfrm>
-          <a:prstGeom prst="rect">
-            <a:avLst/>
-          </a:prstGeom>
-          <a:noFill/>
-        </p:spPr>
-        <p:txBody>
-          <a:bodyPr wrap="square" lIns="0" tIns="0" rIns="0" bIns="0" anchor="t">
-            <a:spAutoFit/>
-          </a:bodyPr>
-          <a:lstStyle/>
-          <a:p>
-            <a:pPr algn="l">
-              <a:lnSpc>
-                <a:spcPct val="100000"/>
-              </a:lnSpc>
-            </a:pPr>
-            <a:r>
-              <a:rPr sz="1400" b="1" i="0">
-                <a:solidFill>
-                  <a:srgbClr val="070A0E"/>
-                </a:solidFill>
-                <a:latin typeface="Arial"/>
-              </a:rPr>
-              <a:t>New-Booking</a:t>
-            </a:r>
-          </a:p>
-        </p:txBody>
-      </p:sp>
-      <p:sp>
-        <p:nvSpPr>
-          <p:cNvPr id="30" name="Rounded Rectangle 29"/>
-          <p:cNvSpPr/>
-          <p:nvPr/>
-        </p:nvSpPr>
-        <p:spPr>
-          <a:xfrm>
-            <a:off x="1024128" y="4608576"/>
-            <a:ext cx="892088" cy="256032"/>
-          </a:xfrm>
-          <a:prstGeom prst="roundRect">
-            <a:avLst>
-              <a:gd name="adj" fmla="val 50000"/>
-            </a:avLst>
-          </a:prstGeom>
-          <a:solidFill>
-            <a:srgbClr val="F0F0F1"/>
-          </a:solidFill>
-          <a:ln>
-            <a:noFill/>
-          </a:ln>
-          <a:effectLst/>
-        </p:spPr>
-        <p:style>
-          <a:lnRef idx="1">
-            <a:schemeClr val="accent1"/>
-          </a:lnRef>
-          <a:fillRef idx="3">
-            <a:schemeClr val="accent1"/>
-          </a:fillRef>
-          <a:effectRef idx="2">
-            <a:schemeClr val="accent1"/>
-          </a:effectRef>
-          <a:fontRef idx="minor">
-            <a:schemeClr val="lt1"/>
-          </a:fontRef>
-        </p:style>
-        <p:txBody>
-          <a:bodyPr wrap="none" lIns="0" tIns="0" rIns="0" bIns="0" rtlCol="0" anchor="ctr"/>
-          <a:lstStyle/>
-          <a:p>
-            <a:pPr algn="ctr"/>
-            <a:r>
-              <a:rPr sz="850" b="0">
-                <a:solidFill>
-                  <a:srgbClr val="4A4C4F"/>
-                </a:solidFill>
-                <a:latin typeface="Arial"/>
-              </a:rPr>
-              <a:t>intent: book</a:t>
-            </a:r>
-          </a:p>
-        </p:txBody>
-      </p:sp>
-      <p:sp>
-        <p:nvSpPr>
-          <p:cNvPr id="31" name="TextBox 30"/>
-          <p:cNvSpPr txBox="1"/>
-          <p:nvPr/>
-        </p:nvSpPr>
-        <p:spPr>
-          <a:xfrm>
-            <a:off x="1024128" y="4974336"/>
-            <a:ext cx="3681983" cy="566928"/>
-          </a:xfrm>
-          <a:prstGeom prst="rect">
-            <a:avLst/>
-          </a:prstGeom>
-          <a:noFill/>
-        </p:spPr>
-        <p:txBody>
-          <a:bodyPr wrap="square" lIns="0" tIns="0" rIns="0" bIns="0" anchor="t">
-            <a:spAutoFit/>
-          </a:bodyPr>
-          <a:lstStyle/>
-          <a:p>
-            <a:pPr algn="l">
-              <a:lnSpc>
-                <a:spcPct val="105000"/>
-              </a:lnSpc>
-            </a:pPr>
-            <a:r>
-              <a:rPr sz="1050" b="0" i="0">
-                <a:solidFill>
-                  <a:srgbClr val="4A4C4F"/>
-                </a:solidFill>
-                <a:latin typeface="Arial"/>
-              </a:rPr>
-              <a:t>Schedules a new service visit — readback, confirm, and a re-check of availability before any write.</a:t>
-            </a:r>
-          </a:p>
-        </p:txBody>
-      </p:sp>
-      <p:sp>
-        <p:nvSpPr>
-          <p:cNvPr id="32" name="Rounded Rectangle 31"/>
-          <p:cNvSpPr/>
-          <p:nvPr/>
-        </p:nvSpPr>
-        <p:spPr>
-          <a:xfrm>
-            <a:off x="1024128" y="5650992"/>
-            <a:ext cx="1437711" cy="256032"/>
-          </a:xfrm>
-          <a:prstGeom prst="roundRect">
-            <a:avLst>
-              <a:gd name="adj" fmla="val 50000"/>
-            </a:avLst>
-          </a:prstGeom>
-          <a:solidFill>
-            <a:srgbClr val="FAFAFA"/>
-          </a:solidFill>
-          <a:ln w="9525">
-            <a:solidFill>
-              <a:srgbClr val="DADADB"/>
-            </a:solidFill>
-          </a:ln>
-          <a:effectLst/>
-        </p:spPr>
-        <p:style>
-          <a:lnRef idx="1">
-            <a:schemeClr val="accent1"/>
-          </a:lnRef>
-          <a:fillRef idx="3">
-            <a:schemeClr val="accent1"/>
-          </a:fillRef>
-          <a:effectRef idx="2">
-            <a:schemeClr val="accent1"/>
-          </a:effectRef>
-          <a:fontRef idx="minor">
-            <a:schemeClr val="lt1"/>
-          </a:fontRef>
-        </p:style>
-        <p:txBody>
-          <a:bodyPr wrap="none" lIns="0" tIns="0" rIns="0" bIns="0" rtlCol="0" anchor="ctr"/>
-          <a:lstStyle/>
-          <a:p>
-            <a:pPr algn="ctr"/>
-            <a:r>
-              <a:rPr sz="850" b="0">
-                <a:solidFill>
-                  <a:srgbClr val="4A4C4F"/>
-                </a:solidFill>
-                <a:latin typeface="Arial"/>
-              </a:rPr>
-              <a:t>check_service_offered</a:t>
-            </a:r>
-          </a:p>
-        </p:txBody>
-      </p:sp>
-      <p:sp>
-        <p:nvSpPr>
-          <p:cNvPr id="33" name="Rounded Rectangle 32"/>
-          <p:cNvSpPr/>
-          <p:nvPr/>
-        </p:nvSpPr>
-        <p:spPr>
-          <a:xfrm>
-            <a:off x="2534991" y="5650992"/>
-            <a:ext cx="1437711" cy="256032"/>
-          </a:xfrm>
-          <a:prstGeom prst="roundRect">
-            <a:avLst>
-              <a:gd name="adj" fmla="val 50000"/>
-            </a:avLst>
-          </a:prstGeom>
-          <a:solidFill>
-            <a:srgbClr val="FAFAFA"/>
-          </a:solidFill>
-          <a:ln w="9525">
-            <a:solidFill>
-              <a:srgbClr val="DADADB"/>
-            </a:solidFill>
-          </a:ln>
-          <a:effectLst/>
-        </p:spPr>
-        <p:style>
-          <a:lnRef idx="1">
-            <a:schemeClr val="accent1"/>
-          </a:lnRef>
-          <a:fillRef idx="3">
-            <a:schemeClr val="accent1"/>
-          </a:fillRef>
-          <a:effectRef idx="2">
-            <a:schemeClr val="accent1"/>
-          </a:effectRef>
-          <a:fontRef idx="minor">
-            <a:schemeClr val="lt1"/>
-          </a:fontRef>
-        </p:style>
-        <p:txBody>
-          <a:bodyPr wrap="none" lIns="0" tIns="0" rIns="0" bIns="0" rtlCol="0" anchor="ctr"/>
-          <a:lstStyle/>
-          <a:p>
-            <a:pPr algn="ctr"/>
-            <a:r>
-              <a:rPr sz="850" b="0">
-                <a:solidFill>
-                  <a:srgbClr val="4A4C4F"/>
-                </a:solidFill>
-                <a:latin typeface="Arial"/>
-              </a:rPr>
-              <a:t>validate_service_area</a:t>
-            </a:r>
-          </a:p>
-        </p:txBody>
-      </p:sp>
-      <p:sp>
-        <p:nvSpPr>
-          <p:cNvPr id="34" name="Rounded Rectangle 33"/>
-          <p:cNvSpPr/>
-          <p:nvPr/>
-        </p:nvSpPr>
-        <p:spPr>
-          <a:xfrm>
-            <a:off x="1024128" y="5971031"/>
-            <a:ext cx="1255836" cy="256032"/>
-          </a:xfrm>
-          <a:prstGeom prst="roundRect">
-            <a:avLst>
-              <a:gd name="adj" fmla="val 50000"/>
-            </a:avLst>
-          </a:prstGeom>
-          <a:solidFill>
-            <a:srgbClr val="FAFAFA"/>
-          </a:solidFill>
-          <a:ln w="9525">
-            <a:solidFill>
-              <a:srgbClr val="DADADB"/>
-            </a:solidFill>
-          </a:ln>
-          <a:effectLst/>
-        </p:spPr>
-        <p:style>
-          <a:lnRef idx="1">
-            <a:schemeClr val="accent1"/>
-          </a:lnRef>
-          <a:fillRef idx="3">
-            <a:schemeClr val="accent1"/>
-          </a:fillRef>
-          <a:effectRef idx="2">
-            <a:schemeClr val="accent1"/>
-          </a:effectRef>
-          <a:fontRef idx="minor">
-            <a:schemeClr val="lt1"/>
-          </a:fontRef>
-        </p:style>
-        <p:txBody>
-          <a:bodyPr wrap="none" lIns="0" tIns="0" rIns="0" bIns="0" rtlCol="0" anchor="ctr"/>
-          <a:lstStyle/>
-          <a:p>
-            <a:pPr algn="ctr"/>
-            <a:r>
-              <a:rPr sz="850" b="0">
-                <a:solidFill>
-                  <a:srgbClr val="4A4C4F"/>
-                </a:solidFill>
-                <a:latin typeface="Arial"/>
-              </a:rPr>
-              <a:t>check_availability</a:t>
-            </a:r>
-          </a:p>
-        </p:txBody>
-      </p:sp>
-      <p:sp>
-        <p:nvSpPr>
-          <p:cNvPr id="35" name="Rounded Rectangle 34"/>
-          <p:cNvSpPr/>
-          <p:nvPr/>
-        </p:nvSpPr>
-        <p:spPr>
-          <a:xfrm>
-            <a:off x="2353116" y="5971031"/>
-            <a:ext cx="1195212" cy="256032"/>
-          </a:xfrm>
-          <a:prstGeom prst="roundRect">
-            <a:avLst>
-              <a:gd name="adj" fmla="val 50000"/>
-            </a:avLst>
-          </a:prstGeom>
-          <a:solidFill>
-            <a:srgbClr val="FAFAFA"/>
-          </a:solidFill>
-          <a:ln w="9525">
-            <a:solidFill>
-              <a:srgbClr val="DADADB"/>
-            </a:solidFill>
-          </a:ln>
-          <a:effectLst/>
-        </p:spPr>
-        <p:style>
-          <a:lnRef idx="1">
-            <a:schemeClr val="accent1"/>
-          </a:lnRef>
-          <a:fillRef idx="3">
-            <a:schemeClr val="accent1"/>
-          </a:fillRef>
-          <a:effectRef idx="2">
-            <a:schemeClr val="accent1"/>
-          </a:effectRef>
-          <a:fontRef idx="minor">
-            <a:schemeClr val="lt1"/>
-          </a:fontRef>
-        </p:style>
-        <p:txBody>
-          <a:bodyPr wrap="none" lIns="0" tIns="0" rIns="0" bIns="0" rtlCol="0" anchor="ctr"/>
-          <a:lstStyle/>
-          <a:p>
-            <a:pPr algn="ctr"/>
-            <a:r>
-              <a:rPr sz="850" b="0">
-                <a:solidFill>
-                  <a:srgbClr val="4A4C4F"/>
-                </a:solidFill>
-                <a:latin typeface="Arial"/>
-              </a:rPr>
-              <a:t>lookup_technician</a:t>
-            </a:r>
-          </a:p>
-        </p:txBody>
-      </p:sp>
-      <p:sp>
-        <p:nvSpPr>
-          <p:cNvPr id="36" name="Rounded Rectangle 35"/>
-          <p:cNvSpPr/>
-          <p:nvPr/>
-        </p:nvSpPr>
-        <p:spPr>
-          <a:xfrm>
-            <a:off x="1024128" y="6291071"/>
-            <a:ext cx="1316461" cy="256032"/>
-          </a:xfrm>
-          <a:prstGeom prst="roundRect">
-            <a:avLst>
-              <a:gd name="adj" fmla="val 50000"/>
-            </a:avLst>
-          </a:prstGeom>
-          <a:solidFill>
-            <a:srgbClr val="FAFAFA"/>
-          </a:solidFill>
-          <a:ln w="9525">
-            <a:solidFill>
-              <a:srgbClr val="DADADB"/>
-            </a:solidFill>
-          </a:ln>
-          <a:effectLst/>
-        </p:spPr>
-        <p:style>
-          <a:lnRef idx="1">
-            <a:schemeClr val="accent1"/>
-          </a:lnRef>
-          <a:fillRef idx="3">
-            <a:schemeClr val="accent1"/>
-          </a:fillRef>
-          <a:effectRef idx="2">
-            <a:schemeClr val="accent1"/>
-          </a:effectRef>
-          <a:fontRef idx="minor">
-            <a:schemeClr val="lt1"/>
-          </a:fontRef>
-        </p:style>
-        <p:txBody>
-          <a:bodyPr wrap="none" lIns="0" tIns="0" rIns="0" bIns="0" rtlCol="0" anchor="ctr"/>
-          <a:lstStyle/>
-          <a:p>
-            <a:pPr algn="ctr"/>
-            <a:r>
-              <a:rPr sz="850" b="0">
-                <a:solidFill>
-                  <a:srgbClr val="4A4C4F"/>
-                </a:solidFill>
-                <a:latin typeface="Arial"/>
-              </a:rPr>
-              <a:t>get_service_pricing</a:t>
-            </a:r>
-          </a:p>
-        </p:txBody>
-      </p:sp>
-      <p:sp>
-        <p:nvSpPr>
-          <p:cNvPr id="37" name="Rounded Rectangle 36"/>
-          <p:cNvSpPr/>
-          <p:nvPr/>
-        </p:nvSpPr>
-        <p:spPr>
-          <a:xfrm>
-            <a:off x="2413741" y="6291071"/>
-            <a:ext cx="1255836" cy="256032"/>
-          </a:xfrm>
-          <a:prstGeom prst="roundRect">
-            <a:avLst>
-              <a:gd name="adj" fmla="val 50000"/>
-            </a:avLst>
-          </a:prstGeom>
-          <a:solidFill>
-            <a:srgbClr val="FAFAFA"/>
-          </a:solidFill>
-          <a:ln w="9525">
-            <a:solidFill>
-              <a:srgbClr val="DADADB"/>
-            </a:solidFill>
-          </a:ln>
-          <a:effectLst/>
-        </p:spPr>
-        <p:style>
-          <a:lnRef idx="1">
-            <a:schemeClr val="accent1"/>
-          </a:lnRef>
-          <a:fillRef idx="3">
-            <a:schemeClr val="accent1"/>
-          </a:fillRef>
-          <a:effectRef idx="2">
-            <a:schemeClr val="accent1"/>
-          </a:effectRef>
-          <a:fontRef idx="minor">
-            <a:schemeClr val="lt1"/>
-          </a:fontRef>
-        </p:style>
-        <p:txBody>
-          <a:bodyPr wrap="none" lIns="0" tIns="0" rIns="0" bIns="0" rtlCol="0" anchor="ctr"/>
-          <a:lstStyle/>
-          <a:p>
-            <a:pPr algn="ctr"/>
-            <a:r>
-              <a:rPr sz="850" b="0">
-                <a:solidFill>
-                  <a:srgbClr val="4A4C4F"/>
-                </a:solidFill>
-                <a:latin typeface="Arial"/>
-              </a:rPr>
-              <a:t>create_appointment</a:t>
-            </a:r>
-          </a:p>
-        </p:txBody>
-      </p:sp>
-      <p:sp>
-        <p:nvSpPr>
-          <p:cNvPr id="38" name="Rounded Rectangle 37"/>
-          <p:cNvSpPr/>
-          <p:nvPr/>
-        </p:nvSpPr>
-        <p:spPr>
-          <a:xfrm>
-            <a:off x="3742730" y="6291071"/>
-            <a:ext cx="892088" cy="256032"/>
-          </a:xfrm>
-          <a:prstGeom prst="roundRect">
-            <a:avLst>
-              <a:gd name="adj" fmla="val 50000"/>
-            </a:avLst>
-          </a:prstGeom>
-          <a:solidFill>
-            <a:srgbClr val="FAFAFA"/>
-          </a:solidFill>
-          <a:ln w="9525">
-            <a:solidFill>
-              <a:srgbClr val="DADADB"/>
-            </a:solidFill>
-          </a:ln>
-          <a:effectLst/>
-        </p:spPr>
-        <p:style>
-          <a:lnRef idx="1">
-            <a:schemeClr val="accent1"/>
-          </a:lnRef>
-          <a:fillRef idx="3">
-            <a:schemeClr val="accent1"/>
-          </a:fillRef>
-          <a:effectRef idx="2">
-            <a:schemeClr val="accent1"/>
-          </a:effectRef>
-          <a:fontRef idx="minor">
-            <a:schemeClr val="lt1"/>
-          </a:fontRef>
-        </p:style>
-        <p:txBody>
-          <a:bodyPr wrap="none" lIns="0" tIns="0" rIns="0" bIns="0" rtlCol="0" anchor="ctr"/>
-          <a:lstStyle/>
-          <a:p>
-            <a:pPr algn="ctr"/>
-            <a:r>
-              <a:rPr sz="850" b="0">
-                <a:solidFill>
-                  <a:srgbClr val="4A4C4F"/>
-                </a:solidFill>
-                <a:latin typeface="Arial"/>
-              </a:rPr>
-              <a:t>add_waitlist</a:t>
-            </a:r>
-          </a:p>
-        </p:txBody>
-      </p:sp>
-      <p:sp>
-        <p:nvSpPr>
-          <p:cNvPr id="39" name="Rounded Rectangle 38"/>
-          <p:cNvSpPr/>
-          <p:nvPr/>
-        </p:nvSpPr>
-        <p:spPr>
-          <a:xfrm>
-            <a:off x="1024128" y="6611111"/>
-            <a:ext cx="952713" cy="256032"/>
-          </a:xfrm>
-          <a:prstGeom prst="roundRect">
-            <a:avLst>
-              <a:gd name="adj" fmla="val 50000"/>
-            </a:avLst>
-          </a:prstGeom>
-          <a:solidFill>
-            <a:srgbClr val="FAFAFA"/>
-          </a:solidFill>
-          <a:ln w="9525">
-            <a:solidFill>
-              <a:srgbClr val="DADADB"/>
-            </a:solidFill>
-          </a:ln>
-          <a:effectLst/>
-        </p:spPr>
-        <p:style>
-          <a:lnRef idx="1">
-            <a:schemeClr val="accent1"/>
-          </a:lnRef>
-          <a:fillRef idx="3">
-            <a:schemeClr val="accent1"/>
-          </a:fillRef>
-          <a:effectRef idx="2">
-            <a:schemeClr val="accent1"/>
-          </a:effectRef>
-          <a:fontRef idx="minor">
-            <a:schemeClr val="lt1"/>
-          </a:fontRef>
-        </p:style>
-        <p:txBody>
-          <a:bodyPr wrap="none" lIns="0" tIns="0" rIns="0" bIns="0" rtlCol="0" anchor="ctr"/>
-          <a:lstStyle/>
-          <a:p>
-            <a:pPr algn="ctr"/>
-            <a:r>
-              <a:rPr sz="850" b="0">
-                <a:solidFill>
-                  <a:srgbClr val="4A4C4F"/>
-                </a:solidFill>
-                <a:latin typeface="Arial"/>
-              </a:rPr>
-              <a:t>capture_notes</a:t>
-            </a:r>
-          </a:p>
-        </p:txBody>
-      </p:sp>
-      <p:sp>
-        <p:nvSpPr>
-          <p:cNvPr id="40" name="Rounded Rectangle 39"/>
-          <p:cNvSpPr/>
-          <p:nvPr/>
-        </p:nvSpPr>
-        <p:spPr>
-          <a:xfrm>
-            <a:off x="2049993" y="6611111"/>
-            <a:ext cx="892088" cy="256032"/>
-          </a:xfrm>
-          <a:prstGeom prst="roundRect">
-            <a:avLst>
-              <a:gd name="adj" fmla="val 50000"/>
-            </a:avLst>
-          </a:prstGeom>
-          <a:solidFill>
-            <a:srgbClr val="FAFAFA"/>
-          </a:solidFill>
-          <a:ln w="9525">
-            <a:solidFill>
-              <a:srgbClr val="DADADB"/>
-            </a:solidFill>
-          </a:ln>
-          <a:effectLst/>
-        </p:spPr>
-        <p:style>
-          <a:lnRef idx="1">
-            <a:schemeClr val="accent1"/>
-          </a:lnRef>
-          <a:fillRef idx="3">
-            <a:schemeClr val="accent1"/>
-          </a:fillRef>
-          <a:effectRef idx="2">
-            <a:schemeClr val="accent1"/>
-          </a:effectRef>
-          <a:fontRef idx="minor">
-            <a:schemeClr val="lt1"/>
-          </a:fontRef>
-        </p:style>
-        <p:txBody>
-          <a:bodyPr wrap="none" lIns="0" tIns="0" rIns="0" bIns="0" rtlCol="0" anchor="ctr"/>
-          <a:lstStyle/>
-          <a:p>
-            <a:pPr algn="ctr"/>
-            <a:r>
-              <a:rPr sz="850" b="0">
-                <a:solidFill>
-                  <a:srgbClr val="4A4C4F"/>
-                </a:solidFill>
-                <a:latin typeface="Arial"/>
-              </a:rPr>
-              <a:t>capture_lead</a:t>
-            </a:r>
-          </a:p>
-        </p:txBody>
-      </p:sp>
-      <p:sp>
-        <p:nvSpPr>
-          <p:cNvPr id="41" name="Rounded Rectangle 40"/>
-          <p:cNvSpPr/>
-          <p:nvPr/>
-        </p:nvSpPr>
-        <p:spPr>
-          <a:xfrm>
-            <a:off x="5273040" y="4005072"/>
-            <a:ext cx="4084319" cy="3017520"/>
-          </a:xfrm>
-          <a:prstGeom prst="roundRect">
-            <a:avLst>
-              <a:gd name="adj" fmla="val 3030"/>
-            </a:avLst>
-          </a:prstGeom>
-          <a:solidFill>
-            <a:srgbClr val="FFFFFF"/>
-          </a:solidFill>
-          <a:ln w="12700">
-            <a:solidFill>
-              <a:srgbClr val="DADADB"/>
-            </a:solidFill>
-          </a:ln>
-          <a:effectLst/>
-        </p:spPr>
-        <p:style>
-          <a:lnRef idx="1">
-            <a:schemeClr val="accent1"/>
-          </a:lnRef>
-          <a:fillRef idx="3">
-            <a:schemeClr val="accent1"/>
-          </a:fillRef>
-          <a:effectRef idx="2">
-            <a:schemeClr val="accent1"/>
-          </a:effectRef>
-          <a:fontRef idx="minor">
-            <a:schemeClr val="lt1"/>
-          </a:fontRef>
-        </p:style>
-        <p:txBody>
-          <a:bodyPr rtlCol="0" anchor="ctr"/>
-          <a:lstStyle/>
-          <a:p>
-            <a:pPr algn="ctr"/>
-            <a:endParaRPr/>
-          </a:p>
-        </p:txBody>
-      </p:sp>
-      <p:sp>
-        <p:nvSpPr>
-          <p:cNvPr id="42" name="Rounded Rectangle 41"/>
-          <p:cNvSpPr/>
-          <p:nvPr/>
-        </p:nvSpPr>
-        <p:spPr>
-          <a:xfrm>
-            <a:off x="8203478" y="4187952"/>
-            <a:ext cx="952713" cy="274320"/>
-          </a:xfrm>
-          <a:prstGeom prst="roundRect">
-            <a:avLst>
-              <a:gd name="adj" fmla="val 50000"/>
-            </a:avLst>
-          </a:prstGeom>
-          <a:solidFill>
-            <a:srgbClr val="F2E5FF"/>
-          </a:solidFill>
-          <a:ln>
-            <a:noFill/>
-          </a:ln>
-          <a:effectLst/>
-        </p:spPr>
-        <p:style>
-          <a:lnRef idx="1">
-            <a:schemeClr val="accent1"/>
-          </a:lnRef>
-          <a:fillRef idx="3">
-            <a:schemeClr val="accent1"/>
-          </a:fillRef>
-          <a:effectRef idx="2">
-            <a:schemeClr val="accent1"/>
-          </a:effectRef>
-          <a:fontRef idx="minor">
-            <a:schemeClr val="lt1"/>
-          </a:fontRef>
-        </p:style>
-        <p:txBody>
-          <a:bodyPr wrap="none" lIns="0" tIns="0" rIns="0" bIns="0" rtlCol="0" anchor="ctr"/>
-          <a:lstStyle/>
-          <a:p>
-            <a:pPr algn="ctr"/>
-            <a:r>
-              <a:rPr sz="850" b="1">
-                <a:solidFill>
-                  <a:srgbClr val="6600CC"/>
-                </a:solidFill>
-                <a:latin typeface="Arial"/>
-              </a:rPr>
-              <a:t>Claude Sonnet</a:t>
-            </a:r>
-          </a:p>
-        </p:txBody>
-      </p:sp>
-      <p:sp>
-        <p:nvSpPr>
-          <p:cNvPr id="43" name="TextBox 42"/>
-          <p:cNvSpPr txBox="1"/>
-          <p:nvPr/>
-        </p:nvSpPr>
-        <p:spPr>
-          <a:xfrm>
-            <a:off x="5474208" y="4206240"/>
-            <a:ext cx="2619542" cy="310896"/>
-          </a:xfrm>
-          <a:prstGeom prst="rect">
-            <a:avLst/>
-          </a:prstGeom>
-          <a:noFill/>
-        </p:spPr>
-        <p:txBody>
-          <a:bodyPr wrap="square" lIns="0" tIns="0" rIns="0" bIns="0" anchor="t">
-            <a:spAutoFit/>
-          </a:bodyPr>
-          <a:lstStyle/>
-          <a:p>
-            <a:pPr algn="l">
-              <a:lnSpc>
-                <a:spcPct val="100000"/>
-              </a:lnSpc>
-            </a:pPr>
-            <a:r>
-              <a:rPr sz="1400" b="1" i="0">
-                <a:solidFill>
-                  <a:srgbClr val="070A0E"/>
-                </a:solidFill>
-                <a:latin typeface="Arial"/>
-              </a:rPr>
-              <a:t>Reschedule-Cancel</a:t>
-            </a:r>
-          </a:p>
-        </p:txBody>
-      </p:sp>
-      <p:sp>
-        <p:nvSpPr>
-          <p:cNvPr id="44" name="Rounded Rectangle 43"/>
-          <p:cNvSpPr/>
-          <p:nvPr/>
-        </p:nvSpPr>
-        <p:spPr>
-          <a:xfrm>
-            <a:off x="5474208" y="4608576"/>
-            <a:ext cx="1801459" cy="256032"/>
-          </a:xfrm>
-          <a:prstGeom prst="roundRect">
-            <a:avLst>
-              <a:gd name="adj" fmla="val 50000"/>
-            </a:avLst>
-          </a:prstGeom>
-          <a:solidFill>
-            <a:srgbClr val="F0F0F1"/>
-          </a:solidFill>
-          <a:ln>
-            <a:noFill/>
-          </a:ln>
-          <a:effectLst/>
-        </p:spPr>
-        <p:style>
-          <a:lnRef idx="1">
-            <a:schemeClr val="accent1"/>
-          </a:lnRef>
-          <a:fillRef idx="3">
-            <a:schemeClr val="accent1"/>
-          </a:fillRef>
-          <a:effectRef idx="2">
-            <a:schemeClr val="accent1"/>
-          </a:effectRef>
-          <a:fontRef idx="minor">
-            <a:schemeClr val="lt1"/>
-          </a:fontRef>
-        </p:style>
-        <p:txBody>
-          <a:bodyPr wrap="none" lIns="0" tIns="0" rIns="0" bIns="0" rtlCol="0" anchor="ctr"/>
-          <a:lstStyle/>
-          <a:p>
-            <a:pPr algn="ctr"/>
-            <a:r>
-              <a:rPr sz="850" b="0">
-                <a:solidFill>
-                  <a:srgbClr val="4A4C4F"/>
-                </a:solidFill>
-                <a:latin typeface="Arial"/>
-              </a:rPr>
-              <a:t>intent: reschedule / cancel</a:t>
-            </a:r>
-          </a:p>
-        </p:txBody>
-      </p:sp>
-      <p:sp>
-        <p:nvSpPr>
-          <p:cNvPr id="45" name="TextBox 44"/>
-          <p:cNvSpPr txBox="1"/>
-          <p:nvPr/>
-        </p:nvSpPr>
-        <p:spPr>
-          <a:xfrm>
-            <a:off x="5474208" y="4974336"/>
-            <a:ext cx="3681983" cy="566928"/>
-          </a:xfrm>
-          <a:prstGeom prst="rect">
-            <a:avLst/>
-          </a:prstGeom>
-          <a:noFill/>
-        </p:spPr>
-        <p:txBody>
-          <a:bodyPr wrap="square" lIns="0" tIns="0" rIns="0" bIns="0" anchor="t">
-            <a:spAutoFit/>
-          </a:bodyPr>
-          <a:lstStyle/>
-          <a:p>
-            <a:pPr algn="l">
-              <a:lnSpc>
-                <a:spcPct val="105000"/>
-              </a:lnSpc>
-            </a:pPr>
-            <a:r>
-              <a:rPr sz="1050" b="0" i="0">
-                <a:solidFill>
-                  <a:srgbClr val="4A4C4F"/>
-                </a:solidFill>
-                <a:latin typeface="Arial"/>
-              </a:rPr>
-              <a:t>Moves or cancels an existing appointment.</a:t>
-            </a:r>
-          </a:p>
-        </p:txBody>
-      </p:sp>
-      <p:sp>
-        <p:nvSpPr>
-          <p:cNvPr id="46" name="Rounded Rectangle 45"/>
-          <p:cNvSpPr/>
-          <p:nvPr/>
-        </p:nvSpPr>
-        <p:spPr>
-          <a:xfrm>
-            <a:off x="5474208" y="5650992"/>
-            <a:ext cx="1255836" cy="256032"/>
-          </a:xfrm>
-          <a:prstGeom prst="roundRect">
-            <a:avLst>
-              <a:gd name="adj" fmla="val 50000"/>
-            </a:avLst>
-          </a:prstGeom>
-          <a:solidFill>
-            <a:srgbClr val="FAFAFA"/>
-          </a:solidFill>
-          <a:ln w="9525">
-            <a:solidFill>
-              <a:srgbClr val="DADADB"/>
-            </a:solidFill>
-          </a:ln>
-          <a:effectLst/>
-        </p:spPr>
-        <p:style>
-          <a:lnRef idx="1">
-            <a:schemeClr val="accent1"/>
-          </a:lnRef>
-          <a:fillRef idx="3">
-            <a:schemeClr val="accent1"/>
-          </a:fillRef>
-          <a:effectRef idx="2">
-            <a:schemeClr val="accent1"/>
-          </a:effectRef>
-          <a:fontRef idx="minor">
-            <a:schemeClr val="lt1"/>
-          </a:fontRef>
-        </p:style>
-        <p:txBody>
-          <a:bodyPr wrap="none" lIns="0" tIns="0" rIns="0" bIns="0" rtlCol="0" anchor="ctr"/>
-          <a:lstStyle/>
-          <a:p>
-            <a:pPr algn="ctr"/>
-            <a:r>
-              <a:rPr sz="850" b="0">
-                <a:solidFill>
-                  <a:srgbClr val="4A4C4F"/>
-                </a:solidFill>
-                <a:latin typeface="Arial"/>
-              </a:rPr>
-              <a:t>check_availability</a:t>
-            </a:r>
-          </a:p>
-        </p:txBody>
-      </p:sp>
-      <p:sp>
-        <p:nvSpPr>
-          <p:cNvPr id="47" name="Rounded Rectangle 46"/>
-          <p:cNvSpPr/>
-          <p:nvPr/>
-        </p:nvSpPr>
-        <p:spPr>
-          <a:xfrm>
-            <a:off x="6803196" y="5650992"/>
-            <a:ext cx="1255836" cy="256032"/>
-          </a:xfrm>
-          <a:prstGeom prst="roundRect">
-            <a:avLst>
-              <a:gd name="adj" fmla="val 50000"/>
-            </a:avLst>
-          </a:prstGeom>
-          <a:solidFill>
-            <a:srgbClr val="FAFAFA"/>
-          </a:solidFill>
-          <a:ln w="9525">
-            <a:solidFill>
-              <a:srgbClr val="DADADB"/>
-            </a:solidFill>
-          </a:ln>
-          <a:effectLst/>
-        </p:spPr>
-        <p:style>
-          <a:lnRef idx="1">
-            <a:schemeClr val="accent1"/>
-          </a:lnRef>
-          <a:fillRef idx="3">
-            <a:schemeClr val="accent1"/>
-          </a:fillRef>
-          <a:effectRef idx="2">
-            <a:schemeClr val="accent1"/>
-          </a:effectRef>
-          <a:fontRef idx="minor">
-            <a:schemeClr val="lt1"/>
-          </a:fontRef>
-        </p:style>
-        <p:txBody>
-          <a:bodyPr wrap="none" lIns="0" tIns="0" rIns="0" bIns="0" rtlCol="0" anchor="ctr"/>
-          <a:lstStyle/>
-          <a:p>
-            <a:pPr algn="ctr"/>
-            <a:r>
-              <a:rPr sz="850" b="0">
-                <a:solidFill>
-                  <a:srgbClr val="4A4C4F"/>
-                </a:solidFill>
-                <a:latin typeface="Arial"/>
-              </a:rPr>
-              <a:t>lookup_appointment</a:t>
-            </a:r>
-          </a:p>
-        </p:txBody>
-      </p:sp>
-      <p:sp>
-        <p:nvSpPr>
-          <p:cNvPr id="48" name="Rounded Rectangle 47"/>
-          <p:cNvSpPr/>
-          <p:nvPr/>
-        </p:nvSpPr>
-        <p:spPr>
-          <a:xfrm>
-            <a:off x="5474208" y="5971031"/>
-            <a:ext cx="1255836" cy="256032"/>
-          </a:xfrm>
-          <a:prstGeom prst="roundRect">
-            <a:avLst>
-              <a:gd name="adj" fmla="val 50000"/>
-            </a:avLst>
-          </a:prstGeom>
-          <a:solidFill>
-            <a:srgbClr val="FAFAFA"/>
-          </a:solidFill>
-          <a:ln w="9525">
-            <a:solidFill>
-              <a:srgbClr val="DADADB"/>
-            </a:solidFill>
-          </a:ln>
-          <a:effectLst/>
-        </p:spPr>
-        <p:style>
-          <a:lnRef idx="1">
-            <a:schemeClr val="accent1"/>
-          </a:lnRef>
-          <a:fillRef idx="3">
-            <a:schemeClr val="accent1"/>
-          </a:fillRef>
-          <a:effectRef idx="2">
-            <a:schemeClr val="accent1"/>
-          </a:effectRef>
-          <a:fontRef idx="minor">
-            <a:schemeClr val="lt1"/>
-          </a:fontRef>
-        </p:style>
-        <p:txBody>
-          <a:bodyPr wrap="none" lIns="0" tIns="0" rIns="0" bIns="0" rtlCol="0" anchor="ctr"/>
-          <a:lstStyle/>
-          <a:p>
-            <a:pPr algn="ctr"/>
-            <a:r>
-              <a:rPr sz="850" b="0">
-                <a:solidFill>
-                  <a:srgbClr val="4A4C4F"/>
-                </a:solidFill>
-                <a:latin typeface="Arial"/>
-              </a:rPr>
-              <a:t>update_appointment</a:t>
-            </a:r>
-          </a:p>
-        </p:txBody>
-      </p:sp>
-      <p:sp>
-        <p:nvSpPr>
-          <p:cNvPr id="49" name="Rounded Rectangle 48"/>
-          <p:cNvSpPr/>
-          <p:nvPr/>
-        </p:nvSpPr>
-        <p:spPr>
-          <a:xfrm>
-            <a:off x="6803196" y="5971031"/>
-            <a:ext cx="1255836" cy="256032"/>
-          </a:xfrm>
-          <a:prstGeom prst="roundRect">
-            <a:avLst>
-              <a:gd name="adj" fmla="val 50000"/>
-            </a:avLst>
-          </a:prstGeom>
-          <a:solidFill>
-            <a:srgbClr val="FAFAFA"/>
-          </a:solidFill>
-          <a:ln w="9525">
-            <a:solidFill>
-              <a:srgbClr val="DADADB"/>
-            </a:solidFill>
-          </a:ln>
-          <a:effectLst/>
-        </p:spPr>
-        <p:style>
-          <a:lnRef idx="1">
-            <a:schemeClr val="accent1"/>
-          </a:lnRef>
-          <a:fillRef idx="3">
-            <a:schemeClr val="accent1"/>
-          </a:fillRef>
-          <a:effectRef idx="2">
-            <a:schemeClr val="accent1"/>
-          </a:effectRef>
-          <a:fontRef idx="minor">
-            <a:schemeClr val="lt1"/>
-          </a:fontRef>
-        </p:style>
-        <p:txBody>
-          <a:bodyPr wrap="none" lIns="0" tIns="0" rIns="0" bIns="0" rtlCol="0" anchor="ctr"/>
-          <a:lstStyle/>
-          <a:p>
-            <a:pPr algn="ctr"/>
-            <a:r>
-              <a:rPr sz="850" b="0">
-                <a:solidFill>
-                  <a:srgbClr val="4A4C4F"/>
-                </a:solidFill>
-                <a:latin typeface="Arial"/>
-              </a:rPr>
-              <a:t>cancel_appointment</a:t>
-            </a:r>
-          </a:p>
-        </p:txBody>
-      </p:sp>
-      <p:sp>
-        <p:nvSpPr>
-          <p:cNvPr id="50" name="Rounded Rectangle 49"/>
-          <p:cNvSpPr/>
-          <p:nvPr/>
-        </p:nvSpPr>
-        <p:spPr>
-          <a:xfrm>
-            <a:off x="9723120" y="4005072"/>
-            <a:ext cx="4084319" cy="3017520"/>
-          </a:xfrm>
-          <a:prstGeom prst="roundRect">
-            <a:avLst>
-              <a:gd name="adj" fmla="val 3030"/>
-            </a:avLst>
-          </a:prstGeom>
-          <a:solidFill>
-            <a:srgbClr val="FFFFFF"/>
-          </a:solidFill>
-          <a:ln w="12700">
-            <a:solidFill>
-              <a:srgbClr val="DADADB"/>
-            </a:solidFill>
-          </a:ln>
-          <a:effectLst/>
-        </p:spPr>
-        <p:style>
-          <a:lnRef idx="1">
-            <a:schemeClr val="accent1"/>
-          </a:lnRef>
-          <a:fillRef idx="3">
-            <a:schemeClr val="accent1"/>
-          </a:fillRef>
-          <a:effectRef idx="2">
-            <a:schemeClr val="accent1"/>
-          </a:effectRef>
-          <a:fontRef idx="minor">
-            <a:schemeClr val="lt1"/>
-          </a:fontRef>
-        </p:style>
-        <p:txBody>
-          <a:bodyPr rtlCol="0" anchor="ctr"/>
-          <a:lstStyle/>
-          <a:p>
-            <a:pPr algn="ctr"/>
-            <a:endParaRPr/>
-          </a:p>
-        </p:txBody>
-      </p:sp>
-      <p:sp>
-        <p:nvSpPr>
-          <p:cNvPr id="51" name="Rounded Rectangle 50"/>
-          <p:cNvSpPr/>
-          <p:nvPr/>
-        </p:nvSpPr>
-        <p:spPr>
-          <a:xfrm>
-            <a:off x="12653558" y="4187952"/>
-            <a:ext cx="952713" cy="274320"/>
-          </a:xfrm>
-          <a:prstGeom prst="roundRect">
-            <a:avLst>
-              <a:gd name="adj" fmla="val 50000"/>
-            </a:avLst>
-          </a:prstGeom>
-          <a:solidFill>
-            <a:srgbClr val="F2E5FF"/>
-          </a:solidFill>
-          <a:ln>
-            <a:noFill/>
-          </a:ln>
-          <a:effectLst/>
-        </p:spPr>
-        <p:style>
-          <a:lnRef idx="1">
-            <a:schemeClr val="accent1"/>
-          </a:lnRef>
-          <a:fillRef idx="3">
-            <a:schemeClr val="accent1"/>
-          </a:fillRef>
-          <a:effectRef idx="2">
-            <a:schemeClr val="accent1"/>
-          </a:effectRef>
-          <a:fontRef idx="minor">
-            <a:schemeClr val="lt1"/>
-          </a:fontRef>
-        </p:style>
-        <p:txBody>
-          <a:bodyPr wrap="none" lIns="0" tIns="0" rIns="0" bIns="0" rtlCol="0" anchor="ctr"/>
-          <a:lstStyle/>
-          <a:p>
-            <a:pPr algn="ctr"/>
-            <a:r>
-              <a:rPr sz="850" b="1">
-                <a:solidFill>
-                  <a:srgbClr val="6600CC"/>
-                </a:solidFill>
-                <a:latin typeface="Arial"/>
-              </a:rPr>
-              <a:t>Claude Sonnet</a:t>
-            </a:r>
-          </a:p>
-        </p:txBody>
-      </p:sp>
-      <p:sp>
-        <p:nvSpPr>
-          <p:cNvPr id="52" name="TextBox 51"/>
-          <p:cNvSpPr txBox="1"/>
-          <p:nvPr/>
-        </p:nvSpPr>
-        <p:spPr>
-          <a:xfrm>
-            <a:off x="9924288" y="4206240"/>
-            <a:ext cx="2619542" cy="310896"/>
-          </a:xfrm>
-          <a:prstGeom prst="rect">
-            <a:avLst/>
-          </a:prstGeom>
-          <a:noFill/>
-        </p:spPr>
-        <p:txBody>
-          <a:bodyPr wrap="square" lIns="0" tIns="0" rIns="0" bIns="0" anchor="t">
-            <a:spAutoFit/>
-          </a:bodyPr>
-          <a:lstStyle/>
-          <a:p>
-            <a:pPr algn="l">
-              <a:lnSpc>
-                <a:spcPct val="100000"/>
-              </a:lnSpc>
-            </a:pPr>
-            <a:r>
-              <a:rPr sz="1400" b="1" i="0">
-                <a:solidFill>
-                  <a:srgbClr val="070A0E"/>
-                </a:solidFill>
-                <a:latin typeface="Arial"/>
-              </a:rPr>
-              <a:t>Emergency-Triage</a:t>
-            </a:r>
-          </a:p>
-        </p:txBody>
-      </p:sp>
-      <p:sp>
-        <p:nvSpPr>
-          <p:cNvPr id="53" name="Rounded Rectangle 52"/>
-          <p:cNvSpPr/>
-          <p:nvPr/>
-        </p:nvSpPr>
-        <p:spPr>
-          <a:xfrm>
-            <a:off x="9924288" y="4608576"/>
-            <a:ext cx="1195212" cy="256032"/>
-          </a:xfrm>
-          <a:prstGeom prst="roundRect">
-            <a:avLst>
-              <a:gd name="adj" fmla="val 50000"/>
-            </a:avLst>
-          </a:prstGeom>
-          <a:solidFill>
-            <a:srgbClr val="F0F0F1"/>
-          </a:solidFill>
-          <a:ln>
-            <a:noFill/>
-          </a:ln>
-          <a:effectLst/>
-        </p:spPr>
-        <p:style>
-          <a:lnRef idx="1">
-            <a:schemeClr val="accent1"/>
-          </a:lnRef>
-          <a:fillRef idx="3">
-            <a:schemeClr val="accent1"/>
-          </a:fillRef>
-          <a:effectRef idx="2">
-            <a:schemeClr val="accent1"/>
-          </a:effectRef>
-          <a:fontRef idx="minor">
-            <a:schemeClr val="lt1"/>
-          </a:fontRef>
-        </p:style>
-        <p:txBody>
-          <a:bodyPr wrap="none" lIns="0" tIns="0" rIns="0" bIns="0" rtlCol="0" anchor="ctr"/>
-          <a:lstStyle/>
-          <a:p>
-            <a:pPr algn="ctr"/>
-            <a:r>
-              <a:rPr sz="850" b="0">
-                <a:solidFill>
-                  <a:srgbClr val="4A4C4F"/>
-                </a:solidFill>
-                <a:latin typeface="Arial"/>
-              </a:rPr>
-              <a:t>intent: emergency</a:t>
-            </a:r>
-          </a:p>
-        </p:txBody>
-      </p:sp>
-      <p:sp>
-        <p:nvSpPr>
-          <p:cNvPr id="54" name="TextBox 53"/>
-          <p:cNvSpPr txBox="1"/>
-          <p:nvPr/>
-        </p:nvSpPr>
-        <p:spPr>
-          <a:xfrm>
-            <a:off x="9924288" y="4974336"/>
-            <a:ext cx="3681983" cy="566928"/>
-          </a:xfrm>
-          <a:prstGeom prst="rect">
-            <a:avLst/>
-          </a:prstGeom>
-          <a:noFill/>
-        </p:spPr>
-        <p:txBody>
-          <a:bodyPr wrap="square" lIns="0" tIns="0" rIns="0" bIns="0" anchor="t">
-            <a:spAutoFit/>
-          </a:bodyPr>
-          <a:lstStyle/>
-          <a:p>
-            <a:pPr algn="l">
-              <a:lnSpc>
-                <a:spcPct val="105000"/>
-              </a:lnSpc>
-            </a:pPr>
-            <a:r>
-              <a:rPr sz="1050" b="0" i="0">
-                <a:solidFill>
-                  <a:srgbClr val="4A4C4F"/>
-                </a:solidFill>
-                <a:latin typeface="Arial"/>
-              </a:rPr>
-              <a:t>Handles life-safety situations — advises, logs, and escalates for dispatch.</a:t>
-            </a:r>
-          </a:p>
-        </p:txBody>
-      </p:sp>
-      <p:sp>
-        <p:nvSpPr>
-          <p:cNvPr id="55" name="Rounded Rectangle 54"/>
-          <p:cNvSpPr/>
-          <p:nvPr/>
-        </p:nvSpPr>
-        <p:spPr>
-          <a:xfrm>
-            <a:off x="9924288" y="5650992"/>
-            <a:ext cx="1377086" cy="256032"/>
-          </a:xfrm>
-          <a:prstGeom prst="roundRect">
-            <a:avLst>
-              <a:gd name="adj" fmla="val 50000"/>
-            </a:avLst>
-          </a:prstGeom>
-          <a:solidFill>
-            <a:srgbClr val="FAFAFA"/>
-          </a:solidFill>
-          <a:ln w="9525">
-            <a:solidFill>
-              <a:srgbClr val="DADADB"/>
-            </a:solidFill>
-          </a:ln>
-          <a:effectLst/>
-        </p:spPr>
-        <p:style>
-          <a:lnRef idx="1">
-            <a:schemeClr val="accent1"/>
-          </a:lnRef>
-          <a:fillRef idx="3">
-            <a:schemeClr val="accent1"/>
-          </a:fillRef>
-          <a:effectRef idx="2">
-            <a:schemeClr val="accent1"/>
-          </a:effectRef>
-          <a:fontRef idx="minor">
-            <a:schemeClr val="lt1"/>
-          </a:fontRef>
-        </p:style>
-        <p:txBody>
-          <a:bodyPr wrap="none" lIns="0" tIns="0" rIns="0" bIns="0" rtlCol="0" anchor="ctr"/>
-          <a:lstStyle/>
-          <a:p>
-            <a:pPr algn="ctr"/>
-            <a:r>
-              <a:rPr sz="850" b="0">
-                <a:solidFill>
-                  <a:srgbClr val="4A4C4F"/>
-                </a:solidFill>
-                <a:latin typeface="Arial"/>
-              </a:rPr>
-              <a:t>match_emergency_rule</a:t>
-            </a:r>
-          </a:p>
-        </p:txBody>
-      </p:sp>
-      <p:sp>
-        <p:nvSpPr>
-          <p:cNvPr id="56" name="Rounded Rectangle 55"/>
-          <p:cNvSpPr/>
-          <p:nvPr/>
-        </p:nvSpPr>
-        <p:spPr>
-          <a:xfrm>
-            <a:off x="11374526" y="5650992"/>
-            <a:ext cx="952713" cy="256032"/>
-          </a:xfrm>
-          <a:prstGeom prst="roundRect">
-            <a:avLst>
-              <a:gd name="adj" fmla="val 50000"/>
-            </a:avLst>
-          </a:prstGeom>
-          <a:solidFill>
-            <a:srgbClr val="FAFAFA"/>
-          </a:solidFill>
-          <a:ln w="9525">
-            <a:solidFill>
-              <a:srgbClr val="DADADB"/>
-            </a:solidFill>
-          </a:ln>
-          <a:effectLst/>
-        </p:spPr>
-        <p:style>
-          <a:lnRef idx="1">
-            <a:schemeClr val="accent1"/>
-          </a:lnRef>
-          <a:fillRef idx="3">
-            <a:schemeClr val="accent1"/>
-          </a:fillRef>
-          <a:effectRef idx="2">
-            <a:schemeClr val="accent1"/>
-          </a:effectRef>
-          <a:fontRef idx="minor">
-            <a:schemeClr val="lt1"/>
-          </a:fontRef>
-        </p:style>
-        <p:txBody>
-          <a:bodyPr wrap="none" lIns="0" tIns="0" rIns="0" bIns="0" rtlCol="0" anchor="ctr"/>
-          <a:lstStyle/>
-          <a:p>
-            <a:pPr algn="ctr"/>
-            <a:r>
-              <a:rPr sz="850" b="0">
-                <a:solidFill>
-                  <a:srgbClr val="4A4C4F"/>
-                </a:solidFill>
-                <a:latin typeface="Arial"/>
-              </a:rPr>
-              <a:t>advise_safety</a:t>
-            </a:r>
-          </a:p>
-        </p:txBody>
-      </p:sp>
-      <p:sp>
-        <p:nvSpPr>
-          <p:cNvPr id="57" name="Rounded Rectangle 56"/>
-          <p:cNvSpPr/>
-          <p:nvPr/>
-        </p:nvSpPr>
-        <p:spPr>
-          <a:xfrm>
-            <a:off x="12400391" y="5650992"/>
-            <a:ext cx="1195212" cy="256032"/>
-          </a:xfrm>
-          <a:prstGeom prst="roundRect">
-            <a:avLst>
-              <a:gd name="adj" fmla="val 50000"/>
-            </a:avLst>
-          </a:prstGeom>
-          <a:solidFill>
-            <a:srgbClr val="FAFAFA"/>
-          </a:solidFill>
-          <a:ln w="9525">
-            <a:solidFill>
-              <a:srgbClr val="DADADB"/>
-            </a:solidFill>
-          </a:ln>
-          <a:effectLst/>
-        </p:spPr>
-        <p:style>
-          <a:lnRef idx="1">
-            <a:schemeClr val="accent1"/>
-          </a:lnRef>
-          <a:fillRef idx="3">
-            <a:schemeClr val="accent1"/>
-          </a:fillRef>
-          <a:effectRef idx="2">
-            <a:schemeClr val="accent1"/>
-          </a:effectRef>
-          <a:fontRef idx="minor">
-            <a:schemeClr val="lt1"/>
-          </a:fontRef>
-        </p:style>
-        <p:txBody>
-          <a:bodyPr wrap="none" lIns="0" tIns="0" rIns="0" bIns="0" rtlCol="0" anchor="ctr"/>
-          <a:lstStyle/>
-          <a:p>
-            <a:pPr algn="ctr"/>
-            <a:r>
-              <a:rPr sz="850" b="0">
-                <a:solidFill>
-                  <a:srgbClr val="4A4C4F"/>
-                </a:solidFill>
-                <a:latin typeface="Arial"/>
-              </a:rPr>
-              <a:t>escalate_to_human</a:t>
-            </a:r>
-          </a:p>
-        </p:txBody>
-      </p:sp>
-      <p:sp>
-        <p:nvSpPr>
-          <p:cNvPr id="58" name="Rounded Rectangle 57"/>
-          <p:cNvSpPr/>
-          <p:nvPr/>
-        </p:nvSpPr>
-        <p:spPr>
-          <a:xfrm>
-            <a:off x="9924288" y="5971031"/>
-            <a:ext cx="952713" cy="256032"/>
-          </a:xfrm>
-          <a:prstGeom prst="roundRect">
-            <a:avLst>
-              <a:gd name="adj" fmla="val 50000"/>
-            </a:avLst>
-          </a:prstGeom>
-          <a:solidFill>
-            <a:srgbClr val="FAFAFA"/>
-          </a:solidFill>
-          <a:ln w="9525">
-            <a:solidFill>
-              <a:srgbClr val="DADADB"/>
-            </a:solidFill>
-          </a:ln>
-          <a:effectLst/>
-        </p:spPr>
-        <p:style>
-          <a:lnRef idx="1">
-            <a:schemeClr val="accent1"/>
-          </a:lnRef>
-          <a:fillRef idx="3">
-            <a:schemeClr val="accent1"/>
-          </a:fillRef>
-          <a:effectRef idx="2">
-            <a:schemeClr val="accent1"/>
-          </a:effectRef>
-          <a:fontRef idx="minor">
-            <a:schemeClr val="lt1"/>
-          </a:fontRef>
-        </p:style>
-        <p:txBody>
-          <a:bodyPr wrap="none" lIns="0" tIns="0" rIns="0" bIns="0" rtlCol="0" anchor="ctr"/>
-          <a:lstStyle/>
-          <a:p>
-            <a:pPr algn="ctr"/>
-            <a:r>
-              <a:rPr sz="850" b="0">
-                <a:solidFill>
-                  <a:srgbClr val="4A4C4F"/>
-                </a:solidFill>
-                <a:latin typeface="Arial"/>
-              </a:rPr>
-              <a:t>log_emergency</a:t>
-            </a:r>
-          </a:p>
-        </p:txBody>
-      </p:sp>
-      <p:sp>
-        <p:nvSpPr>
-          <p:cNvPr id="59" name="Rounded Rectangle 58"/>
-          <p:cNvSpPr/>
-          <p:nvPr/>
-        </p:nvSpPr>
-        <p:spPr>
-          <a:xfrm>
-            <a:off x="822960" y="7269480"/>
-            <a:ext cx="2090318" cy="274320"/>
-          </a:xfrm>
-          <a:prstGeom prst="roundRect">
-            <a:avLst>
-              <a:gd name="adj" fmla="val 50000"/>
-            </a:avLst>
-          </a:prstGeom>
-          <a:solidFill>
-            <a:srgbClr val="E7EFFC"/>
-          </a:solidFill>
-          <a:ln>
-            <a:noFill/>
-          </a:ln>
-          <a:effectLst/>
-        </p:spPr>
-        <p:style>
-          <a:lnRef idx="1">
-            <a:schemeClr val="accent1"/>
-          </a:lnRef>
-          <a:fillRef idx="3">
-            <a:schemeClr val="accent1"/>
-          </a:fillRef>
-          <a:effectRef idx="2">
-            <a:schemeClr val="accent1"/>
-          </a:effectRef>
-          <a:fontRef idx="minor">
-            <a:schemeClr val="lt1"/>
-          </a:fontRef>
-        </p:style>
-        <p:txBody>
-          <a:bodyPr wrap="none" lIns="0" tIns="0" rIns="0" bIns="0" rtlCol="0" anchor="ctr"/>
-          <a:lstStyle/>
-          <a:p>
-            <a:pPr algn="ctr"/>
-            <a:r>
-              <a:rPr sz="900" b="1">
-                <a:solidFill>
-                  <a:srgbClr val="115ACB"/>
-                </a:solidFill>
-                <a:latin typeface="Arial"/>
-              </a:rPr>
-              <a:t>Claude Haiku — classifier (AI)</a:t>
-            </a:r>
-          </a:p>
-        </p:txBody>
-      </p:sp>
-      <p:sp>
-        <p:nvSpPr>
-          <p:cNvPr id="60" name="Rounded Rectangle 59"/>
-          <p:cNvSpPr/>
-          <p:nvPr/>
-        </p:nvSpPr>
-        <p:spPr>
-          <a:xfrm>
-            <a:off x="3114446" y="7269480"/>
-            <a:ext cx="2154509" cy="274320"/>
-          </a:xfrm>
-          <a:prstGeom prst="roundRect">
-            <a:avLst>
-              <a:gd name="adj" fmla="val 50000"/>
-            </a:avLst>
-          </a:prstGeom>
-          <a:solidFill>
-            <a:srgbClr val="F2E5FF"/>
-          </a:solidFill>
-          <a:ln>
-            <a:noFill/>
-          </a:ln>
-          <a:effectLst/>
-        </p:spPr>
-        <p:style>
-          <a:lnRef idx="1">
-            <a:schemeClr val="accent1"/>
-          </a:lnRef>
-          <a:fillRef idx="3">
-            <a:schemeClr val="accent1"/>
-          </a:fillRef>
-          <a:effectRef idx="2">
-            <a:schemeClr val="accent1"/>
-          </a:effectRef>
-          <a:fontRef idx="minor">
-            <a:schemeClr val="lt1"/>
-          </a:fontRef>
-        </p:style>
-        <p:txBody>
-          <a:bodyPr wrap="none" lIns="0" tIns="0" rIns="0" bIns="0" rtlCol="0" anchor="ctr"/>
-          <a:lstStyle/>
-          <a:p>
-            <a:pPr algn="ctr"/>
-            <a:r>
-              <a:rPr sz="900" b="1">
-                <a:solidFill>
-                  <a:srgbClr val="6600CC"/>
-                </a:solidFill>
-                <a:latin typeface="Arial"/>
-              </a:rPr>
-              <a:t>Claude Sonnet — specialist (AI)</a:t>
-            </a:r>
-          </a:p>
-        </p:txBody>
-      </p:sp>
-      <p:sp>
-        <p:nvSpPr>
-          <p:cNvPr id="61" name="Rounded Rectangle 60"/>
-          <p:cNvSpPr/>
-          <p:nvPr/>
-        </p:nvSpPr>
-        <p:spPr>
-          <a:xfrm>
-            <a:off x="5470123" y="7269480"/>
-            <a:ext cx="549737" cy="274320"/>
-          </a:xfrm>
-          <a:prstGeom prst="roundRect">
-            <a:avLst>
-              <a:gd name="adj" fmla="val 50000"/>
-            </a:avLst>
-          </a:prstGeom>
-          <a:solidFill>
-            <a:srgbClr val="F0F0F1"/>
-          </a:solidFill>
-          <a:ln>
-            <a:noFill/>
-          </a:ln>
-          <a:effectLst/>
-        </p:spPr>
-        <p:style>
-          <a:lnRef idx="1">
-            <a:schemeClr val="accent1"/>
-          </a:lnRef>
-          <a:fillRef idx="3">
-            <a:schemeClr val="accent1"/>
-          </a:fillRef>
-          <a:effectRef idx="2">
-            <a:schemeClr val="accent1"/>
-          </a:effectRef>
-          <a:fontRef idx="minor">
-            <a:schemeClr val="lt1"/>
-          </a:fontRef>
-        </p:style>
-        <p:txBody>
-          <a:bodyPr wrap="none" lIns="0" tIns="0" rIns="0" bIns="0" rtlCol="0" anchor="ctr"/>
-          <a:lstStyle/>
-          <a:p>
-            <a:pPr algn="ctr"/>
-            <a:r>
-              <a:rPr sz="900" b="1">
-                <a:solidFill>
-                  <a:srgbClr val="4A4C4F"/>
-                </a:solidFill>
-                <a:latin typeface="Arial"/>
-              </a:rPr>
-              <a:t>intent</a:t>
-            </a:r>
-          </a:p>
-        </p:txBody>
-      </p:sp>
-      <p:sp>
-        <p:nvSpPr>
-          <p:cNvPr id="62" name="Rounded Rectangle 61"/>
-          <p:cNvSpPr/>
-          <p:nvPr/>
-        </p:nvSpPr>
-        <p:spPr>
-          <a:xfrm>
-            <a:off x="6221028" y="7269480"/>
-            <a:ext cx="421355" cy="274320"/>
-          </a:xfrm>
-          <a:prstGeom prst="roundRect">
-            <a:avLst>
-              <a:gd name="adj" fmla="val 50000"/>
-            </a:avLst>
-          </a:prstGeom>
-          <a:solidFill>
-            <a:srgbClr val="F0F0F1"/>
-          </a:solidFill>
-          <a:ln>
-            <a:noFill/>
-          </a:ln>
-          <a:effectLst/>
-        </p:spPr>
-        <p:style>
-          <a:lnRef idx="1">
-            <a:schemeClr val="accent1"/>
-          </a:lnRef>
-          <a:fillRef idx="3">
-            <a:schemeClr val="accent1"/>
-          </a:fillRef>
-          <a:effectRef idx="2">
-            <a:schemeClr val="accent1"/>
-          </a:effectRef>
-          <a:fontRef idx="minor">
-            <a:schemeClr val="lt1"/>
-          </a:fontRef>
-        </p:style>
-        <p:txBody>
-          <a:bodyPr wrap="none" lIns="0" tIns="0" rIns="0" bIns="0" rtlCol="0" anchor="ctr"/>
-          <a:lstStyle/>
-          <a:p>
-            <a:pPr algn="ctr"/>
-            <a:r>
-              <a:rPr sz="900" b="1">
-                <a:solidFill>
-                  <a:srgbClr val="4A4C4F"/>
-                </a:solidFill>
-                <a:latin typeface="Arial"/>
-              </a:rPr>
-              <a:t>tool</a:t>
-            </a:r>
-          </a:p>
-        </p:txBody>
-      </p:sp>
-    </p:spTree>
-    <p:extLst>
-      <p:ext uri="{BB962C8B-B14F-4D97-AF65-F5344CB8AC3E}">
-        <p14:creationId xmlns:p14="http://schemas.microsoft.com/office/powerpoint/2010/main" val="1590284914"/>
       </p:ext>
     </p:extLst>
   </p:cSld>
